--- a/docs/presentacion/NotifyHub.pptx
+++ b/docs/presentacion/NotifyHub.pptx
@@ -16,9 +16,12 @@
     <p:sldId id="264" r:id="rId10"/>
     <p:sldId id="265" r:id="rId11"/>
     <p:sldId id="266" r:id="rId12"/>
+    <p:sldId id="267" r:id="rId13"/>
+    <p:sldId id="268" r:id="rId14"/>
+    <p:sldId id="269" r:id="rId15"/>
   </p:sldIdLst>
   <p:notesMasterIdLst>
-    <p:notesMasterId r:id="rId13"/>
+    <p:notesMasterId r:id="rId16"/>
   </p:notesMasterIdLst>
   <p:sldSz cx="12192000" cy="6858000"/>
   <p:notesSz cx="6858000" cy="12192000"/>
@@ -117,39 +120,46 @@
   <p:extLst>
     <p:ext uri="{521415D9-36F7-43E2-AB2F-B90AF26B5E84}">
       <p14:sectionLst xmlns:p14="http://schemas.microsoft.com/office/powerpoint/2010/main">
-        <p14:section name="Apertura" id="{15992697-04da-e044-c901-b54bf8acef0b}">
+        <p14:section name="Apertura" id="{5f8771f8-8d91-c238-94be-5088f32ed4ad}">
           <p14:sldIdLst>
             <p14:sldId id="256"/>
           </p14:sldIdLst>
         </p14:section>
-        <p14:section name="La idea" id="{bdbbf744-d971-72f5-7b1f-793645166178}">
+        <p14:section name="La idea" id="{96a04726-064e-0b81-d83e-38b979683008}">
           <p14:sldIdLst>
             <p14:sldId id="257"/>
           </p14:sldIdLst>
         </p14:section>
-        <p14:section name="Demostración" id="{9262d0c2-ea36-1be3-9c54-40ff437cdf60}">
+        <p14:section name="Demostración" id="{968299f4-4944-d9bd-3b28-10c155867d84}">
           <p14:sldIdLst>
             <p14:sldId id="258"/>
             <p14:sldId id="259"/>
           </p14:sldIdLst>
         </p14:section>
-        <p14:section name="Cómo está hecho" id="{2aaf6799-67ec-b1d4-c44a-2a14cf1881d8}">
+        <p14:section name="Cómo está hecho" id="{fd7119b6-86a6-17c8-8789-b87f0f8f5bca}">
           <p14:sldIdLst>
             <p14:sldId id="260"/>
             <p14:sldId id="261"/>
             <p14:sldId id="262"/>
           </p14:sldIdLst>
         </p14:section>
-        <p14:section name="Open source" id="{0e17f3ea-05ff-db32-1078-1e3597b0292a}">
+        <p14:section name="Ingeniería" id="{ebe9a8d1-5e69-a79a-6aaa-080d9ae67fac}">
           <p14:sldIdLst>
             <p14:sldId id="263"/>
             <p14:sldId id="264"/>
+            <p14:sldId id="265"/>
           </p14:sldIdLst>
         </p14:section>
-        <p14:section name="Cierre" id="{5be8a5bd-c7fa-41f4-1718-c261ac4151d5}">
+        <p14:section name="Open source" id="{3b491163-de55-2cb1-ff28-97c9b6dc8045}">
           <p14:sldIdLst>
-            <p14:sldId id="265"/>
             <p14:sldId id="266"/>
+            <p14:sldId id="267"/>
+          </p14:sldIdLst>
+        </p14:section>
+        <p14:section name="Cierre" id="{ffabd003-8ce1-168c-10b5-0da9ffc71d5a}">
+          <p14:sldIdLst>
+            <p14:sldId id="268"/>
+            <p14:sldId id="269"/>
           </p14:sldIdLst>
         </p14:section>
       </p14:sectionLst>
@@ -556,7 +566,7 @@
           <a:p>
             <a:r>
               <a:rPr lang="en-US" dirty="0"/>
-              <a:t>Buenas tardes. Soy Andreea y voy a presentar NotifyHub, el proyecto que construimos José Raúl y yo en conjunto para Arquitectura de Software. NotifyHub es un servicio que manda notificaciones por correo, SMS, push y webhook, y se asegura de que lleguen: si un canal falla, el sistema prueba otro solo. El logo cuenta esa idea: una ruta principal y una de respaldo que llegan al mismo destino. Dura unos ocho minutos y termina con una demostración.</a:t>
+              <a:t>Buenas tardes. Soy Andreea y voy a presentar NotifyHub, el proyecto que construimos José Raúl y yo en conjunto para Arquitectura de Software. NotifyHub es un servicio que manda notificaciones por correo, SMS, push y webhook, y se asegura de que lleguen: si un canal falla, el sistema prueba otro solo. El logo cuenta esa idea: una ruta principal y una de respaldo que llegan al mismo destino. Dura unos diez minutos y termina con una demostración.</a:t>
             </a:r>
             <a:endParaRPr lang="en-US" dirty="0"/>
           </a:p>
@@ -644,7 +654,7 @@
           <a:p>
             <a:r>
               <a:rPr lang="en-US" dirty="0"/>
-              <a:t>Lo que sigue: en el Sprint 2 conectamos los proveedores reales; en el Sprint 3, el circuito de corte y la revisión de salud; y en el Sprint 4, el outbox, las suscripciones por webhook, las pruebas de carga y la entrega final el cuatro de diciembre. En paralelo, el equipo decidirá cuándo hacer público el repositorio y publicar los paquetes.</a:t>
+              <a:t>Cada cambio pasa por la misma vía. Con cada push, GitHub Actions revisa formato, lint y tipos, corre las pruebas, construye y levanta una prueba de humo con la API y un Postgres reales. El despliegue a producción es un clic a propósito: aplica las migraciones en Neon y publica los Workers. Las decisiones grandes están escritas en siete ADRs. Las que cambiamos no se borran: por ejemplo, empezamos con BullMQ y Redis y con Cloudflare Containers, y la ADR siete explica por qué pasamos a Workers. Y todo el trabajo está en Jira: cuarenta y una historias repartidas en cinco sprints.</a:t>
             </a:r>
             <a:endParaRPr lang="en-US" dirty="0"/>
           </a:p>
@@ -732,7 +742,7 @@
           <a:p>
             <a:r>
               <a:rPr lang="en-US" dirty="0"/>
-              <a:t>Eso es NotifyHub: un mensaje que siempre llega, porque tiene una ruta de respaldo. Gracias por su atención. Estoy a sus órdenes para las preguntas.</a:t>
+              <a:t>Además de la aplicación, dejamos dos paquetes reutilizables. El SDK de TypeScript, sin dependencias, sirve para crear notificaciones y consultar su ruta desde cualquier programa. Y los componentes de React dibujan la ruta del mensaje con la misma identidad visual. La consola que acabamos de ver está hecha con esos dos paquetes. Están pensados como código abierto con licencia MIT y tienen cuarenta y cinco pruebas automáticas. Todavía no los publicamos en npm ni hacemos público el repositorio: falta que el equipo lo decida.</a:t>
             </a:r>
             <a:endParaRPr lang="en-US" dirty="0"/>
           </a:p>
@@ -756,6 +766,270 @@
             <a:fld id="{F7021451-1387-4CA6-816F-3879F97B5CBC}" type="slidenum">
               <a:rPr lang="en-US"/>
               <a:t>11</a:t>
+            </a:fld>
+            <a:endParaRPr lang="en-US"/>
+          </a:p>
+        </p:txBody>
+      </p:sp>
+    </p:spTree>
+    <p:extLst>
+      <p:ext uri="{BB962C8B-B14F-4D97-AF65-F5344CB8AC3E}">
+        <p14:creationId xmlns:p14="http://schemas.microsoft.com/office/powerpoint/2010/main" val="1024086991"/>
+      </p:ext>
+    </p:extLst>
+  </p:cSld>
+  <p:clrMapOvr>
+    <a:masterClrMapping/>
+  </p:clrMapOvr>
+</p:notes>
+</file>
+
+<file path=ppt/notesSlides/notesSlide12.xml><?xml version="1.0" encoding="utf-8"?>
+<p:notes xmlns:a="http://schemas.openxmlformats.org/drawingml/2006/main" xmlns:r="http://schemas.openxmlformats.org/officeDocument/2006/relationships" xmlns:p="http://schemas.openxmlformats.org/presentationml/2006/main">
+  <p:cSld>
+    <p:spTree>
+      <p:nvGrpSpPr>
+        <p:cNvPr id="1" name=""/>
+        <p:cNvGrpSpPr/>
+        <p:nvPr/>
+      </p:nvGrpSpPr>
+      <p:grpSpPr>
+        <a:xfrm>
+          <a:off x="0" y="0"/>
+          <a:ext cx="0" cy="0"/>
+          <a:chOff x="0" y="0"/>
+          <a:chExt cx="0" cy="0"/>
+        </a:xfrm>
+      </p:grpSpPr>
+      <p:sp>
+        <p:nvSpPr>
+          <p:cNvPr id="2" name="Slide Image Placeholder 1"/>
+          <p:cNvSpPr>
+            <a:spLocks noGrp="1" noRot="1" noChangeAspect="1"/>
+          </p:cNvSpPr>
+          <p:nvPr>
+            <p:ph type="sldImg"/>
+          </p:nvPr>
+        </p:nvSpPr>
+        <p:spPr/>
+      </p:sp>
+      <p:sp>
+        <p:nvSpPr>
+          <p:cNvPr id="3" name="Notes Placeholder 2"/>
+          <p:cNvSpPr>
+            <a:spLocks noGrp="1"/>
+          </p:cNvSpPr>
+          <p:nvPr>
+            <p:ph type="body" idx="1"/>
+          </p:nvPr>
+        </p:nvSpPr>
+        <p:spPr/>
+        <p:txBody>
+          <a:bodyPr/>
+          <a:lstStyle/>
+          <a:p>
+            <a:r>
+              <a:rPr lang="en-US" dirty="0"/>
+              <a:t>Quiero ser clara con lo que es real y lo que no. Es real la recepción con idempotencia y límite de solicitudes, las colas, la máquina de estados, los reintentos, el fallback, la bitácora en Postgres, la API, el SDK y la consola. Lo simulado son los proveedores: SendGrid, Twilio, Firebase y el webhook responden según su salud, para poder demostrar el fallback sin credenciales de pago. Falta conectar los proveedores reales, el outbox con suscripciones por webhook y el circuito de corte. Tenemos ciento cuarenta y ocho pruebas automáticas y revisamos que no haya secretos en el historial.</a:t>
+            </a:r>
+            <a:endParaRPr lang="en-US" dirty="0"/>
+          </a:p>
+        </p:txBody>
+      </p:sp>
+      <p:sp>
+        <p:nvSpPr>
+          <p:cNvPr id="4" name="Slide Number Placeholder 3"/>
+          <p:cNvSpPr>
+            <a:spLocks noGrp="1"/>
+          </p:cNvSpPr>
+          <p:nvPr>
+            <p:ph type="sldNum" sz="quarter" idx="10"/>
+          </p:nvPr>
+        </p:nvSpPr>
+        <p:spPr/>
+        <p:txBody>
+          <a:bodyPr/>
+          <a:lstStyle/>
+          <a:p>
+            <a:fld id="{F7021451-1387-4CA6-816F-3879F97B5CBC}" type="slidenum">
+              <a:rPr lang="en-US"/>
+              <a:t>12</a:t>
+            </a:fld>
+            <a:endParaRPr lang="en-US"/>
+          </a:p>
+        </p:txBody>
+      </p:sp>
+    </p:spTree>
+    <p:extLst>
+      <p:ext uri="{BB962C8B-B14F-4D97-AF65-F5344CB8AC3E}">
+        <p14:creationId xmlns:p14="http://schemas.microsoft.com/office/powerpoint/2010/main" val="1024086991"/>
+      </p:ext>
+    </p:extLst>
+  </p:cSld>
+  <p:clrMapOvr>
+    <a:masterClrMapping/>
+  </p:clrMapOvr>
+</p:notes>
+</file>
+
+<file path=ppt/notesSlides/notesSlide13.xml><?xml version="1.0" encoding="utf-8"?>
+<p:notes xmlns:a="http://schemas.openxmlformats.org/drawingml/2006/main" xmlns:r="http://schemas.openxmlformats.org/officeDocument/2006/relationships" xmlns:p="http://schemas.openxmlformats.org/presentationml/2006/main">
+  <p:cSld>
+    <p:spTree>
+      <p:nvGrpSpPr>
+        <p:cNvPr id="1" name=""/>
+        <p:cNvGrpSpPr/>
+        <p:nvPr/>
+      </p:nvGrpSpPr>
+      <p:grpSpPr>
+        <a:xfrm>
+          <a:off x="0" y="0"/>
+          <a:ext cx="0" cy="0"/>
+          <a:chOff x="0" y="0"/>
+          <a:chExt cx="0" cy="0"/>
+        </a:xfrm>
+      </p:grpSpPr>
+      <p:sp>
+        <p:nvSpPr>
+          <p:cNvPr id="2" name="Slide Image Placeholder 1"/>
+          <p:cNvSpPr>
+            <a:spLocks noGrp="1" noRot="1" noChangeAspect="1"/>
+          </p:cNvSpPr>
+          <p:nvPr>
+            <p:ph type="sldImg"/>
+          </p:nvPr>
+        </p:nvSpPr>
+        <p:spPr/>
+      </p:sp>
+      <p:sp>
+        <p:nvSpPr>
+          <p:cNvPr id="3" name="Notes Placeholder 2"/>
+          <p:cNvSpPr>
+            <a:spLocks noGrp="1"/>
+          </p:cNvSpPr>
+          <p:nvPr>
+            <p:ph type="body" idx="1"/>
+          </p:nvPr>
+        </p:nvSpPr>
+        <p:spPr/>
+        <p:txBody>
+          <a:bodyPr/>
+          <a:lstStyle/>
+          <a:p>
+            <a:r>
+              <a:rPr lang="en-US" dirty="0"/>
+              <a:t>Lo que sigue: en el Sprint 2 conectamos los proveedores reales; en el Sprint 3, el circuito de corte y la revisión de salud; y en el Sprint 4, el outbox, las suscripciones por webhook, las pruebas de carga y la entrega final el cuatro de diciembre. En paralelo, el equipo decidirá cuándo hacer público el repositorio y publicar los paquetes.</a:t>
+            </a:r>
+            <a:endParaRPr lang="en-US" dirty="0"/>
+          </a:p>
+        </p:txBody>
+      </p:sp>
+      <p:sp>
+        <p:nvSpPr>
+          <p:cNvPr id="4" name="Slide Number Placeholder 3"/>
+          <p:cNvSpPr>
+            <a:spLocks noGrp="1"/>
+          </p:cNvSpPr>
+          <p:nvPr>
+            <p:ph type="sldNum" sz="quarter" idx="10"/>
+          </p:nvPr>
+        </p:nvSpPr>
+        <p:spPr/>
+        <p:txBody>
+          <a:bodyPr/>
+          <a:lstStyle/>
+          <a:p>
+            <a:fld id="{F7021451-1387-4CA6-816F-3879F97B5CBC}" type="slidenum">
+              <a:rPr lang="en-US"/>
+              <a:t>13</a:t>
+            </a:fld>
+            <a:endParaRPr lang="en-US"/>
+          </a:p>
+        </p:txBody>
+      </p:sp>
+    </p:spTree>
+    <p:extLst>
+      <p:ext uri="{BB962C8B-B14F-4D97-AF65-F5344CB8AC3E}">
+        <p14:creationId xmlns:p14="http://schemas.microsoft.com/office/powerpoint/2010/main" val="1024086991"/>
+      </p:ext>
+    </p:extLst>
+  </p:cSld>
+  <p:clrMapOvr>
+    <a:masterClrMapping/>
+  </p:clrMapOvr>
+</p:notes>
+</file>
+
+<file path=ppt/notesSlides/notesSlide14.xml><?xml version="1.0" encoding="utf-8"?>
+<p:notes xmlns:a="http://schemas.openxmlformats.org/drawingml/2006/main" xmlns:r="http://schemas.openxmlformats.org/officeDocument/2006/relationships" xmlns:p="http://schemas.openxmlformats.org/presentationml/2006/main">
+  <p:cSld>
+    <p:spTree>
+      <p:nvGrpSpPr>
+        <p:cNvPr id="1" name=""/>
+        <p:cNvGrpSpPr/>
+        <p:nvPr/>
+      </p:nvGrpSpPr>
+      <p:grpSpPr>
+        <a:xfrm>
+          <a:off x="0" y="0"/>
+          <a:ext cx="0" cy="0"/>
+          <a:chOff x="0" y="0"/>
+          <a:chExt cx="0" cy="0"/>
+        </a:xfrm>
+      </p:grpSpPr>
+      <p:sp>
+        <p:nvSpPr>
+          <p:cNvPr id="2" name="Slide Image Placeholder 1"/>
+          <p:cNvSpPr>
+            <a:spLocks noGrp="1" noRot="1" noChangeAspect="1"/>
+          </p:cNvSpPr>
+          <p:nvPr>
+            <p:ph type="sldImg"/>
+          </p:nvPr>
+        </p:nvSpPr>
+        <p:spPr/>
+      </p:sp>
+      <p:sp>
+        <p:nvSpPr>
+          <p:cNvPr id="3" name="Notes Placeholder 2"/>
+          <p:cNvSpPr>
+            <a:spLocks noGrp="1"/>
+          </p:cNvSpPr>
+          <p:nvPr>
+            <p:ph type="body" idx="1"/>
+          </p:nvPr>
+        </p:nvSpPr>
+        <p:spPr/>
+        <p:txBody>
+          <a:bodyPr/>
+          <a:lstStyle/>
+          <a:p>
+            <a:r>
+              <a:rPr lang="en-US" dirty="0"/>
+              <a:t>Eso es NotifyHub: un mensaje que siempre llega, porque tiene una ruta de respaldo. Gracias por su atención. Estoy a sus órdenes para las preguntas.</a:t>
+            </a:r>
+            <a:endParaRPr lang="en-US" dirty="0"/>
+          </a:p>
+        </p:txBody>
+      </p:sp>
+      <p:sp>
+        <p:nvSpPr>
+          <p:cNvPr id="4" name="Slide Number Placeholder 3"/>
+          <p:cNvSpPr>
+            <a:spLocks noGrp="1"/>
+          </p:cNvSpPr>
+          <p:nvPr>
+            <p:ph type="sldNum" sz="quarter" idx="10"/>
+          </p:nvPr>
+        </p:nvSpPr>
+        <p:spPr/>
+        <p:txBody>
+          <a:bodyPr/>
+          <a:lstStyle/>
+          <a:p>
+            <a:fld id="{F7021451-1387-4CA6-816F-3879F97B5CBC}" type="slidenum">
+              <a:rPr lang="en-US"/>
+              <a:t>14</a:t>
             </a:fld>
             <a:endParaRPr lang="en-US"/>
           </a:p>
@@ -1348,7 +1622,7 @@
           <a:p>
             <a:r>
               <a:rPr lang="en-US" dirty="0"/>
-              <a:t>Además de la aplicación, dejamos dos paquetes reutilizables. El SDK de TypeScript, sin dependencias, sirve para crear notificaciones y consultar su ruta desde cualquier programa. Y los componentes de React dibujan la ruta del mensaje con la misma identidad visual. La consola que acabamos de ver está hecha con esos dos paquetes. Están pensados como código abierto con licencia MIT y tienen cuarenta y cinco pruebas automáticas. Todavía no los publicamos en npm ni hacemos público el repositorio: falta que el equipo lo decida.</a:t>
+              <a:t>El código está en capas, como una cebolla. En el centro está el dominio: las notificaciones, sus eventos y la máquina de estados. Son reglas puras, no saben si hay Postgres, Twilio o Cloudflare. Encima van los casos de uso, luego los adaptadores que hablan con la base de datos y con los proveedores, y afuera las aplicaciones: la API, el despachador y la consola. Las dependencias siempre apuntan hacia el dominio, por eso podemos cambiar de proveedor o de base de datos sin tocar las reglas del negocio.</a:t>
             </a:r>
             <a:endParaRPr lang="en-US" dirty="0"/>
           </a:p>
@@ -1436,7 +1710,7 @@
           <a:p>
             <a:r>
               <a:rPr lang="en-US" dirty="0"/>
-              <a:t>Quiero ser clara con lo que es real y lo que no. Es real la recepción con idempotencia y límite de solicitudes, las colas, la máquina de estados, los reintentos, el fallback, la bitácora en Postgres, la API, el SDK y la consola. Lo simulado son los proveedores: SendGrid, Twilio, Firebase y el webhook responden según su salud, para poder demostrar el fallback sin credenciales de pago. Falta conectar los proveedores reales, el outbox con suscripciones por webhook y el circuito de corte. Tenemos ciento cuarenta y ocho pruebas automáticas y revisamos que no haya secretos en el historial.</a:t>
+              <a:t>Todo vive en un solo repositorio. Arriba están las aplicaciones y abajo los paquetes que comparten. pnpm instala las dependencias una sola vez para todos, y Turborepo construye y prueba cada paquete en el orden correcto. Así, si cambiamos el dominio, un solo comando prueba de inmediato todo lo que depende de él.</a:t>
             </a:r>
             <a:endParaRPr lang="en-US" dirty="0"/>
           </a:p>
@@ -2753,7 +3027,7 @@
                   <a:schemeClr val="tx1"/>
                 </a:solidFill>
               </a:rPr>
-              <a:t>Lo que sigue hasta la entrega final</a:t>
+              <a:t>Cada cambio, verificado antes de salir</a:t>
             </a:r>
             <a:endParaRPr lang="en-US" sz="3200" dirty="0"/>
           </a:p>
@@ -2761,18 +3035,567 @@
       </p:sp>
       <p:sp>
         <p:nvSpPr>
-          <p:cNvPr id="3" name="Paso 1"/>
-          <p:cNvSpPr/>
-          <p:nvPr/>
-        </p:nvSpPr>
-        <p:spPr>
-          <a:xfrm>
-            <a:off x="548640" y="1554480"/>
-            <a:ext cx="11064240" cy="1005840"/>
+          <p:cNvPr id="3" name="Línea CI"/>
+          <p:cNvSpPr/>
+          <p:nvPr/>
+        </p:nvSpPr>
+        <p:spPr>
+          <a:xfrm>
+            <a:off x="914400" y="2286000"/>
+            <a:ext cx="8534400" cy="91440"/>
           </a:xfrm>
           <a:prstGeom prst="roundRect">
             <a:avLst>
-              <a:gd name="adj" fmla="val 10909"/>
+              <a:gd name="adj" fmla="val 50000"/>
+            </a:avLst>
+          </a:prstGeom>
+          <a:solidFill>
+            <a:schemeClr val="tx1"/>
+          </a:solidFill>
+          <a:ln w="12700">
+            <a:solidFill>
+              <a:schemeClr val="tx1"/>
+            </a:solidFill>
+            <a:prstDash val="solid"/>
+          </a:ln>
+        </p:spPr>
+      </p:sp>
+      <p:sp>
+        <p:nvSpPr>
+          <p:cNvPr id="4" name="Tramo manual"/>
+          <p:cNvSpPr/>
+          <p:nvPr/>
+        </p:nvSpPr>
+        <p:spPr>
+          <a:xfrm>
+            <a:off x="9448800" y="2331720"/>
+            <a:ext cx="1706880" cy="914"/>
+          </a:xfrm>
+          <a:prstGeom prst="line">
+            <a:avLst/>
+          </a:prstGeom>
+          <a:noFill/>
+          <a:ln w="38100">
+            <a:solidFill>
+              <a:schemeClr val="tx1"/>
+            </a:solidFill>
+            <a:prstDash val="sysDot"/>
+          </a:ln>
+        </p:spPr>
+      </p:sp>
+      <p:sp>
+        <p:nvSpPr>
+          <p:cNvPr id="5" name="Parada push"/>
+          <p:cNvSpPr/>
+          <p:nvPr/>
+        </p:nvSpPr>
+        <p:spPr>
+          <a:xfrm>
+            <a:off x="749808" y="2167128"/>
+            <a:ext cx="329184" cy="329184"/>
+          </a:xfrm>
+          <a:prstGeom prst="ellipse">
+            <a:avLst/>
+          </a:prstGeom>
+          <a:solidFill>
+            <a:schemeClr val="bg2"/>
+          </a:solidFill>
+          <a:ln w="38100">
+            <a:solidFill>
+              <a:schemeClr val="tx2"/>
+            </a:solidFill>
+            <a:prstDash val="solid"/>
+          </a:ln>
+        </p:spPr>
+      </p:sp>
+      <p:sp>
+        <p:nvSpPr>
+          <p:cNvPr id="6" name="Parada push nombre"/>
+          <p:cNvSpPr txBox="1"/>
+          <p:nvPr/>
+        </p:nvSpPr>
+        <p:spPr>
+          <a:xfrm>
+            <a:off x="91440" y="2651760"/>
+            <a:ext cx="1645920" cy="320040"/>
+          </a:xfrm>
+          <a:prstGeom prst="rect">
+            <a:avLst/>
+          </a:prstGeom>
+          <a:noFill/>
+          <a:ln/>
+        </p:spPr>
+        <p:txBody>
+          <a:bodyPr wrap="square" lIns="0" tIns="0" rIns="0" bIns="0" rtlCol="0" anchor="t"/>
+          <a:lstStyle/>
+          <a:p>
+            <a:pPr algn="ctr" indent="0" marL="0">
+              <a:buNone/>
+            </a:pPr>
+            <a:r>
+              <a:rPr lang="en-US" sz="1500" b="1" dirty="0">
+                <a:solidFill>
+                  <a:schemeClr val="tx1"/>
+                </a:solidFill>
+              </a:rPr>
+              <a:t>push</a:t>
+            </a:r>
+            <a:endParaRPr lang="en-US" sz="1500" dirty="0"/>
+          </a:p>
+        </p:txBody>
+      </p:sp>
+      <p:sp>
+        <p:nvSpPr>
+          <p:cNvPr id="7" name="Parada formato y lint"/>
+          <p:cNvSpPr/>
+          <p:nvPr/>
+        </p:nvSpPr>
+        <p:spPr>
+          <a:xfrm>
+            <a:off x="2456688" y="2167128"/>
+            <a:ext cx="329184" cy="329184"/>
+          </a:xfrm>
+          <a:prstGeom prst="ellipse">
+            <a:avLst/>
+          </a:prstGeom>
+          <a:solidFill>
+            <a:schemeClr val="bg2"/>
+          </a:solidFill>
+          <a:ln w="38100">
+            <a:solidFill>
+              <a:schemeClr val="accent2"/>
+            </a:solidFill>
+            <a:prstDash val="solid"/>
+          </a:ln>
+        </p:spPr>
+      </p:sp>
+      <p:sp>
+        <p:nvSpPr>
+          <p:cNvPr id="8" name="Parada formato y lint nombre"/>
+          <p:cNvSpPr txBox="1"/>
+          <p:nvPr/>
+        </p:nvSpPr>
+        <p:spPr>
+          <a:xfrm>
+            <a:off x="1798320" y="2651760"/>
+            <a:ext cx="1645920" cy="320040"/>
+          </a:xfrm>
+          <a:prstGeom prst="rect">
+            <a:avLst/>
+          </a:prstGeom>
+          <a:noFill/>
+          <a:ln/>
+        </p:spPr>
+        <p:txBody>
+          <a:bodyPr wrap="square" lIns="0" tIns="0" rIns="0" bIns="0" rtlCol="0" anchor="t"/>
+          <a:lstStyle/>
+          <a:p>
+            <a:pPr algn="ctr" indent="0" marL="0">
+              <a:buNone/>
+            </a:pPr>
+            <a:r>
+              <a:rPr lang="en-US" sz="1500" b="1" dirty="0">
+                <a:solidFill>
+                  <a:schemeClr val="tx1"/>
+                </a:solidFill>
+              </a:rPr>
+              <a:t>formato y lint</a:t>
+            </a:r>
+            <a:endParaRPr lang="en-US" sz="1500" dirty="0"/>
+          </a:p>
+        </p:txBody>
+      </p:sp>
+      <p:sp>
+        <p:nvSpPr>
+          <p:cNvPr id="9" name="Parada tipos"/>
+          <p:cNvSpPr/>
+          <p:nvPr/>
+        </p:nvSpPr>
+        <p:spPr>
+          <a:xfrm>
+            <a:off x="4163568" y="2167128"/>
+            <a:ext cx="329184" cy="329184"/>
+          </a:xfrm>
+          <a:prstGeom prst="ellipse">
+            <a:avLst/>
+          </a:prstGeom>
+          <a:solidFill>
+            <a:schemeClr val="bg2"/>
+          </a:solidFill>
+          <a:ln w="38100">
+            <a:solidFill>
+              <a:schemeClr val="accent2"/>
+            </a:solidFill>
+            <a:prstDash val="solid"/>
+          </a:ln>
+        </p:spPr>
+      </p:sp>
+      <p:sp>
+        <p:nvSpPr>
+          <p:cNvPr id="10" name="Parada tipos nombre"/>
+          <p:cNvSpPr txBox="1"/>
+          <p:nvPr/>
+        </p:nvSpPr>
+        <p:spPr>
+          <a:xfrm>
+            <a:off x="3505200" y="2651760"/>
+            <a:ext cx="1645920" cy="320040"/>
+          </a:xfrm>
+          <a:prstGeom prst="rect">
+            <a:avLst/>
+          </a:prstGeom>
+          <a:noFill/>
+          <a:ln/>
+        </p:spPr>
+        <p:txBody>
+          <a:bodyPr wrap="square" lIns="0" tIns="0" rIns="0" bIns="0" rtlCol="0" anchor="t"/>
+          <a:lstStyle/>
+          <a:p>
+            <a:pPr algn="ctr" indent="0" marL="0">
+              <a:buNone/>
+            </a:pPr>
+            <a:r>
+              <a:rPr lang="en-US" sz="1500" b="1" dirty="0">
+                <a:solidFill>
+                  <a:schemeClr val="tx1"/>
+                </a:solidFill>
+              </a:rPr>
+              <a:t>tipos</a:t>
+            </a:r>
+            <a:endParaRPr lang="en-US" sz="1500" dirty="0"/>
+          </a:p>
+        </p:txBody>
+      </p:sp>
+      <p:sp>
+        <p:nvSpPr>
+          <p:cNvPr id="11" name="Parada pruebas"/>
+          <p:cNvSpPr/>
+          <p:nvPr/>
+        </p:nvSpPr>
+        <p:spPr>
+          <a:xfrm>
+            <a:off x="5870448" y="2167128"/>
+            <a:ext cx="329184" cy="329184"/>
+          </a:xfrm>
+          <a:prstGeom prst="ellipse">
+            <a:avLst/>
+          </a:prstGeom>
+          <a:solidFill>
+            <a:schemeClr val="bg2"/>
+          </a:solidFill>
+          <a:ln w="38100">
+            <a:solidFill>
+              <a:schemeClr val="accent3"/>
+            </a:solidFill>
+            <a:prstDash val="solid"/>
+          </a:ln>
+        </p:spPr>
+      </p:sp>
+      <p:sp>
+        <p:nvSpPr>
+          <p:cNvPr id="12" name="Parada pruebas nombre"/>
+          <p:cNvSpPr txBox="1"/>
+          <p:nvPr/>
+        </p:nvSpPr>
+        <p:spPr>
+          <a:xfrm>
+            <a:off x="5212080" y="2651760"/>
+            <a:ext cx="1645920" cy="320040"/>
+          </a:xfrm>
+          <a:prstGeom prst="rect">
+            <a:avLst/>
+          </a:prstGeom>
+          <a:noFill/>
+          <a:ln/>
+        </p:spPr>
+        <p:txBody>
+          <a:bodyPr wrap="square" lIns="0" tIns="0" rIns="0" bIns="0" rtlCol="0" anchor="t"/>
+          <a:lstStyle/>
+          <a:p>
+            <a:pPr algn="ctr" indent="0" marL="0">
+              <a:buNone/>
+            </a:pPr>
+            <a:r>
+              <a:rPr lang="en-US" sz="1500" b="1" dirty="0">
+                <a:solidFill>
+                  <a:schemeClr val="tx1"/>
+                </a:solidFill>
+              </a:rPr>
+              <a:t>pruebas</a:t>
+            </a:r>
+            <a:endParaRPr lang="en-US" sz="1500" dirty="0"/>
+          </a:p>
+        </p:txBody>
+      </p:sp>
+      <p:sp>
+        <p:nvSpPr>
+          <p:cNvPr id="13" name="Parada build"/>
+          <p:cNvSpPr/>
+          <p:nvPr/>
+        </p:nvSpPr>
+        <p:spPr>
+          <a:xfrm>
+            <a:off x="7577328" y="2167128"/>
+            <a:ext cx="329184" cy="329184"/>
+          </a:xfrm>
+          <a:prstGeom prst="ellipse">
+            <a:avLst/>
+          </a:prstGeom>
+          <a:solidFill>
+            <a:schemeClr val="bg2"/>
+          </a:solidFill>
+          <a:ln w="38100">
+            <a:solidFill>
+              <a:schemeClr val="accent3"/>
+            </a:solidFill>
+            <a:prstDash val="solid"/>
+          </a:ln>
+        </p:spPr>
+      </p:sp>
+      <p:sp>
+        <p:nvSpPr>
+          <p:cNvPr id="14" name="Parada build nombre"/>
+          <p:cNvSpPr txBox="1"/>
+          <p:nvPr/>
+        </p:nvSpPr>
+        <p:spPr>
+          <a:xfrm>
+            <a:off x="6918960" y="2651760"/>
+            <a:ext cx="1645920" cy="320040"/>
+          </a:xfrm>
+          <a:prstGeom prst="rect">
+            <a:avLst/>
+          </a:prstGeom>
+          <a:noFill/>
+          <a:ln/>
+        </p:spPr>
+        <p:txBody>
+          <a:bodyPr wrap="square" lIns="0" tIns="0" rIns="0" bIns="0" rtlCol="0" anchor="t"/>
+          <a:lstStyle/>
+          <a:p>
+            <a:pPr algn="ctr" indent="0" marL="0">
+              <a:buNone/>
+            </a:pPr>
+            <a:r>
+              <a:rPr lang="en-US" sz="1500" b="1" dirty="0">
+                <a:solidFill>
+                  <a:schemeClr val="tx1"/>
+                </a:solidFill>
+              </a:rPr>
+              <a:t>build</a:t>
+            </a:r>
+            <a:endParaRPr lang="en-US" sz="1500" dirty="0"/>
+          </a:p>
+        </p:txBody>
+      </p:sp>
+      <p:sp>
+        <p:nvSpPr>
+          <p:cNvPr id="15" name="Parada humo"/>
+          <p:cNvSpPr/>
+          <p:nvPr/>
+        </p:nvSpPr>
+        <p:spPr>
+          <a:xfrm>
+            <a:off x="9284208" y="2167128"/>
+            <a:ext cx="329184" cy="329184"/>
+          </a:xfrm>
+          <a:prstGeom prst="ellipse">
+            <a:avLst/>
+          </a:prstGeom>
+          <a:solidFill>
+            <a:schemeClr val="bg2"/>
+          </a:solidFill>
+          <a:ln w="38100">
+            <a:solidFill>
+              <a:schemeClr val="accent4"/>
+            </a:solidFill>
+            <a:prstDash val="solid"/>
+          </a:ln>
+        </p:spPr>
+      </p:sp>
+      <p:sp>
+        <p:nvSpPr>
+          <p:cNvPr id="16" name="Parada humo nombre"/>
+          <p:cNvSpPr txBox="1"/>
+          <p:nvPr/>
+        </p:nvSpPr>
+        <p:spPr>
+          <a:xfrm>
+            <a:off x="8625840" y="2651760"/>
+            <a:ext cx="1645920" cy="320040"/>
+          </a:xfrm>
+          <a:prstGeom prst="rect">
+            <a:avLst/>
+          </a:prstGeom>
+          <a:noFill/>
+          <a:ln/>
+        </p:spPr>
+        <p:txBody>
+          <a:bodyPr wrap="square" lIns="0" tIns="0" rIns="0" bIns="0" rtlCol="0" anchor="t"/>
+          <a:lstStyle/>
+          <a:p>
+            <a:pPr algn="ctr" indent="0" marL="0">
+              <a:buNone/>
+            </a:pPr>
+            <a:r>
+              <a:rPr lang="en-US" sz="1500" b="1" dirty="0">
+                <a:solidFill>
+                  <a:schemeClr val="tx1"/>
+                </a:solidFill>
+              </a:rPr>
+              <a:t>humo</a:t>
+            </a:r>
+            <a:endParaRPr lang="en-US" sz="1500" dirty="0"/>
+          </a:p>
+        </p:txBody>
+      </p:sp>
+      <p:sp>
+        <p:nvSpPr>
+          <p:cNvPr id="17" name="Parada producción"/>
+          <p:cNvSpPr/>
+          <p:nvPr/>
+        </p:nvSpPr>
+        <p:spPr>
+          <a:xfrm>
+            <a:off x="10991088" y="2167128"/>
+            <a:ext cx="329184" cy="329184"/>
+          </a:xfrm>
+          <a:prstGeom prst="ellipse">
+            <a:avLst/>
+          </a:prstGeom>
+          <a:solidFill>
+            <a:schemeClr val="accent6"/>
+          </a:solidFill>
+          <a:ln w="38100">
+            <a:solidFill>
+              <a:schemeClr val="accent6"/>
+            </a:solidFill>
+            <a:prstDash val="solid"/>
+          </a:ln>
+        </p:spPr>
+      </p:sp>
+      <p:sp>
+        <p:nvSpPr>
+          <p:cNvPr id="18" name="Parada producción nombre"/>
+          <p:cNvSpPr txBox="1"/>
+          <p:nvPr/>
+        </p:nvSpPr>
+        <p:spPr>
+          <a:xfrm>
+            <a:off x="10332720" y="2651760"/>
+            <a:ext cx="1645920" cy="320040"/>
+          </a:xfrm>
+          <a:prstGeom prst="rect">
+            <a:avLst/>
+          </a:prstGeom>
+          <a:noFill/>
+          <a:ln/>
+        </p:spPr>
+        <p:txBody>
+          <a:bodyPr wrap="square" lIns="0" tIns="0" rIns="0" bIns="0" rtlCol="0" anchor="t"/>
+          <a:lstStyle/>
+          <a:p>
+            <a:pPr algn="ctr" indent="0" marL="0">
+              <a:buNone/>
+            </a:pPr>
+            <a:r>
+              <a:rPr lang="en-US" sz="1500" b="1" dirty="0">
+                <a:solidFill>
+                  <a:schemeClr val="tx1"/>
+                </a:solidFill>
+              </a:rPr>
+              <a:t>producción</a:t>
+            </a:r>
+            <a:endParaRPr lang="en-US" sz="1500" dirty="0"/>
+          </a:p>
+        </p:txBody>
+      </p:sp>
+      <p:sp>
+        <p:nvSpPr>
+          <p:cNvPr id="19" name="Tramo CI"/>
+          <p:cNvSpPr txBox="1"/>
+          <p:nvPr/>
+        </p:nvSpPr>
+        <p:spPr>
+          <a:xfrm>
+            <a:off x="914400" y="1645920"/>
+            <a:ext cx="4572000" cy="320040"/>
+          </a:xfrm>
+          <a:prstGeom prst="rect">
+            <a:avLst/>
+          </a:prstGeom>
+          <a:noFill/>
+          <a:ln/>
+        </p:spPr>
+        <p:txBody>
+          <a:bodyPr wrap="square" lIns="0" tIns="0" rIns="0" bIns="0" rtlCol="0" anchor="t"/>
+          <a:lstStyle/>
+          <a:p>
+            <a:pPr indent="0" marL="0">
+              <a:buNone/>
+            </a:pPr>
+            <a:r>
+              <a:rPr lang="en-US" sz="1500" dirty="0">
+                <a:solidFill>
+                  <a:schemeClr val="tx2"/>
+                </a:solidFill>
+              </a:rPr>
+              <a:t>GitHub Actions · automático</a:t>
+            </a:r>
+            <a:endParaRPr lang="en-US" sz="1500" dirty="0"/>
+          </a:p>
+        </p:txBody>
+      </p:sp>
+      <p:sp>
+        <p:nvSpPr>
+          <p:cNvPr id="20" name="Tramo deploy"/>
+          <p:cNvSpPr txBox="1"/>
+          <p:nvPr/>
+        </p:nvSpPr>
+        <p:spPr>
+          <a:xfrm>
+            <a:off x="9448800" y="1645920"/>
+            <a:ext cx="1706880" cy="320040"/>
+          </a:xfrm>
+          <a:prstGeom prst="rect">
+            <a:avLst/>
+          </a:prstGeom>
+          <a:noFill/>
+          <a:ln/>
+        </p:spPr>
+        <p:txBody>
+          <a:bodyPr wrap="square" lIns="0" tIns="0" rIns="0" bIns="0" rtlCol="0" anchor="t"/>
+          <a:lstStyle/>
+          <a:p>
+            <a:pPr algn="ctr" indent="0" marL="0">
+              <a:buNone/>
+            </a:pPr>
+            <a:r>
+              <a:rPr lang="en-US" sz="1500" dirty="0">
+                <a:solidFill>
+                  <a:schemeClr val="tx2"/>
+                </a:solidFill>
+              </a:rPr>
+              <a:t>un clic</a:t>
+            </a:r>
+            <a:endParaRPr lang="en-US" sz="1500" dirty="0"/>
+          </a:p>
+        </p:txBody>
+      </p:sp>
+      <p:sp>
+        <p:nvSpPr>
+          <p:cNvPr id="21" name="Dato 1"/>
+          <p:cNvSpPr/>
+          <p:nvPr/>
+        </p:nvSpPr>
+        <p:spPr>
+          <a:xfrm>
+            <a:off x="548640" y="3657600"/>
+            <a:ext cx="3566160" cy="1600200"/>
+          </a:xfrm>
+          <a:prstGeom prst="roundRect">
+            <a:avLst>
+              <a:gd name="adj" fmla="val 6857"/>
             </a:avLst>
           </a:prstGeom>
           <a:solidFill>
@@ -2795,39 +3618,14 @@
       </p:sp>
       <p:sp>
         <p:nvSpPr>
-          <p:cNvPr id="4" name="Estación 1"/>
-          <p:cNvSpPr/>
-          <p:nvPr/>
-        </p:nvSpPr>
-        <p:spPr>
-          <a:xfrm>
-            <a:off x="868680" y="1911096"/>
-            <a:ext cx="292608" cy="292608"/>
-          </a:xfrm>
-          <a:prstGeom prst="ellipse">
-            <a:avLst/>
-          </a:prstGeom>
-          <a:solidFill>
-            <a:schemeClr val="accent2"/>
-          </a:solidFill>
-          <a:ln w="38100">
-            <a:solidFill>
-              <a:schemeClr val="accent2"/>
-            </a:solidFill>
-            <a:prstDash val="solid"/>
-          </a:ln>
-        </p:spPr>
-      </p:sp>
-      <p:sp>
-        <p:nvSpPr>
-          <p:cNvPr id="5" name="Riel 1"/>
-          <p:cNvSpPr/>
-          <p:nvPr/>
-        </p:nvSpPr>
-        <p:spPr>
-          <a:xfrm>
-            <a:off x="978408" y="2468880"/>
-            <a:ext cx="73152" cy="347472"/>
+          <p:cNvPr id="22" name="Marcador dato 1"/>
+          <p:cNvSpPr/>
+          <p:nvPr/>
+        </p:nvSpPr>
+        <p:spPr>
+          <a:xfrm>
+            <a:off x="822960" y="3886200"/>
+            <a:ext cx="457200" cy="109728"/>
           </a:xfrm>
           <a:prstGeom prst="roundRect">
             <a:avLst>
@@ -2847,14 +3645,14 @@
       </p:sp>
       <p:sp>
         <p:nvSpPr>
-          <p:cNvPr id="6" name="Fecha 1"/>
-          <p:cNvSpPr txBox="1"/>
-          <p:nvPr/>
-        </p:nvSpPr>
-        <p:spPr>
-          <a:xfrm>
-            <a:off x="1554480" y="1719072"/>
-            <a:ext cx="3657600" cy="329184"/>
+          <p:cNvPr id="23" name="Cifra 1"/>
+          <p:cNvSpPr txBox="1"/>
+          <p:nvPr/>
+        </p:nvSpPr>
+        <p:spPr>
+          <a:xfrm>
+            <a:off x="822960" y="4069080"/>
+            <a:ext cx="3017520" cy="548640"/>
           </a:xfrm>
           <a:prstGeom prst="rect">
             <a:avLst/>
@@ -2870,27 +3668,27 @@
               <a:buNone/>
             </a:pPr>
             <a:r>
-              <a:rPr lang="en-US" sz="1800" b="1" dirty="0">
+              <a:rPr lang="en-US" sz="3000" b="1" dirty="0">
                 <a:solidFill>
                   <a:schemeClr val="tx1"/>
                 </a:solidFill>
               </a:rPr>
-              <a:t>Sprint 2 · 26 oct – 6 nov</a:t>
-            </a:r>
-            <a:endParaRPr lang="en-US" sz="1800" dirty="0"/>
-          </a:p>
-        </p:txBody>
-      </p:sp>
-      <p:sp>
-        <p:nvSpPr>
-          <p:cNvPr id="7" name="Meta 1"/>
-          <p:cNvSpPr txBox="1"/>
-          <p:nvPr/>
-        </p:nvSpPr>
-        <p:spPr>
-          <a:xfrm>
-            <a:off x="1554480" y="2084832"/>
-            <a:ext cx="9692640" cy="365760"/>
+              <a:t>7 ADRs</a:t>
+            </a:r>
+            <a:endParaRPr lang="en-US" sz="3000" dirty="0"/>
+          </a:p>
+        </p:txBody>
+      </p:sp>
+      <p:sp>
+        <p:nvSpPr>
+          <p:cNvPr id="24" name="Explicación 1"/>
+          <p:cNvSpPr txBox="1"/>
+          <p:nvPr/>
+        </p:nvSpPr>
+        <p:spPr>
+          <a:xfrm>
+            <a:off x="822960" y="4663440"/>
+            <a:ext cx="3017520" cy="320040"/>
           </a:xfrm>
           <a:prstGeom prst="rect">
             <a:avLst/>
@@ -2906,31 +3704,31 @@
               <a:buNone/>
             </a:pPr>
             <a:r>
-              <a:rPr lang="en-US" sz="1600" dirty="0">
+              <a:rPr lang="en-US" sz="1500" dirty="0">
                 <a:solidFill>
                   <a:schemeClr val="tx2"/>
                 </a:solidFill>
               </a:rPr>
-              <a:t>Adaptadores reales de SendGrid, Twilio, FCM y webhook</a:t>
-            </a:r>
-            <a:endParaRPr lang="en-US" sz="1600" dirty="0"/>
-          </a:p>
-        </p:txBody>
-      </p:sp>
-      <p:sp>
-        <p:nvSpPr>
-          <p:cNvPr id="8" name="Paso 2"/>
-          <p:cNvSpPr/>
-          <p:nvPr/>
-        </p:nvSpPr>
-        <p:spPr>
-          <a:xfrm>
-            <a:off x="548640" y="2724912"/>
-            <a:ext cx="11064240" cy="1005840"/>
+              <a:t>cada decisión con su porqué</a:t>
+            </a:r>
+            <a:endParaRPr lang="en-US" sz="1500" dirty="0"/>
+          </a:p>
+        </p:txBody>
+      </p:sp>
+      <p:sp>
+        <p:nvSpPr>
+          <p:cNvPr id="25" name="Dato 2"/>
+          <p:cNvSpPr/>
+          <p:nvPr/>
+        </p:nvSpPr>
+        <p:spPr>
+          <a:xfrm>
+            <a:off x="4297680" y="3657600"/>
+            <a:ext cx="3566160" cy="1600200"/>
           </a:xfrm>
           <a:prstGeom prst="roundRect">
             <a:avLst>
-              <a:gd name="adj" fmla="val 10909"/>
+              <a:gd name="adj" fmla="val 6857"/>
             </a:avLst>
           </a:prstGeom>
           <a:solidFill>
@@ -2953,39 +3751,14 @@
       </p:sp>
       <p:sp>
         <p:nvSpPr>
-          <p:cNvPr id="9" name="Estación 2"/>
-          <p:cNvSpPr/>
-          <p:nvPr/>
-        </p:nvSpPr>
-        <p:spPr>
-          <a:xfrm>
-            <a:off x="868680" y="3081528"/>
-            <a:ext cx="292608" cy="292608"/>
-          </a:xfrm>
-          <a:prstGeom prst="ellipse">
-            <a:avLst/>
-          </a:prstGeom>
-          <a:solidFill>
-            <a:schemeClr val="accent3"/>
-          </a:solidFill>
-          <a:ln w="38100">
-            <a:solidFill>
-              <a:schemeClr val="accent3"/>
-            </a:solidFill>
-            <a:prstDash val="solid"/>
-          </a:ln>
-        </p:spPr>
-      </p:sp>
-      <p:sp>
-        <p:nvSpPr>
-          <p:cNvPr id="10" name="Riel 2"/>
-          <p:cNvSpPr/>
-          <p:nvPr/>
-        </p:nvSpPr>
-        <p:spPr>
-          <a:xfrm>
-            <a:off x="978408" y="3639312"/>
-            <a:ext cx="73152" cy="347472"/>
+          <p:cNvPr id="26" name="Marcador dato 2"/>
+          <p:cNvSpPr/>
+          <p:nvPr/>
+        </p:nvSpPr>
+        <p:spPr>
+          <a:xfrm>
+            <a:off x="4572000" y="3886200"/>
+            <a:ext cx="457200" cy="109728"/>
           </a:xfrm>
           <a:prstGeom prst="roundRect">
             <a:avLst>
@@ -3005,14 +3778,14 @@
       </p:sp>
       <p:sp>
         <p:nvSpPr>
-          <p:cNvPr id="11" name="Fecha 2"/>
-          <p:cNvSpPr txBox="1"/>
-          <p:nvPr/>
-        </p:nvSpPr>
-        <p:spPr>
-          <a:xfrm>
-            <a:off x="1554480" y="2889504"/>
-            <a:ext cx="3657600" cy="329184"/>
+          <p:cNvPr id="27" name="Cifra 2"/>
+          <p:cNvSpPr txBox="1"/>
+          <p:nvPr/>
+        </p:nvSpPr>
+        <p:spPr>
+          <a:xfrm>
+            <a:off x="4572000" y="4069080"/>
+            <a:ext cx="3017520" cy="548640"/>
           </a:xfrm>
           <a:prstGeom prst="rect">
             <a:avLst/>
@@ -3028,27 +3801,27 @@
               <a:buNone/>
             </a:pPr>
             <a:r>
-              <a:rPr lang="en-US" sz="1800" b="1" dirty="0">
+              <a:rPr lang="en-US" sz="3000" b="1" dirty="0">
                 <a:solidFill>
                   <a:schemeClr val="tx1"/>
                 </a:solidFill>
               </a:rPr>
-              <a:t>Sprint 3 · 9 – 20 nov</a:t>
-            </a:r>
-            <a:endParaRPr lang="en-US" sz="1800" dirty="0"/>
-          </a:p>
-        </p:txBody>
-      </p:sp>
-      <p:sp>
-        <p:nvSpPr>
-          <p:cNvPr id="12" name="Meta 2"/>
-          <p:cNvSpPr txBox="1"/>
-          <p:nvPr/>
-        </p:nvSpPr>
-        <p:spPr>
-          <a:xfrm>
-            <a:off x="1554480" y="3255264"/>
-            <a:ext cx="9692640" cy="365760"/>
+              <a:t>41 historias</a:t>
+            </a:r>
+            <a:endParaRPr lang="en-US" sz="3000" dirty="0"/>
+          </a:p>
+        </p:txBody>
+      </p:sp>
+      <p:sp>
+        <p:nvSpPr>
+          <p:cNvPr id="28" name="Explicación 2"/>
+          <p:cNvSpPr txBox="1"/>
+          <p:nvPr/>
+        </p:nvSpPr>
+        <p:spPr>
+          <a:xfrm>
+            <a:off x="4572000" y="4663440"/>
+            <a:ext cx="3017520" cy="320040"/>
           </a:xfrm>
           <a:prstGeom prst="rect">
             <a:avLst/>
@@ -3064,31 +3837,31 @@
               <a:buNone/>
             </a:pPr>
             <a:r>
-              <a:rPr lang="en-US" sz="1600" dirty="0">
+              <a:rPr lang="en-US" sz="1500" dirty="0">
                 <a:solidFill>
                   <a:schemeClr val="tx2"/>
                 </a:solidFill>
               </a:rPr>
-              <a:t>Circuito de corte por proveedor y revisión de salud activa</a:t>
-            </a:r>
-            <a:endParaRPr lang="en-US" sz="1600" dirty="0"/>
-          </a:p>
-        </p:txBody>
-      </p:sp>
-      <p:sp>
-        <p:nvSpPr>
-          <p:cNvPr id="13" name="Paso 3"/>
-          <p:cNvSpPr/>
-          <p:nvPr/>
-        </p:nvSpPr>
-        <p:spPr>
-          <a:xfrm>
-            <a:off x="548640" y="3895344"/>
-            <a:ext cx="11064240" cy="1005840"/>
+              <a:t>en Jira, por sprint</a:t>
+            </a:r>
+            <a:endParaRPr lang="en-US" sz="1500" dirty="0"/>
+          </a:p>
+        </p:txBody>
+      </p:sp>
+      <p:sp>
+        <p:nvSpPr>
+          <p:cNvPr id="29" name="Dato 3"/>
+          <p:cNvSpPr/>
+          <p:nvPr/>
+        </p:nvSpPr>
+        <p:spPr>
+          <a:xfrm>
+            <a:off x="8046720" y="3657600"/>
+            <a:ext cx="3566160" cy="1600200"/>
           </a:xfrm>
           <a:prstGeom prst="roundRect">
             <a:avLst>
-              <a:gd name="adj" fmla="val 10909"/>
+              <a:gd name="adj" fmla="val 6857"/>
             </a:avLst>
           </a:prstGeom>
           <a:solidFill>
@@ -3111,39 +3884,14 @@
       </p:sp>
       <p:sp>
         <p:nvSpPr>
-          <p:cNvPr id="14" name="Estación 3"/>
-          <p:cNvSpPr/>
-          <p:nvPr/>
-        </p:nvSpPr>
-        <p:spPr>
-          <a:xfrm>
-            <a:off x="868680" y="4251960"/>
-            <a:ext cx="292608" cy="292608"/>
-          </a:xfrm>
-          <a:prstGeom prst="ellipse">
-            <a:avLst/>
-          </a:prstGeom>
-          <a:solidFill>
-            <a:schemeClr val="accent4"/>
-          </a:solidFill>
-          <a:ln w="38100">
-            <a:solidFill>
-              <a:schemeClr val="accent4"/>
-            </a:solidFill>
-            <a:prstDash val="solid"/>
-          </a:ln>
-        </p:spPr>
-      </p:sp>
-      <p:sp>
-        <p:nvSpPr>
-          <p:cNvPr id="15" name="Riel 3"/>
-          <p:cNvSpPr/>
-          <p:nvPr/>
-        </p:nvSpPr>
-        <p:spPr>
-          <a:xfrm>
-            <a:off x="978408" y="4809744"/>
-            <a:ext cx="73152" cy="347472"/>
+          <p:cNvPr id="30" name="Marcador dato 3"/>
+          <p:cNvSpPr/>
+          <p:nvPr/>
+        </p:nvSpPr>
+        <p:spPr>
+          <a:xfrm>
+            <a:off x="8321040" y="3886200"/>
+            <a:ext cx="457200" cy="109728"/>
           </a:xfrm>
           <a:prstGeom prst="roundRect">
             <a:avLst>
@@ -3163,14 +3911,14 @@
       </p:sp>
       <p:sp>
         <p:nvSpPr>
-          <p:cNvPr id="16" name="Fecha 3"/>
-          <p:cNvSpPr txBox="1"/>
-          <p:nvPr/>
-        </p:nvSpPr>
-        <p:spPr>
-          <a:xfrm>
-            <a:off x="1554480" y="4059936"/>
-            <a:ext cx="3657600" cy="329184"/>
+          <p:cNvPr id="31" name="Cifra 3"/>
+          <p:cNvSpPr txBox="1"/>
+          <p:nvPr/>
+        </p:nvSpPr>
+        <p:spPr>
+          <a:xfrm>
+            <a:off x="8321040" y="4069080"/>
+            <a:ext cx="3017520" cy="548640"/>
           </a:xfrm>
           <a:prstGeom prst="rect">
             <a:avLst/>
@@ -3186,27 +3934,27 @@
               <a:buNone/>
             </a:pPr>
             <a:r>
-              <a:rPr lang="en-US" sz="1800" b="1" dirty="0">
+              <a:rPr lang="en-US" sz="3000" b="1" dirty="0">
                 <a:solidFill>
                   <a:schemeClr val="tx1"/>
                 </a:solidFill>
               </a:rPr>
-              <a:t>Sprint 4 · 23 nov – 4 dic</a:t>
-            </a:r>
-            <a:endParaRPr lang="en-US" sz="1800" dirty="0"/>
-          </a:p>
-        </p:txBody>
-      </p:sp>
-      <p:sp>
-        <p:nvSpPr>
-          <p:cNvPr id="17" name="Meta 3"/>
-          <p:cNvSpPr txBox="1"/>
-          <p:nvPr/>
-        </p:nvSpPr>
-        <p:spPr>
-          <a:xfrm>
-            <a:off x="1554480" y="4425696"/>
-            <a:ext cx="9692640" cy="365760"/>
+              <a:t>5 sprints</a:t>
+            </a:r>
+            <a:endParaRPr lang="en-US" sz="3000" dirty="0"/>
+          </a:p>
+        </p:txBody>
+      </p:sp>
+      <p:sp>
+        <p:nvSpPr>
+          <p:cNvPr id="32" name="Explicación 3"/>
+          <p:cNvSpPr txBox="1"/>
+          <p:nvPr/>
+        </p:nvSpPr>
+        <p:spPr>
+          <a:xfrm>
+            <a:off x="8321040" y="4663440"/>
+            <a:ext cx="3017520" cy="320040"/>
           </a:xfrm>
           <a:prstGeom prst="rect">
             <a:avLst/>
@@ -3222,143 +3970,48 @@
               <a:buNone/>
             </a:pPr>
             <a:r>
+              <a:rPr lang="en-US" sz="1500" dirty="0">
+                <a:solidFill>
+                  <a:schemeClr val="tx2"/>
+                </a:solidFill>
+              </a:rPr>
+              <a:t>del diseño a la entrega</a:t>
+            </a:r>
+            <a:endParaRPr lang="en-US" sz="1500" dirty="0"/>
+          </a:p>
+        </p:txBody>
+      </p:sp>
+      <p:sp>
+        <p:nvSpPr>
+          <p:cNvPr id="33" name="Idea"/>
+          <p:cNvSpPr txBox="1"/>
+          <p:nvPr/>
+        </p:nvSpPr>
+        <p:spPr>
+          <a:xfrm>
+            <a:off x="548640" y="5669280"/>
+            <a:ext cx="11064240" cy="411480"/>
+          </a:xfrm>
+          <a:prstGeom prst="rect">
+            <a:avLst/>
+          </a:prstGeom>
+          <a:noFill/>
+          <a:ln/>
+        </p:spPr>
+        <p:txBody>
+          <a:bodyPr wrap="square" lIns="0" tIns="0" rIns="0" bIns="0" rtlCol="0" anchor="t"/>
+          <a:lstStyle/>
+          <a:p>
+            <a:pPr indent="0" marL="0">
+              <a:buNone/>
+            </a:pPr>
+            <a:r>
               <a:rPr lang="en-US" sz="1600" dirty="0">
                 <a:solidFill>
-                  <a:schemeClr val="tx2"/>
-                </a:solidFill>
-              </a:rPr>
-              <a:t>Outbox, suscripciones por webhook, carga y entrega final</a:t>
-            </a:r>
-            <a:endParaRPr lang="en-US" sz="1600" dirty="0"/>
-          </a:p>
-        </p:txBody>
-      </p:sp>
-      <p:sp>
-        <p:nvSpPr>
-          <p:cNvPr id="18" name="Paso 4"/>
-          <p:cNvSpPr/>
-          <p:nvPr/>
-        </p:nvSpPr>
-        <p:spPr>
-          <a:xfrm>
-            <a:off x="548640" y="5065776"/>
-            <a:ext cx="11064240" cy="1005840"/>
-          </a:xfrm>
-          <a:prstGeom prst="roundRect">
-            <a:avLst>
-              <a:gd name="adj" fmla="val 10909"/>
-            </a:avLst>
-          </a:prstGeom>
-          <a:solidFill>
-            <a:schemeClr val="bg2"/>
-          </a:solidFill>
-          <a:ln w="6350">
-            <a:solidFill>
-              <a:schemeClr val="bg1"/>
-            </a:solidFill>
-            <a:prstDash val="solid"/>
-          </a:ln>
-          <a:effectLst>
-            <a:outerShdw sx="100000" sy="100000" kx="0" ky="0" algn="bl" rotWithShape="0" blurRad="76200" dist="25400" dir="5400000">
-              <a:srgbClr val="000000">
-                <a:alpha val="10000"/>
-              </a:srgbClr>
-            </a:outerShdw>
-          </a:effectLst>
-        </p:spPr>
-      </p:sp>
-      <p:sp>
-        <p:nvSpPr>
-          <p:cNvPr id="19" name="Estación 4"/>
-          <p:cNvSpPr/>
-          <p:nvPr/>
-        </p:nvSpPr>
-        <p:spPr>
-          <a:xfrm>
-            <a:off x="868680" y="5422392"/>
-            <a:ext cx="292608" cy="292608"/>
-          </a:xfrm>
-          <a:prstGeom prst="ellipse">
-            <a:avLst/>
-          </a:prstGeom>
-          <a:solidFill>
-            <a:schemeClr val="accent1"/>
-          </a:solidFill>
-          <a:ln w="38100">
-            <a:solidFill>
-              <a:schemeClr val="accent1"/>
-            </a:solidFill>
-            <a:prstDash val="solid"/>
-          </a:ln>
-        </p:spPr>
-      </p:sp>
-      <p:sp>
-        <p:nvSpPr>
-          <p:cNvPr id="20" name="Fecha 4"/>
-          <p:cNvSpPr txBox="1"/>
-          <p:nvPr/>
-        </p:nvSpPr>
-        <p:spPr>
-          <a:xfrm>
-            <a:off x="1554480" y="5230368"/>
-            <a:ext cx="3657600" cy="329184"/>
-          </a:xfrm>
-          <a:prstGeom prst="rect">
-            <a:avLst/>
-          </a:prstGeom>
-          <a:noFill/>
-          <a:ln/>
-        </p:spPr>
-        <p:txBody>
-          <a:bodyPr wrap="square" lIns="0" tIns="0" rIns="0" bIns="0" rtlCol="0" anchor="t"/>
-          <a:lstStyle/>
-          <a:p>
-            <a:pPr indent="0" marL="0">
-              <a:buNone/>
-            </a:pPr>
-            <a:r>
-              <a:rPr lang="en-US" sz="1800" b="1" dirty="0">
-                <a:solidFill>
                   <a:schemeClr val="tx1"/>
                 </a:solidFill>
               </a:rPr>
-              <a:t>Open source</a:t>
-            </a:r>
-            <a:endParaRPr lang="en-US" sz="1800" dirty="0"/>
-          </a:p>
-        </p:txBody>
-      </p:sp>
-      <p:sp>
-        <p:nvSpPr>
-          <p:cNvPr id="21" name="Meta 4"/>
-          <p:cNvSpPr txBox="1"/>
-          <p:nvPr/>
-        </p:nvSpPr>
-        <p:spPr>
-          <a:xfrm>
-            <a:off x="1554480" y="5596128"/>
-            <a:ext cx="9692640" cy="365760"/>
-          </a:xfrm>
-          <a:prstGeom prst="rect">
-            <a:avLst/>
-          </a:prstGeom>
-          <a:noFill/>
-          <a:ln/>
-        </p:spPr>
-        <p:txBody>
-          <a:bodyPr wrap="square" lIns="0" tIns="0" rIns="0" bIns="0" rtlCol="0" anchor="t"/>
-          <a:lstStyle/>
-          <a:p>
-            <a:pPr indent="0" marL="0">
-              <a:buNone/>
-            </a:pPr>
-            <a:r>
-              <a:rPr lang="en-US" sz="1600" dirty="0">
-                <a:solidFill>
-                  <a:schemeClr val="tx2"/>
-                </a:solidFill>
-              </a:rPr>
-              <a:t>Hacer público el repositorio y publicar los paquetes en npm</a:t>
+              <a:t>Las ADRs que cambiamos siguen ahí: BullMQ y Containers dieron paso a Workers.</a:t>
             </a:r>
             <a:endParaRPr lang="en-US" sz="1600" dirty="0"/>
           </a:p>
@@ -3434,6 +4087,2366 @@
           <a:chExt cx="0" cy="0"/>
         </a:xfrm>
       </p:grpSpPr>
+      <p:sp>
+        <p:nvSpPr>
+          <p:cNvPr id="2" name="Text 1"/>
+          <p:cNvSpPr/>
+          <p:nvPr>
+            <p:ph idx="101" type="title" hasCustomPrompt="1"/>
+          </p:nvPr>
+        </p:nvSpPr>
+        <p:spPr>
+          <a:xfrm>
+            <a:off x="548640" y="365760"/>
+            <a:ext cx="11064240" cy="868680"/>
+          </a:xfrm>
+          <a:prstGeom prst="rect">
+            <a:avLst/>
+          </a:prstGeom>
+          <a:noFill/>
+          <a:ln/>
+        </p:spPr>
+        <p:txBody>
+          <a:bodyPr wrap="square" lIns="0" tIns="0" rIns="0" bIns="0" rtlCol="0" anchor="ctr"/>
+          <a:lstStyle/>
+          <a:p>
+            <a:pPr algn="l" indent="0" marL="0">
+              <a:buNone/>
+            </a:pPr>
+            <a:r>
+              <a:rPr lang="en-US" sz="3200" b="1" dirty="0">
+                <a:solidFill>
+                  <a:schemeClr val="tx1"/>
+                </a:solidFill>
+              </a:rPr>
+              <a:t>Además es una librería: SDK y componentes</a:t>
+            </a:r>
+            <a:endParaRPr lang="en-US" sz="3200" dirty="0"/>
+          </a:p>
+        </p:txBody>
+      </p:sp>
+      <p:sp>
+        <p:nvSpPr>
+          <p:cNvPr id="3" name="SDK título"/>
+          <p:cNvSpPr txBox="1"/>
+          <p:nvPr/>
+        </p:nvSpPr>
+        <p:spPr>
+          <a:xfrm>
+            <a:off x="548640" y="1463040"/>
+            <a:ext cx="5394960" cy="365760"/>
+          </a:xfrm>
+          <a:prstGeom prst="rect">
+            <a:avLst/>
+          </a:prstGeom>
+          <a:noFill/>
+          <a:ln/>
+        </p:spPr>
+        <p:txBody>
+          <a:bodyPr wrap="square" lIns="0" tIns="0" rIns="0" bIns="0" rtlCol="0" anchor="t"/>
+          <a:lstStyle/>
+          <a:p>
+            <a:pPr indent="0" marL="0">
+              <a:buNone/>
+            </a:pPr>
+            <a:r>
+              <a:rPr lang="en-US" sz="2000" b="1" dirty="0">
+                <a:solidFill>
+                  <a:schemeClr val="tx1"/>
+                </a:solidFill>
+              </a:rPr>
+              <a:t>@notifyhub/client</a:t>
+            </a:r>
+            <a:endParaRPr lang="en-US" sz="2000" dirty="0"/>
+          </a:p>
+        </p:txBody>
+      </p:sp>
+      <p:sp>
+        <p:nvSpPr>
+          <p:cNvPr id="4" name="SDK fondo"/>
+          <p:cNvSpPr/>
+          <p:nvPr/>
+        </p:nvSpPr>
+        <p:spPr>
+          <a:xfrm>
+            <a:off x="548640" y="1920240"/>
+            <a:ext cx="5394960" cy="3063240"/>
+          </a:xfrm>
+          <a:prstGeom prst="roundRect">
+            <a:avLst>
+              <a:gd name="adj" fmla="val 2985"/>
+            </a:avLst>
+          </a:prstGeom>
+          <a:solidFill>
+            <a:schemeClr val="tx1"/>
+          </a:solidFill>
+          <a:ln w="12700">
+            <a:solidFill>
+              <a:schemeClr val="tx1"/>
+            </a:solidFill>
+            <a:prstDash val="solid"/>
+          </a:ln>
+        </p:spPr>
+      </p:sp>
+      <p:sp>
+        <p:nvSpPr>
+          <p:cNvPr id="5" name="SDK código"/>
+          <p:cNvSpPr txBox="1"/>
+          <p:nvPr/>
+        </p:nvSpPr>
+        <p:spPr>
+          <a:xfrm>
+            <a:off x="822960" y="2148840"/>
+            <a:ext cx="4846320" cy="2651760"/>
+          </a:xfrm>
+          <a:prstGeom prst="rect">
+            <a:avLst/>
+          </a:prstGeom>
+          <a:noFill/>
+          <a:ln/>
+        </p:spPr>
+        <p:txBody>
+          <a:bodyPr wrap="square" lIns="0" tIns="0" rIns="0" bIns="0" rtlCol="0" anchor="t"/>
+          <a:lstStyle/>
+          <a:p>
+            <a:pPr indent="0" marL="0">
+              <a:buNone/>
+            </a:pPr>
+            <a:r>
+              <a:rPr lang="en-US" sz="1400" dirty="0">
+                <a:solidFill>
+                  <a:schemeClr val="bg1"/>
+                </a:solidFill>
+                <a:latin typeface="Courier New" pitchFamily="34" charset="0"/>
+                <a:ea typeface="Courier New" pitchFamily="34" charset="-122"/>
+                <a:cs typeface="Courier New" pitchFamily="34" charset="-120"/>
+              </a:rPr>
+              <a:t>const nh = createNotifyHubClient({</a:t>
+            </a:r>
+            <a:endParaRPr lang="en-US" sz="1400" dirty="0"/>
+          </a:p>
+          <a:p>
+            <a:pPr indent="0" marL="0">
+              <a:buNone/>
+            </a:pPr>
+            <a:r>
+              <a:rPr lang="en-US" sz="1400" dirty="0">
+                <a:solidFill>
+                  <a:schemeClr val="bg1"/>
+                </a:solidFill>
+                <a:latin typeface="Courier New" pitchFamily="34" charset="0"/>
+                <a:ea typeface="Courier New" pitchFamily="34" charset="-122"/>
+                <a:cs typeface="Courier New" pitchFamily="34" charset="-120"/>
+              </a:rPr>
+              <a:t>  baseUrl, apiKey,</a:t>
+            </a:r>
+            <a:endParaRPr lang="en-US" sz="1400" dirty="0"/>
+          </a:p>
+          <a:p>
+            <a:pPr indent="0" marL="0">
+              <a:buNone/>
+            </a:pPr>
+            <a:r>
+              <a:rPr lang="en-US" sz="1400" dirty="0">
+                <a:solidFill>
+                  <a:schemeClr val="bg1"/>
+                </a:solidFill>
+                <a:latin typeface="Courier New" pitchFamily="34" charset="0"/>
+                <a:ea typeface="Courier New" pitchFamily="34" charset="-122"/>
+                <a:cs typeface="Courier New" pitchFamily="34" charset="-120"/>
+              </a:rPr>
+              <a:t>});</a:t>
+            </a:r>
+            <a:endParaRPr lang="en-US" sz="1400" dirty="0"/>
+          </a:p>
+          <a:p>
+            <a:pPr indent="0" marL="0">
+              <a:buNone/>
+            </a:pPr>
+            <a:endParaRPr lang="en-US" sz="1400" dirty="0"/>
+          </a:p>
+          <a:p>
+            <a:pPr indent="0" marL="0">
+              <a:buNone/>
+            </a:pPr>
+            <a:r>
+              <a:rPr lang="en-US" sz="1400" dirty="0">
+                <a:solidFill>
+                  <a:schemeClr val="bg1"/>
+                </a:solidFill>
+                <a:latin typeface="Courier New" pitchFamily="34" charset="0"/>
+                <a:ea typeface="Courier New" pitchFamily="34" charset="-122"/>
+                <a:cs typeface="Courier New" pitchFamily="34" charset="-120"/>
+              </a:rPr>
+              <a:t>const { id } = await nh</a:t>
+            </a:r>
+            <a:endParaRPr lang="en-US" sz="1400" dirty="0"/>
+          </a:p>
+          <a:p>
+            <a:pPr indent="0" marL="0">
+              <a:buNone/>
+            </a:pPr>
+            <a:r>
+              <a:rPr lang="en-US" sz="1400" dirty="0">
+                <a:solidFill>
+                  <a:schemeClr val="bg1"/>
+                </a:solidFill>
+                <a:latin typeface="Courier New" pitchFamily="34" charset="0"/>
+                <a:ea typeface="Courier New" pitchFamily="34" charset="-122"/>
+                <a:cs typeface="Courier New" pitchFamily="34" charset="-120"/>
+              </a:rPr>
+              <a:t>  .notifications.create(payload);</a:t>
+            </a:r>
+            <a:endParaRPr lang="en-US" sz="1400" dirty="0"/>
+          </a:p>
+          <a:p>
+            <a:pPr indent="0" marL="0">
+              <a:buNone/>
+            </a:pPr>
+            <a:endParaRPr lang="en-US" sz="1400" dirty="0"/>
+          </a:p>
+          <a:p>
+            <a:pPr indent="0" marL="0">
+              <a:buNone/>
+            </a:pPr>
+            <a:r>
+              <a:rPr lang="en-US" sz="1400" dirty="0">
+                <a:solidFill>
+                  <a:schemeClr val="bg1"/>
+                </a:solidFill>
+                <a:latin typeface="Courier New" pitchFamily="34" charset="0"/>
+                <a:ea typeface="Courier New" pitchFamily="34" charset="-122"/>
+                <a:cs typeface="Courier New" pitchFamily="34" charset="-120"/>
+              </a:rPr>
+              <a:t>const { attempts } = await nh</a:t>
+            </a:r>
+            <a:endParaRPr lang="en-US" sz="1400" dirty="0"/>
+          </a:p>
+          <a:p>
+            <a:pPr indent="0" marL="0">
+              <a:buNone/>
+            </a:pPr>
+            <a:r>
+              <a:rPr lang="en-US" sz="1400" dirty="0">
+                <a:solidFill>
+                  <a:schemeClr val="bg1"/>
+                </a:solidFill>
+                <a:latin typeface="Courier New" pitchFamily="34" charset="0"/>
+                <a:ea typeface="Courier New" pitchFamily="34" charset="-122"/>
+                <a:cs typeface="Courier New" pitchFamily="34" charset="-120"/>
+              </a:rPr>
+              <a:t>  .notifications.get(id);</a:t>
+            </a:r>
+            <a:endParaRPr lang="en-US" sz="1400" dirty="0"/>
+          </a:p>
+        </p:txBody>
+      </p:sp>
+      <p:sp>
+        <p:nvSpPr>
+          <p:cNvPr id="6" name="UI título"/>
+          <p:cNvSpPr txBox="1"/>
+          <p:nvPr/>
+        </p:nvSpPr>
+        <p:spPr>
+          <a:xfrm>
+            <a:off x="6263640" y="1463040"/>
+            <a:ext cx="5394960" cy="365760"/>
+          </a:xfrm>
+          <a:prstGeom prst="rect">
+            <a:avLst/>
+          </a:prstGeom>
+          <a:noFill/>
+          <a:ln/>
+        </p:spPr>
+        <p:txBody>
+          <a:bodyPr wrap="square" lIns="0" tIns="0" rIns="0" bIns="0" rtlCol="0" anchor="t"/>
+          <a:lstStyle/>
+          <a:p>
+            <a:pPr indent="0" marL="0">
+              <a:buNone/>
+            </a:pPr>
+            <a:r>
+              <a:rPr lang="en-US" sz="2000" b="1" dirty="0">
+                <a:solidFill>
+                  <a:schemeClr val="tx1"/>
+                </a:solidFill>
+              </a:rPr>
+              <a:t>@notifyhub/ui</a:t>
+            </a:r>
+            <a:endParaRPr lang="en-US" sz="2000" dirty="0"/>
+          </a:p>
+        </p:txBody>
+      </p:sp>
+      <p:sp>
+        <p:nvSpPr>
+          <p:cNvPr id="7" name="UI fondo"/>
+          <p:cNvSpPr/>
+          <p:nvPr/>
+        </p:nvSpPr>
+        <p:spPr>
+          <a:xfrm>
+            <a:off x="6263640" y="1920240"/>
+            <a:ext cx="5394960" cy="3063240"/>
+          </a:xfrm>
+          <a:prstGeom prst="roundRect">
+            <a:avLst>
+              <a:gd name="adj" fmla="val 2985"/>
+            </a:avLst>
+          </a:prstGeom>
+          <a:solidFill>
+            <a:schemeClr val="tx1"/>
+          </a:solidFill>
+          <a:ln w="12700">
+            <a:solidFill>
+              <a:schemeClr val="tx1"/>
+            </a:solidFill>
+            <a:prstDash val="solid"/>
+          </a:ln>
+        </p:spPr>
+      </p:sp>
+      <p:sp>
+        <p:nvSpPr>
+          <p:cNvPr id="8" name="UI código"/>
+          <p:cNvSpPr txBox="1"/>
+          <p:nvPr/>
+        </p:nvSpPr>
+        <p:spPr>
+          <a:xfrm>
+            <a:off x="6537960" y="2148840"/>
+            <a:ext cx="4846320" cy="2651760"/>
+          </a:xfrm>
+          <a:prstGeom prst="rect">
+            <a:avLst/>
+          </a:prstGeom>
+          <a:noFill/>
+          <a:ln/>
+        </p:spPr>
+        <p:txBody>
+          <a:bodyPr wrap="square" lIns="0" tIns="0" rIns="0" bIns="0" rtlCol="0" anchor="t"/>
+          <a:lstStyle/>
+          <a:p>
+            <a:pPr indent="0" marL="0">
+              <a:buNone/>
+            </a:pPr>
+            <a:r>
+              <a:rPr lang="en-US" sz="1400" dirty="0">
+                <a:solidFill>
+                  <a:schemeClr val="bg1"/>
+                </a:solidFill>
+                <a:latin typeface="Courier New" pitchFamily="34" charset="0"/>
+                <a:ea typeface="Courier New" pitchFamily="34" charset="-122"/>
+                <a:cs typeface="Courier New" pitchFamily="34" charset="-120"/>
+              </a:rPr>
+              <a:t>&lt;NotifyHubProvider client={nh}&gt;</a:t>
+            </a:r>
+            <a:endParaRPr lang="en-US" sz="1400" dirty="0"/>
+          </a:p>
+          <a:p>
+            <a:pPr indent="0" marL="0">
+              <a:buNone/>
+            </a:pPr>
+            <a:r>
+              <a:rPr lang="en-US" sz="1400" dirty="0">
+                <a:solidFill>
+                  <a:schemeClr val="bg1"/>
+                </a:solidFill>
+                <a:latin typeface="Courier New" pitchFamily="34" charset="0"/>
+                <a:ea typeface="Courier New" pitchFamily="34" charset="-122"/>
+                <a:cs typeface="Courier New" pitchFamily="34" charset="-120"/>
+              </a:rPr>
+              <a:t>  &lt;NotificationDetail</a:t>
+            </a:r>
+            <a:endParaRPr lang="en-US" sz="1400" dirty="0"/>
+          </a:p>
+          <a:p>
+            <a:pPr indent="0" marL="0">
+              <a:buNone/>
+            </a:pPr>
+            <a:r>
+              <a:rPr lang="en-US" sz="1400" dirty="0">
+                <a:solidFill>
+                  <a:schemeClr val="bg1"/>
+                </a:solidFill>
+                <a:latin typeface="Courier New" pitchFamily="34" charset="0"/>
+                <a:ea typeface="Courier New" pitchFamily="34" charset="-122"/>
+                <a:cs typeface="Courier New" pitchFamily="34" charset="-120"/>
+              </a:rPr>
+              <a:t>    item={item}</a:t>
+            </a:r>
+            <a:endParaRPr lang="en-US" sz="1400" dirty="0"/>
+          </a:p>
+          <a:p>
+            <a:pPr indent="0" marL="0">
+              <a:buNone/>
+            </a:pPr>
+            <a:r>
+              <a:rPr lang="en-US" sz="1400" dirty="0">
+                <a:solidFill>
+                  <a:schemeClr val="bg1"/>
+                </a:solidFill>
+                <a:latin typeface="Courier New" pitchFamily="34" charset="0"/>
+                <a:ea typeface="Courier New" pitchFamily="34" charset="-122"/>
+                <a:cs typeface="Courier New" pitchFamily="34" charset="-120"/>
+              </a:rPr>
+              <a:t>    detail={detail}</a:t>
+            </a:r>
+            <a:endParaRPr lang="en-US" sz="1400" dirty="0"/>
+          </a:p>
+          <a:p>
+            <a:pPr indent="0" marL="0">
+              <a:buNone/>
+            </a:pPr>
+            <a:r>
+              <a:rPr lang="en-US" sz="1400" dirty="0">
+                <a:solidFill>
+                  <a:schemeClr val="bg1"/>
+                </a:solidFill>
+                <a:latin typeface="Courier New" pitchFamily="34" charset="0"/>
+                <a:ea typeface="Courier New" pitchFamily="34" charset="-122"/>
+                <a:cs typeface="Courier New" pitchFamily="34" charset="-120"/>
+              </a:rPr>
+              <a:t>  /&gt;</a:t>
+            </a:r>
+            <a:endParaRPr lang="en-US" sz="1400" dirty="0"/>
+          </a:p>
+          <a:p>
+            <a:pPr indent="0" marL="0">
+              <a:buNone/>
+            </a:pPr>
+            <a:r>
+              <a:rPr lang="en-US" sz="1400" dirty="0">
+                <a:solidFill>
+                  <a:schemeClr val="bg1"/>
+                </a:solidFill>
+                <a:latin typeface="Courier New" pitchFamily="34" charset="0"/>
+                <a:ea typeface="Courier New" pitchFamily="34" charset="-122"/>
+                <a:cs typeface="Courier New" pitchFamily="34" charset="-120"/>
+              </a:rPr>
+              <a:t>&lt;/NotifyHubProvider&gt;</a:t>
+            </a:r>
+            <a:endParaRPr lang="en-US" sz="1400" dirty="0"/>
+          </a:p>
+          <a:p>
+            <a:pPr indent="0" marL="0">
+              <a:buNone/>
+            </a:pPr>
+            <a:endParaRPr lang="en-US" sz="1400" dirty="0"/>
+          </a:p>
+          <a:p>
+            <a:pPr indent="0" marL="0">
+              <a:buNone/>
+            </a:pPr>
+            <a:r>
+              <a:rPr lang="en-US" sz="1400" dirty="0">
+                <a:solidFill>
+                  <a:schemeClr val="bg1"/>
+                </a:solidFill>
+                <a:latin typeface="Courier New" pitchFamily="34" charset="0"/>
+                <a:ea typeface="Courier New" pitchFamily="34" charset="-122"/>
+                <a:cs typeface="Courier New" pitchFamily="34" charset="-120"/>
+              </a:rPr>
+              <a:t>// la ruta del mensaje, lista</a:t>
+            </a:r>
+            <a:endParaRPr lang="en-US" sz="1400" dirty="0"/>
+          </a:p>
+        </p:txBody>
+      </p:sp>
+      <p:sp>
+        <p:nvSpPr>
+          <p:cNvPr id="9" name="Marcador 1"/>
+          <p:cNvSpPr/>
+          <p:nvPr/>
+        </p:nvSpPr>
+        <p:spPr>
+          <a:xfrm>
+            <a:off x="548640" y="5349240"/>
+            <a:ext cx="457200" cy="109728"/>
+          </a:xfrm>
+          <a:prstGeom prst="roundRect">
+            <a:avLst>
+              <a:gd name="adj" fmla="val 50000"/>
+            </a:avLst>
+          </a:prstGeom>
+          <a:solidFill>
+            <a:schemeClr val="accent1"/>
+          </a:solidFill>
+          <a:ln w="12700">
+            <a:solidFill>
+              <a:schemeClr val="accent1"/>
+            </a:solidFill>
+            <a:prstDash val="solid"/>
+          </a:ln>
+        </p:spPr>
+      </p:sp>
+      <p:sp>
+        <p:nvSpPr>
+          <p:cNvPr id="10" name="Etiqueta 1"/>
+          <p:cNvSpPr txBox="1"/>
+          <p:nvPr/>
+        </p:nvSpPr>
+        <p:spPr>
+          <a:xfrm>
+            <a:off x="548640" y="5532120"/>
+            <a:ext cx="2560320" cy="365760"/>
+          </a:xfrm>
+          <a:prstGeom prst="rect">
+            <a:avLst/>
+          </a:prstGeom>
+          <a:noFill/>
+          <a:ln/>
+        </p:spPr>
+        <p:txBody>
+          <a:bodyPr wrap="square" lIns="0" tIns="0" rIns="0" bIns="0" rtlCol="0" anchor="t"/>
+          <a:lstStyle/>
+          <a:p>
+            <a:pPr indent="0" marL="0">
+              <a:buNone/>
+            </a:pPr>
+            <a:r>
+              <a:rPr lang="en-US" sz="1800" b="1" dirty="0">
+                <a:solidFill>
+                  <a:schemeClr val="tx1"/>
+                </a:solidFill>
+              </a:rPr>
+              <a:t>Licencia MIT</a:t>
+            </a:r>
+            <a:endParaRPr lang="en-US" sz="1800" dirty="0"/>
+          </a:p>
+        </p:txBody>
+      </p:sp>
+      <p:sp>
+        <p:nvSpPr>
+          <p:cNvPr id="11" name="Marcador 2"/>
+          <p:cNvSpPr/>
+          <p:nvPr/>
+        </p:nvSpPr>
+        <p:spPr>
+          <a:xfrm>
+            <a:off x="3383280" y="5349240"/>
+            <a:ext cx="457200" cy="109728"/>
+          </a:xfrm>
+          <a:prstGeom prst="roundRect">
+            <a:avLst>
+              <a:gd name="adj" fmla="val 50000"/>
+            </a:avLst>
+          </a:prstGeom>
+          <a:solidFill>
+            <a:schemeClr val="accent2"/>
+          </a:solidFill>
+          <a:ln w="12700">
+            <a:solidFill>
+              <a:schemeClr val="accent2"/>
+            </a:solidFill>
+            <a:prstDash val="solid"/>
+          </a:ln>
+        </p:spPr>
+      </p:sp>
+      <p:sp>
+        <p:nvSpPr>
+          <p:cNvPr id="12" name="Etiqueta 2"/>
+          <p:cNvSpPr txBox="1"/>
+          <p:nvPr/>
+        </p:nvSpPr>
+        <p:spPr>
+          <a:xfrm>
+            <a:off x="3383280" y="5532120"/>
+            <a:ext cx="2560320" cy="365760"/>
+          </a:xfrm>
+          <a:prstGeom prst="rect">
+            <a:avLst/>
+          </a:prstGeom>
+          <a:noFill/>
+          <a:ln/>
+        </p:spPr>
+        <p:txBody>
+          <a:bodyPr wrap="square" lIns="0" tIns="0" rIns="0" bIns="0" rtlCol="0" anchor="t"/>
+          <a:lstStyle/>
+          <a:p>
+            <a:pPr indent="0" marL="0">
+              <a:buNone/>
+            </a:pPr>
+            <a:r>
+              <a:rPr lang="en-US" sz="1800" b="1" dirty="0">
+                <a:solidFill>
+                  <a:schemeClr val="tx1"/>
+                </a:solidFill>
+              </a:rPr>
+              <a:t>ESM, CJS y tipos</a:t>
+            </a:r>
+            <a:endParaRPr lang="en-US" sz="1800" dirty="0"/>
+          </a:p>
+        </p:txBody>
+      </p:sp>
+      <p:sp>
+        <p:nvSpPr>
+          <p:cNvPr id="13" name="Marcador 3"/>
+          <p:cNvSpPr/>
+          <p:nvPr/>
+        </p:nvSpPr>
+        <p:spPr>
+          <a:xfrm>
+            <a:off x="6217920" y="5349240"/>
+            <a:ext cx="457200" cy="109728"/>
+          </a:xfrm>
+          <a:prstGeom prst="roundRect">
+            <a:avLst>
+              <a:gd name="adj" fmla="val 50000"/>
+            </a:avLst>
+          </a:prstGeom>
+          <a:solidFill>
+            <a:schemeClr val="accent3"/>
+          </a:solidFill>
+          <a:ln w="12700">
+            <a:solidFill>
+              <a:schemeClr val="accent3"/>
+            </a:solidFill>
+            <a:prstDash val="solid"/>
+          </a:ln>
+        </p:spPr>
+      </p:sp>
+      <p:sp>
+        <p:nvSpPr>
+          <p:cNvPr id="14" name="Etiqueta 3"/>
+          <p:cNvSpPr txBox="1"/>
+          <p:nvPr/>
+        </p:nvSpPr>
+        <p:spPr>
+          <a:xfrm>
+            <a:off x="6217920" y="5532120"/>
+            <a:ext cx="2560320" cy="365760"/>
+          </a:xfrm>
+          <a:prstGeom prst="rect">
+            <a:avLst/>
+          </a:prstGeom>
+          <a:noFill/>
+          <a:ln/>
+        </p:spPr>
+        <p:txBody>
+          <a:bodyPr wrap="square" lIns="0" tIns="0" rIns="0" bIns="0" rtlCol="0" anchor="t"/>
+          <a:lstStyle/>
+          <a:p>
+            <a:pPr indent="0" marL="0">
+              <a:buNone/>
+            </a:pPr>
+            <a:r>
+              <a:rPr lang="en-US" sz="1800" b="1" dirty="0">
+                <a:solidFill>
+                  <a:schemeClr val="tx1"/>
+                </a:solidFill>
+              </a:rPr>
+              <a:t>Tailwind v4</a:t>
+            </a:r>
+            <a:endParaRPr lang="en-US" sz="1800" dirty="0"/>
+          </a:p>
+        </p:txBody>
+      </p:sp>
+      <p:sp>
+        <p:nvSpPr>
+          <p:cNvPr id="15" name="Marcador 4"/>
+          <p:cNvSpPr/>
+          <p:nvPr/>
+        </p:nvSpPr>
+        <p:spPr>
+          <a:xfrm>
+            <a:off x="9052560" y="5349240"/>
+            <a:ext cx="457200" cy="109728"/>
+          </a:xfrm>
+          <a:prstGeom prst="roundRect">
+            <a:avLst>
+              <a:gd name="adj" fmla="val 50000"/>
+            </a:avLst>
+          </a:prstGeom>
+          <a:solidFill>
+            <a:schemeClr val="accent4"/>
+          </a:solidFill>
+          <a:ln w="12700">
+            <a:solidFill>
+              <a:schemeClr val="accent4"/>
+            </a:solidFill>
+            <a:prstDash val="solid"/>
+          </a:ln>
+        </p:spPr>
+      </p:sp>
+      <p:sp>
+        <p:nvSpPr>
+          <p:cNvPr id="16" name="Etiqueta 4"/>
+          <p:cNvSpPr txBox="1"/>
+          <p:nvPr/>
+        </p:nvSpPr>
+        <p:spPr>
+          <a:xfrm>
+            <a:off x="9052560" y="5532120"/>
+            <a:ext cx="2560320" cy="365760"/>
+          </a:xfrm>
+          <a:prstGeom prst="rect">
+            <a:avLst/>
+          </a:prstGeom>
+          <a:noFill/>
+          <a:ln/>
+        </p:spPr>
+        <p:txBody>
+          <a:bodyPr wrap="square" lIns="0" tIns="0" rIns="0" bIns="0" rtlCol="0" anchor="t"/>
+          <a:lstStyle/>
+          <a:p>
+            <a:pPr indent="0" marL="0">
+              <a:buNone/>
+            </a:pPr>
+            <a:r>
+              <a:rPr lang="en-US" sz="1800" b="1" dirty="0">
+                <a:solidFill>
+                  <a:schemeClr val="tx1"/>
+                </a:solidFill>
+              </a:rPr>
+              <a:t>45 pruebas</a:t>
+            </a:r>
+            <a:endParaRPr lang="en-US" sz="1800" dirty="0"/>
+          </a:p>
+        </p:txBody>
+      </p:sp>
+      <p:sp>
+        <p:nvSpPr>
+          <p:cNvPr id="25" name="Slide Number Placeholder 0"/>
+          <p:cNvSpPr>
+            <a:spLocks noGrp="1"/>
+          </p:cNvSpPr>
+          <p:nvPr>
+            <p:ph type="sldNum" sz="quarter" idx="4294967295"/>
+          </p:nvPr>
+        </p:nvSpPr>
+        <p:spPr>
+          <a:xfrm>
+            <a:off x="11064240" y="6419088"/>
+            <a:ext cx="594360" cy="274320"/>
+          </a:xfrm>
+          <a:prstGeom prst="rect">
+            <a:avLst/>
+          </a:prstGeom>
+          <a:extLst>
+            <a:ext uri="{C572A759-6A51-4108-AA02-DFA0A04FC94B}">
+              <ma14:wrappingTextBoxFlag xmlns:ma14="http://schemas.microsoft.com/office/mac/drawingml/2011/main" val="0"/>
+            </a:ext>
+          </a:extLst>
+        </p:spPr>
+        <p:txBody>
+          <a:bodyPr/>
+          <a:lstStyle>
+            <a:lvl1pPr>
+              <a:defRPr sz="1000">
+                <a:solidFill>
+                  <a:schemeClr val="tx2"/>
+                </a:solidFill>
+              </a:defRPr>
+            </a:lvl1pPr>
+          </a:lstStyle>
+          <a:p>
+            <a:pPr algn="r"/>
+            <a:fld id="{F7021451-1387-4CA6-816F-3879F97B5CBC}" type="slidenum">
+              <a:rPr b="0" lang="en-US"/>
+              <a:t>11</a:t>
+            </a:fld>
+            <a:endParaRPr lang="en-US"/>
+          </a:p>
+        </p:txBody>
+      </p:sp>
+    </p:spTree>
+  </p:cSld>
+  <p:clrMapOvr>
+    <a:masterClrMapping/>
+  </p:clrMapOvr>
+</p:sld>
+</file>
+
+<file path=ppt/slides/slide12.xml><?xml version="1.0" encoding="utf-8"?>
+<p:sld xmlns:a="http://schemas.openxmlformats.org/drawingml/2006/main" xmlns:r="http://schemas.openxmlformats.org/officeDocument/2006/relationships" xmlns:p="http://schemas.openxmlformats.org/presentationml/2006/main">
+  <p:cSld name="Slide 12">
+    <p:spTree>
+      <p:nvGrpSpPr>
+        <p:cNvPr id="1" name=""/>
+        <p:cNvGrpSpPr/>
+        <p:nvPr/>
+      </p:nvGrpSpPr>
+      <p:grpSpPr>
+        <a:xfrm>
+          <a:off x="0" y="0"/>
+          <a:ext cx="0" cy="0"/>
+          <a:chOff x="0" y="0"/>
+          <a:chExt cx="0" cy="0"/>
+        </a:xfrm>
+      </p:grpSpPr>
+      <p:sp>
+        <p:nvSpPr>
+          <p:cNvPr id="2" name="Text 1"/>
+          <p:cNvSpPr/>
+          <p:nvPr>
+            <p:ph idx="101" type="title" hasCustomPrompt="1"/>
+          </p:nvPr>
+        </p:nvSpPr>
+        <p:spPr>
+          <a:xfrm>
+            <a:off x="548640" y="365760"/>
+            <a:ext cx="11064240" cy="868680"/>
+          </a:xfrm>
+          <a:prstGeom prst="rect">
+            <a:avLst/>
+          </a:prstGeom>
+          <a:noFill/>
+          <a:ln/>
+        </p:spPr>
+        <p:txBody>
+          <a:bodyPr wrap="square" lIns="0" tIns="0" rIns="0" bIns="0" rtlCol="0" anchor="ctr"/>
+          <a:lstStyle/>
+          <a:p>
+            <a:pPr algn="l" indent="0" marL="0">
+              <a:buNone/>
+            </a:pPr>
+            <a:r>
+              <a:rPr lang="en-US" sz="3200" b="1" dirty="0">
+                <a:solidFill>
+                  <a:schemeClr val="tx1"/>
+                </a:solidFill>
+              </a:rPr>
+              <a:t>Qué es real, qué es simulado y qué falta</a:t>
+            </a:r>
+            <a:endParaRPr lang="en-US" sz="3200" dirty="0"/>
+          </a:p>
+        </p:txBody>
+      </p:sp>
+      <p:sp>
+        <p:nvSpPr>
+          <p:cNvPr id="3" name="Columna Real"/>
+          <p:cNvSpPr/>
+          <p:nvPr/>
+        </p:nvSpPr>
+        <p:spPr>
+          <a:xfrm>
+            <a:off x="548640" y="1508760"/>
+            <a:ext cx="3566160" cy="3246120"/>
+          </a:xfrm>
+          <a:prstGeom prst="roundRect">
+            <a:avLst>
+              <a:gd name="adj" fmla="val 3380"/>
+            </a:avLst>
+          </a:prstGeom>
+          <a:solidFill>
+            <a:schemeClr val="bg2"/>
+          </a:solidFill>
+          <a:ln w="6350">
+            <a:solidFill>
+              <a:schemeClr val="bg1"/>
+            </a:solidFill>
+            <a:prstDash val="solid"/>
+          </a:ln>
+          <a:effectLst>
+            <a:outerShdw sx="100000" sy="100000" kx="0" ky="0" algn="bl" rotWithShape="0" blurRad="76200" dist="25400" dir="5400000">
+              <a:srgbClr val="000000">
+                <a:alpha val="10000"/>
+              </a:srgbClr>
+            </a:outerShdw>
+          </a:effectLst>
+        </p:spPr>
+      </p:sp>
+      <p:sp>
+        <p:nvSpPr>
+          <p:cNvPr id="4" name="Marcador Real"/>
+          <p:cNvSpPr/>
+          <p:nvPr/>
+        </p:nvSpPr>
+        <p:spPr>
+          <a:xfrm>
+            <a:off x="822960" y="1737360"/>
+            <a:ext cx="502920" cy="109728"/>
+          </a:xfrm>
+          <a:prstGeom prst="roundRect">
+            <a:avLst>
+              <a:gd name="adj" fmla="val 50000"/>
+            </a:avLst>
+          </a:prstGeom>
+          <a:solidFill>
+            <a:schemeClr val="accent6"/>
+          </a:solidFill>
+          <a:ln w="12700">
+            <a:solidFill>
+              <a:schemeClr val="accent6"/>
+            </a:solidFill>
+            <a:prstDash val="solid"/>
+          </a:ln>
+        </p:spPr>
+      </p:sp>
+      <p:sp>
+        <p:nvSpPr>
+          <p:cNvPr id="5" name="Título Real"/>
+          <p:cNvSpPr txBox="1"/>
+          <p:nvPr/>
+        </p:nvSpPr>
+        <p:spPr>
+          <a:xfrm>
+            <a:off x="822960" y="1920240"/>
+            <a:ext cx="3017520" cy="411480"/>
+          </a:xfrm>
+          <a:prstGeom prst="rect">
+            <a:avLst/>
+          </a:prstGeom>
+          <a:noFill/>
+          <a:ln/>
+        </p:spPr>
+        <p:txBody>
+          <a:bodyPr wrap="square" lIns="0" tIns="0" rIns="0" bIns="0" rtlCol="0" anchor="t"/>
+          <a:lstStyle/>
+          <a:p>
+            <a:pPr indent="0" marL="0">
+              <a:buNone/>
+            </a:pPr>
+            <a:r>
+              <a:rPr lang="en-US" sz="2200" b="1" dirty="0">
+                <a:solidFill>
+                  <a:schemeClr val="tx1"/>
+                </a:solidFill>
+              </a:rPr>
+              <a:t>Real</a:t>
+            </a:r>
+            <a:endParaRPr lang="en-US" sz="2200" dirty="0"/>
+          </a:p>
+        </p:txBody>
+      </p:sp>
+      <p:sp>
+        <p:nvSpPr>
+          <p:cNvPr id="6" name="Lista Real"/>
+          <p:cNvSpPr txBox="1"/>
+          <p:nvPr/>
+        </p:nvSpPr>
+        <p:spPr>
+          <a:xfrm>
+            <a:off x="822960" y="2468880"/>
+            <a:ext cx="3017520" cy="2194560"/>
+          </a:xfrm>
+          <a:prstGeom prst="rect">
+            <a:avLst/>
+          </a:prstGeom>
+          <a:noFill/>
+          <a:ln/>
+        </p:spPr>
+        <p:txBody>
+          <a:bodyPr wrap="square" lIns="0" tIns="0" rIns="0" bIns="0" rtlCol="0" anchor="t"/>
+          <a:lstStyle/>
+          <a:p>
+            <a:pPr marL="177800" indent="-177800">
+              <a:spcAft>
+                <a:spcPts val="600"/>
+              </a:spcAft>
+              <a:buSzPct val="100000"/>
+              <a:buChar char="•"/>
+            </a:pPr>
+            <a:r>
+              <a:rPr lang="en-US" sz="1400" dirty="0">
+                <a:solidFill>
+                  <a:schemeClr val="tx1"/>
+                </a:solidFill>
+              </a:rPr>
+              <a:t>Recepción con idempotencia y límite de solicitudes</a:t>
+            </a:r>
+            <a:endParaRPr lang="en-US" sz="1400" dirty="0"/>
+          </a:p>
+          <a:p>
+            <a:pPr marL="177800" indent="-177800">
+              <a:spcAft>
+                <a:spcPts val="600"/>
+              </a:spcAft>
+              <a:buSzPct val="100000"/>
+              <a:buChar char="•"/>
+            </a:pPr>
+            <a:r>
+              <a:rPr lang="en-US" sz="1400" dirty="0">
+                <a:solidFill>
+                  <a:schemeClr val="tx1"/>
+                </a:solidFill>
+              </a:rPr>
+              <a:t>Colas por prioridad y máquina de estados</a:t>
+            </a:r>
+            <a:endParaRPr lang="en-US" sz="1400" dirty="0"/>
+          </a:p>
+          <a:p>
+            <a:pPr marL="177800" indent="-177800">
+              <a:spcAft>
+                <a:spcPts val="600"/>
+              </a:spcAft>
+              <a:buSzPct val="100000"/>
+              <a:buChar char="•"/>
+            </a:pPr>
+            <a:r>
+              <a:rPr lang="en-US" sz="1400" dirty="0">
+                <a:solidFill>
+                  <a:schemeClr val="tx1"/>
+                </a:solidFill>
+              </a:rPr>
+              <a:t>Reintentos, fallback, intentos y bitácora en Postgres</a:t>
+            </a:r>
+            <a:endParaRPr lang="en-US" sz="1400" dirty="0"/>
+          </a:p>
+          <a:p>
+            <a:pPr marL="177800" indent="-177800">
+              <a:spcAft>
+                <a:spcPts val="600"/>
+              </a:spcAft>
+              <a:buSzPct val="100000"/>
+              <a:buChar char="•"/>
+            </a:pPr>
+            <a:r>
+              <a:rPr lang="en-US" sz="1400" dirty="0">
+                <a:solidFill>
+                  <a:schemeClr val="tx1"/>
+                </a:solidFill>
+              </a:rPr>
+              <a:t>API, SDK y consola web</a:t>
+            </a:r>
+            <a:endParaRPr lang="en-US" sz="1400" dirty="0"/>
+          </a:p>
+        </p:txBody>
+      </p:sp>
+      <p:sp>
+        <p:nvSpPr>
+          <p:cNvPr id="7" name="Columna Simulado"/>
+          <p:cNvSpPr/>
+          <p:nvPr/>
+        </p:nvSpPr>
+        <p:spPr>
+          <a:xfrm>
+            <a:off x="4297680" y="1508760"/>
+            <a:ext cx="3566160" cy="3246120"/>
+          </a:xfrm>
+          <a:prstGeom prst="roundRect">
+            <a:avLst>
+              <a:gd name="adj" fmla="val 3380"/>
+            </a:avLst>
+          </a:prstGeom>
+          <a:solidFill>
+            <a:schemeClr val="bg2"/>
+          </a:solidFill>
+          <a:ln w="6350">
+            <a:solidFill>
+              <a:schemeClr val="bg1"/>
+            </a:solidFill>
+            <a:prstDash val="solid"/>
+          </a:ln>
+          <a:effectLst>
+            <a:outerShdw sx="100000" sy="100000" kx="0" ky="0" algn="bl" rotWithShape="0" blurRad="76200" dist="25400" dir="5400000">
+              <a:srgbClr val="000000">
+                <a:alpha val="10000"/>
+              </a:srgbClr>
+            </a:outerShdw>
+          </a:effectLst>
+        </p:spPr>
+      </p:sp>
+      <p:sp>
+        <p:nvSpPr>
+          <p:cNvPr id="8" name="Marcador Simulado"/>
+          <p:cNvSpPr/>
+          <p:nvPr/>
+        </p:nvSpPr>
+        <p:spPr>
+          <a:xfrm>
+            <a:off x="4572000" y="1737360"/>
+            <a:ext cx="502920" cy="109728"/>
+          </a:xfrm>
+          <a:prstGeom prst="roundRect">
+            <a:avLst>
+              <a:gd name="adj" fmla="val 50000"/>
+            </a:avLst>
+          </a:prstGeom>
+          <a:solidFill>
+            <a:schemeClr val="accent1"/>
+          </a:solidFill>
+          <a:ln w="12700">
+            <a:solidFill>
+              <a:schemeClr val="accent1"/>
+            </a:solidFill>
+            <a:prstDash val="solid"/>
+          </a:ln>
+        </p:spPr>
+      </p:sp>
+      <p:sp>
+        <p:nvSpPr>
+          <p:cNvPr id="9" name="Título Simulado"/>
+          <p:cNvSpPr txBox="1"/>
+          <p:nvPr/>
+        </p:nvSpPr>
+        <p:spPr>
+          <a:xfrm>
+            <a:off x="4572000" y="1920240"/>
+            <a:ext cx="3017520" cy="411480"/>
+          </a:xfrm>
+          <a:prstGeom prst="rect">
+            <a:avLst/>
+          </a:prstGeom>
+          <a:noFill/>
+          <a:ln/>
+        </p:spPr>
+        <p:txBody>
+          <a:bodyPr wrap="square" lIns="0" tIns="0" rIns="0" bIns="0" rtlCol="0" anchor="t"/>
+          <a:lstStyle/>
+          <a:p>
+            <a:pPr indent="0" marL="0">
+              <a:buNone/>
+            </a:pPr>
+            <a:r>
+              <a:rPr lang="en-US" sz="2200" b="1" dirty="0">
+                <a:solidFill>
+                  <a:schemeClr val="tx1"/>
+                </a:solidFill>
+              </a:rPr>
+              <a:t>Simulado</a:t>
+            </a:r>
+            <a:endParaRPr lang="en-US" sz="2200" dirty="0"/>
+          </a:p>
+        </p:txBody>
+      </p:sp>
+      <p:sp>
+        <p:nvSpPr>
+          <p:cNvPr id="10" name="Lista Simulado"/>
+          <p:cNvSpPr txBox="1"/>
+          <p:nvPr/>
+        </p:nvSpPr>
+        <p:spPr>
+          <a:xfrm>
+            <a:off x="4572000" y="2468880"/>
+            <a:ext cx="3017520" cy="2194560"/>
+          </a:xfrm>
+          <a:prstGeom prst="rect">
+            <a:avLst/>
+          </a:prstGeom>
+          <a:noFill/>
+          <a:ln/>
+        </p:spPr>
+        <p:txBody>
+          <a:bodyPr wrap="square" lIns="0" tIns="0" rIns="0" bIns="0" rtlCol="0" anchor="t"/>
+          <a:lstStyle/>
+          <a:p>
+            <a:pPr marL="177800" indent="-177800">
+              <a:spcAft>
+                <a:spcPts val="600"/>
+              </a:spcAft>
+              <a:buSzPct val="100000"/>
+              <a:buChar char="•"/>
+            </a:pPr>
+            <a:r>
+              <a:rPr lang="en-US" sz="1400" dirty="0">
+                <a:solidFill>
+                  <a:schemeClr val="tx1"/>
+                </a:solidFill>
+              </a:rPr>
+              <a:t>SendGrid, Twilio, FCM y webhook</a:t>
+            </a:r>
+            <a:endParaRPr lang="en-US" sz="1400" dirty="0"/>
+          </a:p>
+          <a:p>
+            <a:pPr marL="177800" indent="-177800">
+              <a:spcAft>
+                <a:spcPts val="600"/>
+              </a:spcAft>
+              <a:buSzPct val="100000"/>
+              <a:buChar char="•"/>
+            </a:pPr>
+            <a:r>
+              <a:rPr lang="en-US" sz="1400" dirty="0">
+                <a:solidFill>
+                  <a:schemeClr val="tx1"/>
+                </a:solidFill>
+              </a:rPr>
+              <a:t>Su comportamiento sale de la salud del proveedor: operativo, degradado o caído</a:t>
+            </a:r>
+            <a:endParaRPr lang="en-US" sz="1400" dirty="0"/>
+          </a:p>
+          <a:p>
+            <a:pPr marL="177800" indent="-177800">
+              <a:spcAft>
+                <a:spcPts val="600"/>
+              </a:spcAft>
+              <a:buSzPct val="100000"/>
+              <a:buChar char="•"/>
+            </a:pPr>
+            <a:r>
+              <a:rPr lang="en-US" sz="1400" dirty="0">
+                <a:solidFill>
+                  <a:schemeClr val="tx1"/>
+                </a:solidFill>
+              </a:rPr>
+              <a:t>Sirve para demostrar el fallback sin credenciales</a:t>
+            </a:r>
+            <a:endParaRPr lang="en-US" sz="1400" dirty="0"/>
+          </a:p>
+        </p:txBody>
+      </p:sp>
+      <p:sp>
+        <p:nvSpPr>
+          <p:cNvPr id="11" name="Columna Pendiente"/>
+          <p:cNvSpPr/>
+          <p:nvPr/>
+        </p:nvSpPr>
+        <p:spPr>
+          <a:xfrm>
+            <a:off x="8046720" y="1508760"/>
+            <a:ext cx="3566160" cy="3246120"/>
+          </a:xfrm>
+          <a:prstGeom prst="roundRect">
+            <a:avLst>
+              <a:gd name="adj" fmla="val 3380"/>
+            </a:avLst>
+          </a:prstGeom>
+          <a:solidFill>
+            <a:schemeClr val="bg2"/>
+          </a:solidFill>
+          <a:ln w="6350">
+            <a:solidFill>
+              <a:schemeClr val="bg1"/>
+            </a:solidFill>
+            <a:prstDash val="solid"/>
+          </a:ln>
+          <a:effectLst>
+            <a:outerShdw sx="100000" sy="100000" kx="0" ky="0" algn="bl" rotWithShape="0" blurRad="76200" dist="25400" dir="5400000">
+              <a:srgbClr val="000000">
+                <a:alpha val="10000"/>
+              </a:srgbClr>
+            </a:outerShdw>
+          </a:effectLst>
+        </p:spPr>
+      </p:sp>
+      <p:sp>
+        <p:nvSpPr>
+          <p:cNvPr id="12" name="Marcador Pendiente"/>
+          <p:cNvSpPr/>
+          <p:nvPr/>
+        </p:nvSpPr>
+        <p:spPr>
+          <a:xfrm>
+            <a:off x="8321040" y="1737360"/>
+            <a:ext cx="502920" cy="109728"/>
+          </a:xfrm>
+          <a:prstGeom prst="roundRect">
+            <a:avLst>
+              <a:gd name="adj" fmla="val 50000"/>
+            </a:avLst>
+          </a:prstGeom>
+          <a:solidFill>
+            <a:schemeClr val="accent4"/>
+          </a:solidFill>
+          <a:ln w="12700">
+            <a:solidFill>
+              <a:schemeClr val="accent4"/>
+            </a:solidFill>
+            <a:prstDash val="solid"/>
+          </a:ln>
+        </p:spPr>
+      </p:sp>
+      <p:sp>
+        <p:nvSpPr>
+          <p:cNvPr id="13" name="Título Pendiente"/>
+          <p:cNvSpPr txBox="1"/>
+          <p:nvPr/>
+        </p:nvSpPr>
+        <p:spPr>
+          <a:xfrm>
+            <a:off x="8321040" y="1920240"/>
+            <a:ext cx="3017520" cy="411480"/>
+          </a:xfrm>
+          <a:prstGeom prst="rect">
+            <a:avLst/>
+          </a:prstGeom>
+          <a:noFill/>
+          <a:ln/>
+        </p:spPr>
+        <p:txBody>
+          <a:bodyPr wrap="square" lIns="0" tIns="0" rIns="0" bIns="0" rtlCol="0" anchor="t"/>
+          <a:lstStyle/>
+          <a:p>
+            <a:pPr indent="0" marL="0">
+              <a:buNone/>
+            </a:pPr>
+            <a:r>
+              <a:rPr lang="en-US" sz="2200" b="1" dirty="0">
+                <a:solidFill>
+                  <a:schemeClr val="tx1"/>
+                </a:solidFill>
+              </a:rPr>
+              <a:t>Pendiente</a:t>
+            </a:r>
+            <a:endParaRPr lang="en-US" sz="2200" dirty="0"/>
+          </a:p>
+        </p:txBody>
+      </p:sp>
+      <p:sp>
+        <p:nvSpPr>
+          <p:cNvPr id="14" name="Lista Pendiente"/>
+          <p:cNvSpPr txBox="1"/>
+          <p:nvPr/>
+        </p:nvSpPr>
+        <p:spPr>
+          <a:xfrm>
+            <a:off x="8321040" y="2468880"/>
+            <a:ext cx="3017520" cy="2194560"/>
+          </a:xfrm>
+          <a:prstGeom prst="rect">
+            <a:avLst/>
+          </a:prstGeom>
+          <a:noFill/>
+          <a:ln/>
+        </p:spPr>
+        <p:txBody>
+          <a:bodyPr wrap="square" lIns="0" tIns="0" rIns="0" bIns="0" rtlCol="0" anchor="t"/>
+          <a:lstStyle/>
+          <a:p>
+            <a:pPr marL="177800" indent="-177800">
+              <a:spcAft>
+                <a:spcPts val="600"/>
+              </a:spcAft>
+              <a:buSzPct val="100000"/>
+              <a:buChar char="•"/>
+            </a:pPr>
+            <a:r>
+              <a:rPr lang="en-US" sz="1400" dirty="0">
+                <a:solidFill>
+                  <a:schemeClr val="tx1"/>
+                </a:solidFill>
+              </a:rPr>
+              <a:t>Adaptadores reales de los proveedores</a:t>
+            </a:r>
+            <a:endParaRPr lang="en-US" sz="1400" dirty="0"/>
+          </a:p>
+          <a:p>
+            <a:pPr marL="177800" indent="-177800">
+              <a:spcAft>
+                <a:spcPts val="600"/>
+              </a:spcAft>
+              <a:buSzPct val="100000"/>
+              <a:buChar char="•"/>
+            </a:pPr>
+            <a:r>
+              <a:rPr lang="en-US" sz="1400" dirty="0">
+                <a:solidFill>
+                  <a:schemeClr val="tx1"/>
+                </a:solidFill>
+              </a:rPr>
+              <a:t>Outbox y suscripciones por webhook</a:t>
+            </a:r>
+            <a:endParaRPr lang="en-US" sz="1400" dirty="0"/>
+          </a:p>
+          <a:p>
+            <a:pPr marL="177800" indent="-177800">
+              <a:spcAft>
+                <a:spcPts val="600"/>
+              </a:spcAft>
+              <a:buSzPct val="100000"/>
+              <a:buChar char="•"/>
+            </a:pPr>
+            <a:r>
+              <a:rPr lang="en-US" sz="1400" dirty="0">
+                <a:solidFill>
+                  <a:schemeClr val="tx1"/>
+                </a:solidFill>
+              </a:rPr>
+              <a:t>Circuito de corte y revisión de salud activa</a:t>
+            </a:r>
+            <a:endParaRPr lang="en-US" sz="1400" dirty="0"/>
+          </a:p>
+        </p:txBody>
+      </p:sp>
+      <p:sp>
+        <p:nvSpPr>
+          <p:cNvPr id="15" name="Cifra 1"/>
+          <p:cNvSpPr txBox="1"/>
+          <p:nvPr/>
+        </p:nvSpPr>
+        <p:spPr>
+          <a:xfrm>
+            <a:off x="548640" y="5029200"/>
+            <a:ext cx="1097280" cy="731520"/>
+          </a:xfrm>
+          <a:prstGeom prst="rect">
+            <a:avLst/>
+          </a:prstGeom>
+          <a:noFill/>
+          <a:ln/>
+        </p:spPr>
+        <p:txBody>
+          <a:bodyPr wrap="square" lIns="0" tIns="0" rIns="0" bIns="0" rtlCol="0" anchor="t"/>
+          <a:lstStyle/>
+          <a:p>
+            <a:pPr indent="0" marL="0">
+              <a:buNone/>
+            </a:pPr>
+            <a:r>
+              <a:rPr lang="en-US" sz="4400" b="1" dirty="0">
+                <a:solidFill>
+                  <a:schemeClr val="tx1"/>
+                </a:solidFill>
+              </a:rPr>
+              <a:t>148</a:t>
+            </a:r>
+            <a:endParaRPr lang="en-US" sz="4400" dirty="0"/>
+          </a:p>
+        </p:txBody>
+      </p:sp>
+      <p:sp>
+        <p:nvSpPr>
+          <p:cNvPr id="16" name="Etiqueta 1"/>
+          <p:cNvSpPr txBox="1"/>
+          <p:nvPr/>
+        </p:nvSpPr>
+        <p:spPr>
+          <a:xfrm>
+            <a:off x="1737360" y="5257800"/>
+            <a:ext cx="2468880" cy="457200"/>
+          </a:xfrm>
+          <a:prstGeom prst="rect">
+            <a:avLst/>
+          </a:prstGeom>
+          <a:noFill/>
+          <a:ln/>
+        </p:spPr>
+        <p:txBody>
+          <a:bodyPr wrap="square" lIns="0" tIns="0" rIns="0" bIns="0" rtlCol="0" anchor="t"/>
+          <a:lstStyle/>
+          <a:p>
+            <a:pPr indent="0" marL="0">
+              <a:buNone/>
+            </a:pPr>
+            <a:r>
+              <a:rPr lang="en-US" sz="1600" dirty="0">
+                <a:solidFill>
+                  <a:schemeClr val="tx2"/>
+                </a:solidFill>
+              </a:rPr>
+              <a:t>pruebas automáticas</a:t>
+            </a:r>
+            <a:endParaRPr lang="en-US" sz="1600" dirty="0"/>
+          </a:p>
+        </p:txBody>
+      </p:sp>
+      <p:sp>
+        <p:nvSpPr>
+          <p:cNvPr id="17" name="Cifra 2"/>
+          <p:cNvSpPr txBox="1"/>
+          <p:nvPr/>
+        </p:nvSpPr>
+        <p:spPr>
+          <a:xfrm>
+            <a:off x="4297680" y="5029200"/>
+            <a:ext cx="1097280" cy="731520"/>
+          </a:xfrm>
+          <a:prstGeom prst="rect">
+            <a:avLst/>
+          </a:prstGeom>
+          <a:noFill/>
+          <a:ln/>
+        </p:spPr>
+        <p:txBody>
+          <a:bodyPr wrap="square" lIns="0" tIns="0" rIns="0" bIns="0" rtlCol="0" anchor="t"/>
+          <a:lstStyle/>
+          <a:p>
+            <a:pPr indent="0" marL="0">
+              <a:buNone/>
+            </a:pPr>
+            <a:r>
+              <a:rPr lang="en-US" sz="4400" b="1" dirty="0">
+                <a:solidFill>
+                  <a:schemeClr val="tx1"/>
+                </a:solidFill>
+              </a:rPr>
+              <a:t>8</a:t>
+            </a:r>
+            <a:endParaRPr lang="en-US" sz="4400" dirty="0"/>
+          </a:p>
+        </p:txBody>
+      </p:sp>
+      <p:sp>
+        <p:nvSpPr>
+          <p:cNvPr id="18" name="Etiqueta 2"/>
+          <p:cNvSpPr txBox="1"/>
+          <p:nvPr/>
+        </p:nvSpPr>
+        <p:spPr>
+          <a:xfrm>
+            <a:off x="5486400" y="5257800"/>
+            <a:ext cx="2468880" cy="457200"/>
+          </a:xfrm>
+          <a:prstGeom prst="rect">
+            <a:avLst/>
+          </a:prstGeom>
+          <a:noFill/>
+          <a:ln/>
+        </p:spPr>
+        <p:txBody>
+          <a:bodyPr wrap="square" lIns="0" tIns="0" rIns="0" bIns="0" rtlCol="0" anchor="t"/>
+          <a:lstStyle/>
+          <a:p>
+            <a:pPr indent="0" marL="0">
+              <a:buNone/>
+            </a:pPr>
+            <a:r>
+              <a:rPr lang="en-US" sz="1600" dirty="0">
+                <a:solidFill>
+                  <a:schemeClr val="tx2"/>
+                </a:solidFill>
+              </a:rPr>
+              <a:t>paquetes del monorepo</a:t>
+            </a:r>
+            <a:endParaRPr lang="en-US" sz="1600" dirty="0"/>
+          </a:p>
+        </p:txBody>
+      </p:sp>
+      <p:sp>
+        <p:nvSpPr>
+          <p:cNvPr id="19" name="Cifra 3"/>
+          <p:cNvSpPr txBox="1"/>
+          <p:nvPr/>
+        </p:nvSpPr>
+        <p:spPr>
+          <a:xfrm>
+            <a:off x="8046720" y="5029200"/>
+            <a:ext cx="1097280" cy="731520"/>
+          </a:xfrm>
+          <a:prstGeom prst="rect">
+            <a:avLst/>
+          </a:prstGeom>
+          <a:noFill/>
+          <a:ln/>
+        </p:spPr>
+        <p:txBody>
+          <a:bodyPr wrap="square" lIns="0" tIns="0" rIns="0" bIns="0" rtlCol="0" anchor="t"/>
+          <a:lstStyle/>
+          <a:p>
+            <a:pPr indent="0" marL="0">
+              <a:buNone/>
+            </a:pPr>
+            <a:r>
+              <a:rPr lang="en-US" sz="4400" b="1" dirty="0">
+                <a:solidFill>
+                  <a:schemeClr val="tx1"/>
+                </a:solidFill>
+              </a:rPr>
+              <a:t>0</a:t>
+            </a:r>
+            <a:endParaRPr lang="en-US" sz="4400" dirty="0"/>
+          </a:p>
+        </p:txBody>
+      </p:sp>
+      <p:sp>
+        <p:nvSpPr>
+          <p:cNvPr id="20" name="Etiqueta 3"/>
+          <p:cNvSpPr txBox="1"/>
+          <p:nvPr/>
+        </p:nvSpPr>
+        <p:spPr>
+          <a:xfrm>
+            <a:off x="9235440" y="5257800"/>
+            <a:ext cx="2468880" cy="457200"/>
+          </a:xfrm>
+          <a:prstGeom prst="rect">
+            <a:avLst/>
+          </a:prstGeom>
+          <a:noFill/>
+          <a:ln/>
+        </p:spPr>
+        <p:txBody>
+          <a:bodyPr wrap="square" lIns="0" tIns="0" rIns="0" bIns="0" rtlCol="0" anchor="t"/>
+          <a:lstStyle/>
+          <a:p>
+            <a:pPr indent="0" marL="0">
+              <a:buNone/>
+            </a:pPr>
+            <a:r>
+              <a:rPr lang="en-US" sz="1600" dirty="0">
+                <a:solidFill>
+                  <a:schemeClr val="tx2"/>
+                </a:solidFill>
+              </a:rPr>
+              <a:t>secretos expuestos</a:t>
+            </a:r>
+            <a:endParaRPr lang="en-US" sz="1600" dirty="0"/>
+          </a:p>
+        </p:txBody>
+      </p:sp>
+      <p:sp>
+        <p:nvSpPr>
+          <p:cNvPr id="25" name="Slide Number Placeholder 0"/>
+          <p:cNvSpPr>
+            <a:spLocks noGrp="1"/>
+          </p:cNvSpPr>
+          <p:nvPr>
+            <p:ph type="sldNum" sz="quarter" idx="4294967295"/>
+          </p:nvPr>
+        </p:nvSpPr>
+        <p:spPr>
+          <a:xfrm>
+            <a:off x="11064240" y="6419088"/>
+            <a:ext cx="594360" cy="274320"/>
+          </a:xfrm>
+          <a:prstGeom prst="rect">
+            <a:avLst/>
+          </a:prstGeom>
+          <a:extLst>
+            <a:ext uri="{C572A759-6A51-4108-AA02-DFA0A04FC94B}">
+              <ma14:wrappingTextBoxFlag xmlns:ma14="http://schemas.microsoft.com/office/mac/drawingml/2011/main" val="0"/>
+            </a:ext>
+          </a:extLst>
+        </p:spPr>
+        <p:txBody>
+          <a:bodyPr/>
+          <a:lstStyle>
+            <a:lvl1pPr>
+              <a:defRPr sz="1000">
+                <a:solidFill>
+                  <a:schemeClr val="tx2"/>
+                </a:solidFill>
+              </a:defRPr>
+            </a:lvl1pPr>
+          </a:lstStyle>
+          <a:p>
+            <a:pPr algn="r"/>
+            <a:fld id="{F7021451-1387-4CA6-816F-3879F97B5CBC}" type="slidenum">
+              <a:rPr b="0" lang="en-US"/>
+              <a:t>12</a:t>
+            </a:fld>
+            <a:endParaRPr lang="en-US"/>
+          </a:p>
+        </p:txBody>
+      </p:sp>
+    </p:spTree>
+  </p:cSld>
+  <p:clrMapOvr>
+    <a:masterClrMapping/>
+  </p:clrMapOvr>
+</p:sld>
+</file>
+
+<file path=ppt/slides/slide13.xml><?xml version="1.0" encoding="utf-8"?>
+<p:sld xmlns:a="http://schemas.openxmlformats.org/drawingml/2006/main" xmlns:r="http://schemas.openxmlformats.org/officeDocument/2006/relationships" xmlns:p="http://schemas.openxmlformats.org/presentationml/2006/main">
+  <p:cSld name="Slide 13">
+    <p:spTree>
+      <p:nvGrpSpPr>
+        <p:cNvPr id="1" name=""/>
+        <p:cNvGrpSpPr/>
+        <p:nvPr/>
+      </p:nvGrpSpPr>
+      <p:grpSpPr>
+        <a:xfrm>
+          <a:off x="0" y="0"/>
+          <a:ext cx="0" cy="0"/>
+          <a:chOff x="0" y="0"/>
+          <a:chExt cx="0" cy="0"/>
+        </a:xfrm>
+      </p:grpSpPr>
+      <p:sp>
+        <p:nvSpPr>
+          <p:cNvPr id="2" name="Text 1"/>
+          <p:cNvSpPr/>
+          <p:nvPr>
+            <p:ph idx="101" type="title" hasCustomPrompt="1"/>
+          </p:nvPr>
+        </p:nvSpPr>
+        <p:spPr>
+          <a:xfrm>
+            <a:off x="548640" y="365760"/>
+            <a:ext cx="11064240" cy="868680"/>
+          </a:xfrm>
+          <a:prstGeom prst="rect">
+            <a:avLst/>
+          </a:prstGeom>
+          <a:noFill/>
+          <a:ln/>
+        </p:spPr>
+        <p:txBody>
+          <a:bodyPr wrap="square" lIns="0" tIns="0" rIns="0" bIns="0" rtlCol="0" anchor="ctr"/>
+          <a:lstStyle/>
+          <a:p>
+            <a:pPr algn="l" indent="0" marL="0">
+              <a:buNone/>
+            </a:pPr>
+            <a:r>
+              <a:rPr lang="en-US" sz="3200" b="1" dirty="0">
+                <a:solidFill>
+                  <a:schemeClr val="tx1"/>
+                </a:solidFill>
+              </a:rPr>
+              <a:t>Lo que sigue hasta la entrega final</a:t>
+            </a:r>
+            <a:endParaRPr lang="en-US" sz="3200" dirty="0"/>
+          </a:p>
+        </p:txBody>
+      </p:sp>
+      <p:sp>
+        <p:nvSpPr>
+          <p:cNvPr id="3" name="Paso 1"/>
+          <p:cNvSpPr/>
+          <p:nvPr/>
+        </p:nvSpPr>
+        <p:spPr>
+          <a:xfrm>
+            <a:off x="548640" y="1554480"/>
+            <a:ext cx="11064240" cy="1005840"/>
+          </a:xfrm>
+          <a:prstGeom prst="roundRect">
+            <a:avLst>
+              <a:gd name="adj" fmla="val 10909"/>
+            </a:avLst>
+          </a:prstGeom>
+          <a:solidFill>
+            <a:schemeClr val="bg2"/>
+          </a:solidFill>
+          <a:ln w="6350">
+            <a:solidFill>
+              <a:schemeClr val="bg1"/>
+            </a:solidFill>
+            <a:prstDash val="solid"/>
+          </a:ln>
+          <a:effectLst>
+            <a:outerShdw sx="100000" sy="100000" kx="0" ky="0" algn="bl" rotWithShape="0" blurRad="76200" dist="25400" dir="5400000">
+              <a:srgbClr val="000000">
+                <a:alpha val="10000"/>
+              </a:srgbClr>
+            </a:outerShdw>
+          </a:effectLst>
+        </p:spPr>
+      </p:sp>
+      <p:sp>
+        <p:nvSpPr>
+          <p:cNvPr id="4" name="Estación 1"/>
+          <p:cNvSpPr/>
+          <p:nvPr/>
+        </p:nvSpPr>
+        <p:spPr>
+          <a:xfrm>
+            <a:off x="868680" y="1911096"/>
+            <a:ext cx="292608" cy="292608"/>
+          </a:xfrm>
+          <a:prstGeom prst="ellipse">
+            <a:avLst/>
+          </a:prstGeom>
+          <a:solidFill>
+            <a:schemeClr val="accent2"/>
+          </a:solidFill>
+          <a:ln w="38100">
+            <a:solidFill>
+              <a:schemeClr val="accent2"/>
+            </a:solidFill>
+            <a:prstDash val="solid"/>
+          </a:ln>
+        </p:spPr>
+      </p:sp>
+      <p:sp>
+        <p:nvSpPr>
+          <p:cNvPr id="5" name="Riel 1"/>
+          <p:cNvSpPr/>
+          <p:nvPr/>
+        </p:nvSpPr>
+        <p:spPr>
+          <a:xfrm>
+            <a:off x="978408" y="2468880"/>
+            <a:ext cx="73152" cy="347472"/>
+          </a:xfrm>
+          <a:prstGeom prst="roundRect">
+            <a:avLst>
+              <a:gd name="adj" fmla="val 50000"/>
+            </a:avLst>
+          </a:prstGeom>
+          <a:solidFill>
+            <a:schemeClr val="accent2"/>
+          </a:solidFill>
+          <a:ln w="12700">
+            <a:solidFill>
+              <a:schemeClr val="accent2"/>
+            </a:solidFill>
+            <a:prstDash val="solid"/>
+          </a:ln>
+        </p:spPr>
+      </p:sp>
+      <p:sp>
+        <p:nvSpPr>
+          <p:cNvPr id="6" name="Fecha 1"/>
+          <p:cNvSpPr txBox="1"/>
+          <p:nvPr/>
+        </p:nvSpPr>
+        <p:spPr>
+          <a:xfrm>
+            <a:off x="1554480" y="1719072"/>
+            <a:ext cx="3657600" cy="329184"/>
+          </a:xfrm>
+          <a:prstGeom prst="rect">
+            <a:avLst/>
+          </a:prstGeom>
+          <a:noFill/>
+          <a:ln/>
+        </p:spPr>
+        <p:txBody>
+          <a:bodyPr wrap="square" lIns="0" tIns="0" rIns="0" bIns="0" rtlCol="0" anchor="t"/>
+          <a:lstStyle/>
+          <a:p>
+            <a:pPr indent="0" marL="0">
+              <a:buNone/>
+            </a:pPr>
+            <a:r>
+              <a:rPr lang="en-US" sz="1800" b="1" dirty="0">
+                <a:solidFill>
+                  <a:schemeClr val="tx1"/>
+                </a:solidFill>
+              </a:rPr>
+              <a:t>Sprint 2 · 26 oct – 6 nov</a:t>
+            </a:r>
+            <a:endParaRPr lang="en-US" sz="1800" dirty="0"/>
+          </a:p>
+        </p:txBody>
+      </p:sp>
+      <p:sp>
+        <p:nvSpPr>
+          <p:cNvPr id="7" name="Meta 1"/>
+          <p:cNvSpPr txBox="1"/>
+          <p:nvPr/>
+        </p:nvSpPr>
+        <p:spPr>
+          <a:xfrm>
+            <a:off x="1554480" y="2084832"/>
+            <a:ext cx="9692640" cy="365760"/>
+          </a:xfrm>
+          <a:prstGeom prst="rect">
+            <a:avLst/>
+          </a:prstGeom>
+          <a:noFill/>
+          <a:ln/>
+        </p:spPr>
+        <p:txBody>
+          <a:bodyPr wrap="square" lIns="0" tIns="0" rIns="0" bIns="0" rtlCol="0" anchor="t"/>
+          <a:lstStyle/>
+          <a:p>
+            <a:pPr indent="0" marL="0">
+              <a:buNone/>
+            </a:pPr>
+            <a:r>
+              <a:rPr lang="en-US" sz="1600" dirty="0">
+                <a:solidFill>
+                  <a:schemeClr val="tx2"/>
+                </a:solidFill>
+              </a:rPr>
+              <a:t>Adaptadores reales de SendGrid, Twilio, FCM y webhook</a:t>
+            </a:r>
+            <a:endParaRPr lang="en-US" sz="1600" dirty="0"/>
+          </a:p>
+        </p:txBody>
+      </p:sp>
+      <p:sp>
+        <p:nvSpPr>
+          <p:cNvPr id="8" name="Paso 2"/>
+          <p:cNvSpPr/>
+          <p:nvPr/>
+        </p:nvSpPr>
+        <p:spPr>
+          <a:xfrm>
+            <a:off x="548640" y="2724912"/>
+            <a:ext cx="11064240" cy="1005840"/>
+          </a:xfrm>
+          <a:prstGeom prst="roundRect">
+            <a:avLst>
+              <a:gd name="adj" fmla="val 10909"/>
+            </a:avLst>
+          </a:prstGeom>
+          <a:solidFill>
+            <a:schemeClr val="bg2"/>
+          </a:solidFill>
+          <a:ln w="6350">
+            <a:solidFill>
+              <a:schemeClr val="bg1"/>
+            </a:solidFill>
+            <a:prstDash val="solid"/>
+          </a:ln>
+          <a:effectLst>
+            <a:outerShdw sx="100000" sy="100000" kx="0" ky="0" algn="bl" rotWithShape="0" blurRad="76200" dist="25400" dir="5400000">
+              <a:srgbClr val="000000">
+                <a:alpha val="10000"/>
+              </a:srgbClr>
+            </a:outerShdw>
+          </a:effectLst>
+        </p:spPr>
+      </p:sp>
+      <p:sp>
+        <p:nvSpPr>
+          <p:cNvPr id="9" name="Estación 2"/>
+          <p:cNvSpPr/>
+          <p:nvPr/>
+        </p:nvSpPr>
+        <p:spPr>
+          <a:xfrm>
+            <a:off x="868680" y="3081528"/>
+            <a:ext cx="292608" cy="292608"/>
+          </a:xfrm>
+          <a:prstGeom prst="ellipse">
+            <a:avLst/>
+          </a:prstGeom>
+          <a:solidFill>
+            <a:schemeClr val="accent3"/>
+          </a:solidFill>
+          <a:ln w="38100">
+            <a:solidFill>
+              <a:schemeClr val="accent3"/>
+            </a:solidFill>
+            <a:prstDash val="solid"/>
+          </a:ln>
+        </p:spPr>
+      </p:sp>
+      <p:sp>
+        <p:nvSpPr>
+          <p:cNvPr id="10" name="Riel 2"/>
+          <p:cNvSpPr/>
+          <p:nvPr/>
+        </p:nvSpPr>
+        <p:spPr>
+          <a:xfrm>
+            <a:off x="978408" y="3639312"/>
+            <a:ext cx="73152" cy="347472"/>
+          </a:xfrm>
+          <a:prstGeom prst="roundRect">
+            <a:avLst>
+              <a:gd name="adj" fmla="val 50000"/>
+            </a:avLst>
+          </a:prstGeom>
+          <a:solidFill>
+            <a:schemeClr val="accent3"/>
+          </a:solidFill>
+          <a:ln w="12700">
+            <a:solidFill>
+              <a:schemeClr val="accent3"/>
+            </a:solidFill>
+            <a:prstDash val="solid"/>
+          </a:ln>
+        </p:spPr>
+      </p:sp>
+      <p:sp>
+        <p:nvSpPr>
+          <p:cNvPr id="11" name="Fecha 2"/>
+          <p:cNvSpPr txBox="1"/>
+          <p:nvPr/>
+        </p:nvSpPr>
+        <p:spPr>
+          <a:xfrm>
+            <a:off x="1554480" y="2889504"/>
+            <a:ext cx="3657600" cy="329184"/>
+          </a:xfrm>
+          <a:prstGeom prst="rect">
+            <a:avLst/>
+          </a:prstGeom>
+          <a:noFill/>
+          <a:ln/>
+        </p:spPr>
+        <p:txBody>
+          <a:bodyPr wrap="square" lIns="0" tIns="0" rIns="0" bIns="0" rtlCol="0" anchor="t"/>
+          <a:lstStyle/>
+          <a:p>
+            <a:pPr indent="0" marL="0">
+              <a:buNone/>
+            </a:pPr>
+            <a:r>
+              <a:rPr lang="en-US" sz="1800" b="1" dirty="0">
+                <a:solidFill>
+                  <a:schemeClr val="tx1"/>
+                </a:solidFill>
+              </a:rPr>
+              <a:t>Sprint 3 · 9 – 20 nov</a:t>
+            </a:r>
+            <a:endParaRPr lang="en-US" sz="1800" dirty="0"/>
+          </a:p>
+        </p:txBody>
+      </p:sp>
+      <p:sp>
+        <p:nvSpPr>
+          <p:cNvPr id="12" name="Meta 2"/>
+          <p:cNvSpPr txBox="1"/>
+          <p:nvPr/>
+        </p:nvSpPr>
+        <p:spPr>
+          <a:xfrm>
+            <a:off x="1554480" y="3255264"/>
+            <a:ext cx="9692640" cy="365760"/>
+          </a:xfrm>
+          <a:prstGeom prst="rect">
+            <a:avLst/>
+          </a:prstGeom>
+          <a:noFill/>
+          <a:ln/>
+        </p:spPr>
+        <p:txBody>
+          <a:bodyPr wrap="square" lIns="0" tIns="0" rIns="0" bIns="0" rtlCol="0" anchor="t"/>
+          <a:lstStyle/>
+          <a:p>
+            <a:pPr indent="0" marL="0">
+              <a:buNone/>
+            </a:pPr>
+            <a:r>
+              <a:rPr lang="en-US" sz="1600" dirty="0">
+                <a:solidFill>
+                  <a:schemeClr val="tx2"/>
+                </a:solidFill>
+              </a:rPr>
+              <a:t>Circuito de corte por proveedor y revisión de salud activa</a:t>
+            </a:r>
+            <a:endParaRPr lang="en-US" sz="1600" dirty="0"/>
+          </a:p>
+        </p:txBody>
+      </p:sp>
+      <p:sp>
+        <p:nvSpPr>
+          <p:cNvPr id="13" name="Paso 3"/>
+          <p:cNvSpPr/>
+          <p:nvPr/>
+        </p:nvSpPr>
+        <p:spPr>
+          <a:xfrm>
+            <a:off x="548640" y="3895344"/>
+            <a:ext cx="11064240" cy="1005840"/>
+          </a:xfrm>
+          <a:prstGeom prst="roundRect">
+            <a:avLst>
+              <a:gd name="adj" fmla="val 10909"/>
+            </a:avLst>
+          </a:prstGeom>
+          <a:solidFill>
+            <a:schemeClr val="bg2"/>
+          </a:solidFill>
+          <a:ln w="6350">
+            <a:solidFill>
+              <a:schemeClr val="bg1"/>
+            </a:solidFill>
+            <a:prstDash val="solid"/>
+          </a:ln>
+          <a:effectLst>
+            <a:outerShdw sx="100000" sy="100000" kx="0" ky="0" algn="bl" rotWithShape="0" blurRad="76200" dist="25400" dir="5400000">
+              <a:srgbClr val="000000">
+                <a:alpha val="10000"/>
+              </a:srgbClr>
+            </a:outerShdw>
+          </a:effectLst>
+        </p:spPr>
+      </p:sp>
+      <p:sp>
+        <p:nvSpPr>
+          <p:cNvPr id="14" name="Estación 3"/>
+          <p:cNvSpPr/>
+          <p:nvPr/>
+        </p:nvSpPr>
+        <p:spPr>
+          <a:xfrm>
+            <a:off x="868680" y="4251960"/>
+            <a:ext cx="292608" cy="292608"/>
+          </a:xfrm>
+          <a:prstGeom prst="ellipse">
+            <a:avLst/>
+          </a:prstGeom>
+          <a:solidFill>
+            <a:schemeClr val="accent4"/>
+          </a:solidFill>
+          <a:ln w="38100">
+            <a:solidFill>
+              <a:schemeClr val="accent4"/>
+            </a:solidFill>
+            <a:prstDash val="solid"/>
+          </a:ln>
+        </p:spPr>
+      </p:sp>
+      <p:sp>
+        <p:nvSpPr>
+          <p:cNvPr id="15" name="Riel 3"/>
+          <p:cNvSpPr/>
+          <p:nvPr/>
+        </p:nvSpPr>
+        <p:spPr>
+          <a:xfrm>
+            <a:off x="978408" y="4809744"/>
+            <a:ext cx="73152" cy="347472"/>
+          </a:xfrm>
+          <a:prstGeom prst="roundRect">
+            <a:avLst>
+              <a:gd name="adj" fmla="val 50000"/>
+            </a:avLst>
+          </a:prstGeom>
+          <a:solidFill>
+            <a:schemeClr val="accent4"/>
+          </a:solidFill>
+          <a:ln w="12700">
+            <a:solidFill>
+              <a:schemeClr val="accent4"/>
+            </a:solidFill>
+            <a:prstDash val="solid"/>
+          </a:ln>
+        </p:spPr>
+      </p:sp>
+      <p:sp>
+        <p:nvSpPr>
+          <p:cNvPr id="16" name="Fecha 3"/>
+          <p:cNvSpPr txBox="1"/>
+          <p:nvPr/>
+        </p:nvSpPr>
+        <p:spPr>
+          <a:xfrm>
+            <a:off x="1554480" y="4059936"/>
+            <a:ext cx="3657600" cy="329184"/>
+          </a:xfrm>
+          <a:prstGeom prst="rect">
+            <a:avLst/>
+          </a:prstGeom>
+          <a:noFill/>
+          <a:ln/>
+        </p:spPr>
+        <p:txBody>
+          <a:bodyPr wrap="square" lIns="0" tIns="0" rIns="0" bIns="0" rtlCol="0" anchor="t"/>
+          <a:lstStyle/>
+          <a:p>
+            <a:pPr indent="0" marL="0">
+              <a:buNone/>
+            </a:pPr>
+            <a:r>
+              <a:rPr lang="en-US" sz="1800" b="1" dirty="0">
+                <a:solidFill>
+                  <a:schemeClr val="tx1"/>
+                </a:solidFill>
+              </a:rPr>
+              <a:t>Sprint 4 · 23 nov – 4 dic</a:t>
+            </a:r>
+            <a:endParaRPr lang="en-US" sz="1800" dirty="0"/>
+          </a:p>
+        </p:txBody>
+      </p:sp>
+      <p:sp>
+        <p:nvSpPr>
+          <p:cNvPr id="17" name="Meta 3"/>
+          <p:cNvSpPr txBox="1"/>
+          <p:nvPr/>
+        </p:nvSpPr>
+        <p:spPr>
+          <a:xfrm>
+            <a:off x="1554480" y="4425696"/>
+            <a:ext cx="9692640" cy="365760"/>
+          </a:xfrm>
+          <a:prstGeom prst="rect">
+            <a:avLst/>
+          </a:prstGeom>
+          <a:noFill/>
+          <a:ln/>
+        </p:spPr>
+        <p:txBody>
+          <a:bodyPr wrap="square" lIns="0" tIns="0" rIns="0" bIns="0" rtlCol="0" anchor="t"/>
+          <a:lstStyle/>
+          <a:p>
+            <a:pPr indent="0" marL="0">
+              <a:buNone/>
+            </a:pPr>
+            <a:r>
+              <a:rPr lang="en-US" sz="1600" dirty="0">
+                <a:solidFill>
+                  <a:schemeClr val="tx2"/>
+                </a:solidFill>
+              </a:rPr>
+              <a:t>Outbox, suscripciones por webhook, carga y entrega final</a:t>
+            </a:r>
+            <a:endParaRPr lang="en-US" sz="1600" dirty="0"/>
+          </a:p>
+        </p:txBody>
+      </p:sp>
+      <p:sp>
+        <p:nvSpPr>
+          <p:cNvPr id="18" name="Paso 4"/>
+          <p:cNvSpPr/>
+          <p:nvPr/>
+        </p:nvSpPr>
+        <p:spPr>
+          <a:xfrm>
+            <a:off x="548640" y="5065776"/>
+            <a:ext cx="11064240" cy="1005840"/>
+          </a:xfrm>
+          <a:prstGeom prst="roundRect">
+            <a:avLst>
+              <a:gd name="adj" fmla="val 10909"/>
+            </a:avLst>
+          </a:prstGeom>
+          <a:solidFill>
+            <a:schemeClr val="bg2"/>
+          </a:solidFill>
+          <a:ln w="6350">
+            <a:solidFill>
+              <a:schemeClr val="bg1"/>
+            </a:solidFill>
+            <a:prstDash val="solid"/>
+          </a:ln>
+          <a:effectLst>
+            <a:outerShdw sx="100000" sy="100000" kx="0" ky="0" algn="bl" rotWithShape="0" blurRad="76200" dist="25400" dir="5400000">
+              <a:srgbClr val="000000">
+                <a:alpha val="10000"/>
+              </a:srgbClr>
+            </a:outerShdw>
+          </a:effectLst>
+        </p:spPr>
+      </p:sp>
+      <p:sp>
+        <p:nvSpPr>
+          <p:cNvPr id="19" name="Estación 4"/>
+          <p:cNvSpPr/>
+          <p:nvPr/>
+        </p:nvSpPr>
+        <p:spPr>
+          <a:xfrm>
+            <a:off x="868680" y="5422392"/>
+            <a:ext cx="292608" cy="292608"/>
+          </a:xfrm>
+          <a:prstGeom prst="ellipse">
+            <a:avLst/>
+          </a:prstGeom>
+          <a:solidFill>
+            <a:schemeClr val="accent1"/>
+          </a:solidFill>
+          <a:ln w="38100">
+            <a:solidFill>
+              <a:schemeClr val="accent1"/>
+            </a:solidFill>
+            <a:prstDash val="solid"/>
+          </a:ln>
+        </p:spPr>
+      </p:sp>
+      <p:sp>
+        <p:nvSpPr>
+          <p:cNvPr id="20" name="Fecha 4"/>
+          <p:cNvSpPr txBox="1"/>
+          <p:nvPr/>
+        </p:nvSpPr>
+        <p:spPr>
+          <a:xfrm>
+            <a:off x="1554480" y="5230368"/>
+            <a:ext cx="3657600" cy="329184"/>
+          </a:xfrm>
+          <a:prstGeom prst="rect">
+            <a:avLst/>
+          </a:prstGeom>
+          <a:noFill/>
+          <a:ln/>
+        </p:spPr>
+        <p:txBody>
+          <a:bodyPr wrap="square" lIns="0" tIns="0" rIns="0" bIns="0" rtlCol="0" anchor="t"/>
+          <a:lstStyle/>
+          <a:p>
+            <a:pPr indent="0" marL="0">
+              <a:buNone/>
+            </a:pPr>
+            <a:r>
+              <a:rPr lang="en-US" sz="1800" b="1" dirty="0">
+                <a:solidFill>
+                  <a:schemeClr val="tx1"/>
+                </a:solidFill>
+              </a:rPr>
+              <a:t>Open source</a:t>
+            </a:r>
+            <a:endParaRPr lang="en-US" sz="1800" dirty="0"/>
+          </a:p>
+        </p:txBody>
+      </p:sp>
+      <p:sp>
+        <p:nvSpPr>
+          <p:cNvPr id="21" name="Meta 4"/>
+          <p:cNvSpPr txBox="1"/>
+          <p:nvPr/>
+        </p:nvSpPr>
+        <p:spPr>
+          <a:xfrm>
+            <a:off x="1554480" y="5596128"/>
+            <a:ext cx="9692640" cy="365760"/>
+          </a:xfrm>
+          <a:prstGeom prst="rect">
+            <a:avLst/>
+          </a:prstGeom>
+          <a:noFill/>
+          <a:ln/>
+        </p:spPr>
+        <p:txBody>
+          <a:bodyPr wrap="square" lIns="0" tIns="0" rIns="0" bIns="0" rtlCol="0" anchor="t"/>
+          <a:lstStyle/>
+          <a:p>
+            <a:pPr indent="0" marL="0">
+              <a:buNone/>
+            </a:pPr>
+            <a:r>
+              <a:rPr lang="en-US" sz="1600" dirty="0">
+                <a:solidFill>
+                  <a:schemeClr val="tx2"/>
+                </a:solidFill>
+              </a:rPr>
+              <a:t>Hacer público el repositorio y publicar los paquetes en npm</a:t>
+            </a:r>
+            <a:endParaRPr lang="en-US" sz="1600" dirty="0"/>
+          </a:p>
+        </p:txBody>
+      </p:sp>
+      <p:sp>
+        <p:nvSpPr>
+          <p:cNvPr id="25" name="Slide Number Placeholder 0"/>
+          <p:cNvSpPr>
+            <a:spLocks noGrp="1"/>
+          </p:cNvSpPr>
+          <p:nvPr>
+            <p:ph type="sldNum" sz="quarter" idx="4294967295"/>
+          </p:nvPr>
+        </p:nvSpPr>
+        <p:spPr>
+          <a:xfrm>
+            <a:off x="11064240" y="6419088"/>
+            <a:ext cx="594360" cy="274320"/>
+          </a:xfrm>
+          <a:prstGeom prst="rect">
+            <a:avLst/>
+          </a:prstGeom>
+          <a:extLst>
+            <a:ext uri="{C572A759-6A51-4108-AA02-DFA0A04FC94B}">
+              <ma14:wrappingTextBoxFlag xmlns:ma14="http://schemas.microsoft.com/office/mac/drawingml/2011/main" val="0"/>
+            </a:ext>
+          </a:extLst>
+        </p:spPr>
+        <p:txBody>
+          <a:bodyPr/>
+          <a:lstStyle>
+            <a:lvl1pPr>
+              <a:defRPr sz="1000">
+                <a:solidFill>
+                  <a:schemeClr val="tx2"/>
+                </a:solidFill>
+              </a:defRPr>
+            </a:lvl1pPr>
+          </a:lstStyle>
+          <a:p>
+            <a:pPr algn="r"/>
+            <a:fld id="{F7021451-1387-4CA6-816F-3879F97B5CBC}" type="slidenum">
+              <a:rPr b="0" lang="en-US"/>
+              <a:t>13</a:t>
+            </a:fld>
+            <a:endParaRPr lang="en-US"/>
+          </a:p>
+        </p:txBody>
+      </p:sp>
+    </p:spTree>
+  </p:cSld>
+  <p:clrMapOvr>
+    <a:masterClrMapping/>
+  </p:clrMapOvr>
+</p:sld>
+</file>
+
+<file path=ppt/slides/slide14.xml><?xml version="1.0" encoding="utf-8"?>
+<p:sld xmlns:a="http://schemas.openxmlformats.org/drawingml/2006/main" xmlns:r="http://schemas.openxmlformats.org/officeDocument/2006/relationships" xmlns:p="http://schemas.openxmlformats.org/presentationml/2006/main">
+  <p:cSld name="Slide 14">
+    <p:spTree>
+      <p:nvGrpSpPr>
+        <p:cNvPr id="1" name=""/>
+        <p:cNvGrpSpPr/>
+        <p:nvPr/>
+      </p:nvGrpSpPr>
+      <p:grpSpPr>
+        <a:xfrm>
+          <a:off x="0" y="0"/>
+          <a:ext cx="0" cy="0"/>
+          <a:chOff x="0" y="0"/>
+          <a:chExt cx="0" cy="0"/>
+        </a:xfrm>
+      </p:grpSpPr>
       <p:pic>
         <p:nvPicPr>
           <p:cNvPr id="2" name="Image 0" descr="Logo de NotifyHub">    </p:cNvPr>
@@ -10161,7 +13174,7 @@
                   <a:schemeClr val="tx1"/>
                 </a:solidFill>
               </a:rPr>
-              <a:t>Además es una librería: SDK y componentes</a:t>
+              <a:t>Construido por capas</a:t>
             </a:r>
             <a:endParaRPr lang="en-US" sz="3200" dirty="0"/>
           </a:p>
@@ -10169,439 +13182,40 @@
       </p:sp>
       <p:sp>
         <p:nvSpPr>
-          <p:cNvPr id="3" name="SDK título"/>
-          <p:cNvSpPr txBox="1"/>
-          <p:nvPr/>
-        </p:nvSpPr>
-        <p:spPr>
-          <a:xfrm>
-            <a:off x="548640" y="1463040"/>
-            <a:ext cx="5394960" cy="365760"/>
-          </a:xfrm>
-          <a:prstGeom prst="rect">
-            <a:avLst/>
-          </a:prstGeom>
-          <a:noFill/>
-          <a:ln/>
-        </p:spPr>
-        <p:txBody>
-          <a:bodyPr wrap="square" lIns="0" tIns="0" rIns="0" bIns="0" rtlCol="0" anchor="t"/>
-          <a:lstStyle/>
-          <a:p>
-            <a:pPr indent="0" marL="0">
-              <a:buNone/>
-            </a:pPr>
-            <a:r>
-              <a:rPr lang="en-US" sz="2000" b="1" dirty="0">
-                <a:solidFill>
-                  <a:schemeClr val="tx1"/>
-                </a:solidFill>
-              </a:rPr>
-              <a:t>@notifyhub/client</a:t>
-            </a:r>
-            <a:endParaRPr lang="en-US" sz="2000" dirty="0"/>
-          </a:p>
-        </p:txBody>
-      </p:sp>
-      <p:sp>
-        <p:nvSpPr>
-          <p:cNvPr id="4" name="SDK fondo"/>
-          <p:cNvSpPr/>
-          <p:nvPr/>
-        </p:nvSpPr>
-        <p:spPr>
-          <a:xfrm>
-            <a:off x="548640" y="1920240"/>
-            <a:ext cx="5394960" cy="3063240"/>
+          <p:cNvPr id="3" name="Capa Apps"/>
+          <p:cNvSpPr/>
+          <p:nvPr/>
+        </p:nvSpPr>
+        <p:spPr>
+          <a:xfrm>
+            <a:off x="548640" y="1554480"/>
+            <a:ext cx="8595360" cy="914400"/>
           </a:xfrm>
           <a:prstGeom prst="roundRect">
             <a:avLst>
-              <a:gd name="adj" fmla="val 2985"/>
+              <a:gd name="adj" fmla="val 10000"/>
             </a:avLst>
           </a:prstGeom>
           <a:solidFill>
-            <a:schemeClr val="tx1"/>
-          </a:solidFill>
-          <a:ln w="12700">
-            <a:solidFill>
-              <a:schemeClr val="tx1"/>
-            </a:solidFill>
-            <a:prstDash val="solid"/>
-          </a:ln>
-        </p:spPr>
-      </p:sp>
-      <p:sp>
-        <p:nvSpPr>
-          <p:cNvPr id="5" name="SDK código"/>
-          <p:cNvSpPr txBox="1"/>
-          <p:nvPr/>
-        </p:nvSpPr>
-        <p:spPr>
-          <a:xfrm>
-            <a:off x="822960" y="2148840"/>
-            <a:ext cx="4846320" cy="2651760"/>
-          </a:xfrm>
-          <a:prstGeom prst="rect">
-            <a:avLst/>
-          </a:prstGeom>
-          <a:noFill/>
-          <a:ln/>
-        </p:spPr>
-        <p:txBody>
-          <a:bodyPr wrap="square" lIns="0" tIns="0" rIns="0" bIns="0" rtlCol="0" anchor="t"/>
-          <a:lstStyle/>
-          <a:p>
-            <a:pPr indent="0" marL="0">
-              <a:buNone/>
-            </a:pPr>
-            <a:r>
-              <a:rPr lang="en-US" sz="1400" dirty="0">
-                <a:solidFill>
-                  <a:schemeClr val="bg1"/>
-                </a:solidFill>
-                <a:latin typeface="Courier New" pitchFamily="34" charset="0"/>
-                <a:ea typeface="Courier New" pitchFamily="34" charset="-122"/>
-                <a:cs typeface="Courier New" pitchFamily="34" charset="-120"/>
-              </a:rPr>
-              <a:t>const nh = createNotifyHubClient({</a:t>
-            </a:r>
-            <a:endParaRPr lang="en-US" sz="1400" dirty="0"/>
-          </a:p>
-          <a:p>
-            <a:pPr indent="0" marL="0">
-              <a:buNone/>
-            </a:pPr>
-            <a:r>
-              <a:rPr lang="en-US" sz="1400" dirty="0">
-                <a:solidFill>
-                  <a:schemeClr val="bg1"/>
-                </a:solidFill>
-                <a:latin typeface="Courier New" pitchFamily="34" charset="0"/>
-                <a:ea typeface="Courier New" pitchFamily="34" charset="-122"/>
-                <a:cs typeface="Courier New" pitchFamily="34" charset="-120"/>
-              </a:rPr>
-              <a:t>  baseUrl, apiKey,</a:t>
-            </a:r>
-            <a:endParaRPr lang="en-US" sz="1400" dirty="0"/>
-          </a:p>
-          <a:p>
-            <a:pPr indent="0" marL="0">
-              <a:buNone/>
-            </a:pPr>
-            <a:r>
-              <a:rPr lang="en-US" sz="1400" dirty="0">
-                <a:solidFill>
-                  <a:schemeClr val="bg1"/>
-                </a:solidFill>
-                <a:latin typeface="Courier New" pitchFamily="34" charset="0"/>
-                <a:ea typeface="Courier New" pitchFamily="34" charset="-122"/>
-                <a:cs typeface="Courier New" pitchFamily="34" charset="-120"/>
-              </a:rPr>
-              <a:t>});</a:t>
-            </a:r>
-            <a:endParaRPr lang="en-US" sz="1400" dirty="0"/>
-          </a:p>
-          <a:p>
-            <a:pPr indent="0" marL="0">
-              <a:buNone/>
-            </a:pPr>
-            <a:endParaRPr lang="en-US" sz="1400" dirty="0"/>
-          </a:p>
-          <a:p>
-            <a:pPr indent="0" marL="0">
-              <a:buNone/>
-            </a:pPr>
-            <a:r>
-              <a:rPr lang="en-US" sz="1400" dirty="0">
-                <a:solidFill>
-                  <a:schemeClr val="bg1"/>
-                </a:solidFill>
-                <a:latin typeface="Courier New" pitchFamily="34" charset="0"/>
-                <a:ea typeface="Courier New" pitchFamily="34" charset="-122"/>
-                <a:cs typeface="Courier New" pitchFamily="34" charset="-120"/>
-              </a:rPr>
-              <a:t>const { id } = await nh</a:t>
-            </a:r>
-            <a:endParaRPr lang="en-US" sz="1400" dirty="0"/>
-          </a:p>
-          <a:p>
-            <a:pPr indent="0" marL="0">
-              <a:buNone/>
-            </a:pPr>
-            <a:r>
-              <a:rPr lang="en-US" sz="1400" dirty="0">
-                <a:solidFill>
-                  <a:schemeClr val="bg1"/>
-                </a:solidFill>
-                <a:latin typeface="Courier New" pitchFamily="34" charset="0"/>
-                <a:ea typeface="Courier New" pitchFamily="34" charset="-122"/>
-                <a:cs typeface="Courier New" pitchFamily="34" charset="-120"/>
-              </a:rPr>
-              <a:t>  .notifications.create(payload);</a:t>
-            </a:r>
-            <a:endParaRPr lang="en-US" sz="1400" dirty="0"/>
-          </a:p>
-          <a:p>
-            <a:pPr indent="0" marL="0">
-              <a:buNone/>
-            </a:pPr>
-            <a:endParaRPr lang="en-US" sz="1400" dirty="0"/>
-          </a:p>
-          <a:p>
-            <a:pPr indent="0" marL="0">
-              <a:buNone/>
-            </a:pPr>
-            <a:r>
-              <a:rPr lang="en-US" sz="1400" dirty="0">
-                <a:solidFill>
-                  <a:schemeClr val="bg1"/>
-                </a:solidFill>
-                <a:latin typeface="Courier New" pitchFamily="34" charset="0"/>
-                <a:ea typeface="Courier New" pitchFamily="34" charset="-122"/>
-                <a:cs typeface="Courier New" pitchFamily="34" charset="-120"/>
-              </a:rPr>
-              <a:t>const { attempts } = await nh</a:t>
-            </a:r>
-            <a:endParaRPr lang="en-US" sz="1400" dirty="0"/>
-          </a:p>
-          <a:p>
-            <a:pPr indent="0" marL="0">
-              <a:buNone/>
-            </a:pPr>
-            <a:r>
-              <a:rPr lang="en-US" sz="1400" dirty="0">
-                <a:solidFill>
-                  <a:schemeClr val="bg1"/>
-                </a:solidFill>
-                <a:latin typeface="Courier New" pitchFamily="34" charset="0"/>
-                <a:ea typeface="Courier New" pitchFamily="34" charset="-122"/>
-                <a:cs typeface="Courier New" pitchFamily="34" charset="-120"/>
-              </a:rPr>
-              <a:t>  .notifications.get(id);</a:t>
-            </a:r>
-            <a:endParaRPr lang="en-US" sz="1400" dirty="0"/>
-          </a:p>
-        </p:txBody>
-      </p:sp>
-      <p:sp>
-        <p:nvSpPr>
-          <p:cNvPr id="6" name="UI título"/>
-          <p:cNvSpPr txBox="1"/>
-          <p:nvPr/>
-        </p:nvSpPr>
-        <p:spPr>
-          <a:xfrm>
-            <a:off x="6263640" y="1463040"/>
-            <a:ext cx="5394960" cy="365760"/>
-          </a:xfrm>
-          <a:prstGeom prst="rect">
-            <a:avLst/>
-          </a:prstGeom>
-          <a:noFill/>
-          <a:ln/>
-        </p:spPr>
-        <p:txBody>
-          <a:bodyPr wrap="square" lIns="0" tIns="0" rIns="0" bIns="0" rtlCol="0" anchor="t"/>
-          <a:lstStyle/>
-          <a:p>
-            <a:pPr indent="0" marL="0">
-              <a:buNone/>
-            </a:pPr>
-            <a:r>
-              <a:rPr lang="en-US" sz="2000" b="1" dirty="0">
-                <a:solidFill>
-                  <a:schemeClr val="tx1"/>
-                </a:solidFill>
-              </a:rPr>
-              <a:t>@notifyhub/ui</a:t>
-            </a:r>
-            <a:endParaRPr lang="en-US" sz="2000" dirty="0"/>
-          </a:p>
-        </p:txBody>
-      </p:sp>
-      <p:sp>
-        <p:nvSpPr>
-          <p:cNvPr id="7" name="UI fondo"/>
-          <p:cNvSpPr/>
-          <p:nvPr/>
-        </p:nvSpPr>
-        <p:spPr>
-          <a:xfrm>
-            <a:off x="6263640" y="1920240"/>
-            <a:ext cx="5394960" cy="3063240"/>
-          </a:xfrm>
-          <a:prstGeom prst="roundRect">
-            <a:avLst>
-              <a:gd name="adj" fmla="val 2985"/>
-            </a:avLst>
-          </a:prstGeom>
-          <a:solidFill>
-            <a:schemeClr val="tx1"/>
-          </a:solidFill>
-          <a:ln w="12700">
-            <a:solidFill>
-              <a:schemeClr val="tx1"/>
-            </a:solidFill>
-            <a:prstDash val="solid"/>
-          </a:ln>
-        </p:spPr>
-      </p:sp>
-      <p:sp>
-        <p:nvSpPr>
-          <p:cNvPr id="8" name="UI código"/>
-          <p:cNvSpPr txBox="1"/>
-          <p:nvPr/>
-        </p:nvSpPr>
-        <p:spPr>
-          <a:xfrm>
-            <a:off x="6537960" y="2148840"/>
-            <a:ext cx="4846320" cy="2651760"/>
-          </a:xfrm>
-          <a:prstGeom prst="rect">
-            <a:avLst/>
-          </a:prstGeom>
-          <a:noFill/>
-          <a:ln/>
-        </p:spPr>
-        <p:txBody>
-          <a:bodyPr wrap="square" lIns="0" tIns="0" rIns="0" bIns="0" rtlCol="0" anchor="t"/>
-          <a:lstStyle/>
-          <a:p>
-            <a:pPr indent="0" marL="0">
-              <a:buNone/>
-            </a:pPr>
-            <a:r>
-              <a:rPr lang="en-US" sz="1400" dirty="0">
-                <a:solidFill>
-                  <a:schemeClr val="bg1"/>
-                </a:solidFill>
-                <a:latin typeface="Courier New" pitchFamily="34" charset="0"/>
-                <a:ea typeface="Courier New" pitchFamily="34" charset="-122"/>
-                <a:cs typeface="Courier New" pitchFamily="34" charset="-120"/>
-              </a:rPr>
-              <a:t>&lt;NotifyHubProvider client={nh}&gt;</a:t>
-            </a:r>
-            <a:endParaRPr lang="en-US" sz="1400" dirty="0"/>
-          </a:p>
-          <a:p>
-            <a:pPr indent="0" marL="0">
-              <a:buNone/>
-            </a:pPr>
-            <a:r>
-              <a:rPr lang="en-US" sz="1400" dirty="0">
-                <a:solidFill>
-                  <a:schemeClr val="bg1"/>
-                </a:solidFill>
-                <a:latin typeface="Courier New" pitchFamily="34" charset="0"/>
-                <a:ea typeface="Courier New" pitchFamily="34" charset="-122"/>
-                <a:cs typeface="Courier New" pitchFamily="34" charset="-120"/>
-              </a:rPr>
-              <a:t>  &lt;NotificationDetail</a:t>
-            </a:r>
-            <a:endParaRPr lang="en-US" sz="1400" dirty="0"/>
-          </a:p>
-          <a:p>
-            <a:pPr indent="0" marL="0">
-              <a:buNone/>
-            </a:pPr>
-            <a:r>
-              <a:rPr lang="en-US" sz="1400" dirty="0">
-                <a:solidFill>
-                  <a:schemeClr val="bg1"/>
-                </a:solidFill>
-                <a:latin typeface="Courier New" pitchFamily="34" charset="0"/>
-                <a:ea typeface="Courier New" pitchFamily="34" charset="-122"/>
-                <a:cs typeface="Courier New" pitchFamily="34" charset="-120"/>
-              </a:rPr>
-              <a:t>    item={item}</a:t>
-            </a:r>
-            <a:endParaRPr lang="en-US" sz="1400" dirty="0"/>
-          </a:p>
-          <a:p>
-            <a:pPr indent="0" marL="0">
-              <a:buNone/>
-            </a:pPr>
-            <a:r>
-              <a:rPr lang="en-US" sz="1400" dirty="0">
-                <a:solidFill>
-                  <a:schemeClr val="bg1"/>
-                </a:solidFill>
-                <a:latin typeface="Courier New" pitchFamily="34" charset="0"/>
-                <a:ea typeface="Courier New" pitchFamily="34" charset="-122"/>
-                <a:cs typeface="Courier New" pitchFamily="34" charset="-120"/>
-              </a:rPr>
-              <a:t>    detail={detail}</a:t>
-            </a:r>
-            <a:endParaRPr lang="en-US" sz="1400" dirty="0"/>
-          </a:p>
-          <a:p>
-            <a:pPr indent="0" marL="0">
-              <a:buNone/>
-            </a:pPr>
-            <a:r>
-              <a:rPr lang="en-US" sz="1400" dirty="0">
-                <a:solidFill>
-                  <a:schemeClr val="bg1"/>
-                </a:solidFill>
-                <a:latin typeface="Courier New" pitchFamily="34" charset="0"/>
-                <a:ea typeface="Courier New" pitchFamily="34" charset="-122"/>
-                <a:cs typeface="Courier New" pitchFamily="34" charset="-120"/>
-              </a:rPr>
-              <a:t>  /&gt;</a:t>
-            </a:r>
-            <a:endParaRPr lang="en-US" sz="1400" dirty="0"/>
-          </a:p>
-          <a:p>
-            <a:pPr indent="0" marL="0">
-              <a:buNone/>
-            </a:pPr>
-            <a:r>
-              <a:rPr lang="en-US" sz="1400" dirty="0">
-                <a:solidFill>
-                  <a:schemeClr val="bg1"/>
-                </a:solidFill>
-                <a:latin typeface="Courier New" pitchFamily="34" charset="0"/>
-                <a:ea typeface="Courier New" pitchFamily="34" charset="-122"/>
-                <a:cs typeface="Courier New" pitchFamily="34" charset="-120"/>
-              </a:rPr>
-              <a:t>&lt;/NotifyHubProvider&gt;</a:t>
-            </a:r>
-            <a:endParaRPr lang="en-US" sz="1400" dirty="0"/>
-          </a:p>
-          <a:p>
-            <a:pPr indent="0" marL="0">
-              <a:buNone/>
-            </a:pPr>
-            <a:endParaRPr lang="en-US" sz="1400" dirty="0"/>
-          </a:p>
-          <a:p>
-            <a:pPr indent="0" marL="0">
-              <a:buNone/>
-            </a:pPr>
-            <a:r>
-              <a:rPr lang="en-US" sz="1400" dirty="0">
-                <a:solidFill>
-                  <a:schemeClr val="bg1"/>
-                </a:solidFill>
-                <a:latin typeface="Courier New" pitchFamily="34" charset="0"/>
-                <a:ea typeface="Courier New" pitchFamily="34" charset="-122"/>
-                <a:cs typeface="Courier New" pitchFamily="34" charset="-120"/>
-              </a:rPr>
-              <a:t>// la ruta del mensaje, lista</a:t>
-            </a:r>
-            <a:endParaRPr lang="en-US" sz="1400" dirty="0"/>
-          </a:p>
-        </p:txBody>
-      </p:sp>
-      <p:sp>
-        <p:nvSpPr>
-          <p:cNvPr id="9" name="Marcador 1"/>
-          <p:cNvSpPr/>
-          <p:nvPr/>
-        </p:nvSpPr>
-        <p:spPr>
-          <a:xfrm>
-            <a:off x="548640" y="5349240"/>
+            <a:schemeClr val="bg2"/>
+          </a:solidFill>
+          <a:ln w="31750">
+            <a:solidFill>
+              <a:schemeClr val="accent5"/>
+            </a:solidFill>
+            <a:prstDash val="solid"/>
+          </a:ln>
+        </p:spPr>
+      </p:sp>
+      <p:sp>
+        <p:nvSpPr>
+          <p:cNvPr id="4" name="Marcador Apps"/>
+          <p:cNvSpPr/>
+          <p:nvPr/>
+        </p:nvSpPr>
+        <p:spPr>
+          <a:xfrm>
+            <a:off x="822960" y="1956816"/>
             <a:ext cx="457200" cy="109728"/>
           </a:xfrm>
           <a:prstGeom prst="roundRect">
@@ -10610,26 +13224,26 @@
             </a:avLst>
           </a:prstGeom>
           <a:solidFill>
-            <a:schemeClr val="accent1"/>
+            <a:schemeClr val="accent5"/>
           </a:solidFill>
           <a:ln w="12700">
             <a:solidFill>
-              <a:schemeClr val="accent1"/>
-            </a:solidFill>
-            <a:prstDash val="solid"/>
-          </a:ln>
-        </p:spPr>
-      </p:sp>
-      <p:sp>
-        <p:nvSpPr>
-          <p:cNvPr id="10" name="Etiqueta 1"/>
-          <p:cNvSpPr txBox="1"/>
-          <p:nvPr/>
-        </p:nvSpPr>
-        <p:spPr>
-          <a:xfrm>
-            <a:off x="548640" y="5532120"/>
-            <a:ext cx="2560320" cy="365760"/>
+              <a:schemeClr val="accent5"/>
+            </a:solidFill>
+            <a:prstDash val="solid"/>
+          </a:ln>
+        </p:spPr>
+      </p:sp>
+      <p:sp>
+        <p:nvSpPr>
+          <p:cNvPr id="5" name="Capa Apps nombre"/>
+          <p:cNvSpPr txBox="1"/>
+          <p:nvPr/>
+        </p:nvSpPr>
+        <p:spPr>
+          <a:xfrm>
+            <a:off x="1463040" y="1828800"/>
+            <a:ext cx="2743200" cy="384048"/>
           </a:xfrm>
           <a:prstGeom prst="rect">
             <a:avLst/>
@@ -10645,26 +13259,92 @@
               <a:buNone/>
             </a:pPr>
             <a:r>
-              <a:rPr lang="en-US" sz="1800" b="1" dirty="0">
+              <a:rPr lang="en-US" sz="2200" b="1" dirty="0">
                 <a:solidFill>
                   <a:schemeClr val="tx1"/>
                 </a:solidFill>
               </a:rPr>
-              <a:t>Licencia MIT</a:t>
-            </a:r>
-            <a:endParaRPr lang="en-US" sz="1800" dirty="0"/>
-          </a:p>
-        </p:txBody>
-      </p:sp>
-      <p:sp>
-        <p:nvSpPr>
-          <p:cNvPr id="11" name="Marcador 2"/>
-          <p:cNvSpPr/>
-          <p:nvPr/>
-        </p:nvSpPr>
-        <p:spPr>
-          <a:xfrm>
-            <a:off x="3383280" y="5349240"/>
+              <a:t>Apps</a:t>
+            </a:r>
+            <a:endParaRPr lang="en-US" sz="2200" dirty="0"/>
+          </a:p>
+        </p:txBody>
+      </p:sp>
+      <p:sp>
+        <p:nvSpPr>
+          <p:cNvPr id="6" name="Capa Apps paquetes"/>
+          <p:cNvSpPr txBox="1"/>
+          <p:nvPr/>
+        </p:nvSpPr>
+        <p:spPr>
+          <a:xfrm>
+            <a:off x="4206240" y="1883664"/>
+            <a:ext cx="4663440" cy="292608"/>
+          </a:xfrm>
+          <a:prstGeom prst="rect">
+            <a:avLst/>
+          </a:prstGeom>
+          <a:noFill/>
+          <a:ln/>
+        </p:spPr>
+        <p:txBody>
+          <a:bodyPr wrap="square" lIns="0" tIns="0" rIns="0" bIns="0" rtlCol="0" anchor="t"/>
+          <a:lstStyle/>
+          <a:p>
+            <a:pPr algn="r" indent="0" marL="0">
+              <a:buNone/>
+            </a:pPr>
+            <a:r>
+              <a:rPr lang="en-US" sz="1500" dirty="0">
+                <a:solidFill>
+                  <a:schemeClr val="tx2"/>
+                </a:solidFill>
+                <a:latin typeface="Courier New" pitchFamily="34" charset="0"/>
+                <a:ea typeface="Courier New" pitchFamily="34" charset="-122"/>
+                <a:cs typeface="Courier New" pitchFamily="34" charset="-120"/>
+              </a:rPr>
+              <a:t>api · dispatcher · console</a:t>
+            </a:r>
+            <a:endParaRPr lang="en-US" sz="1500" dirty="0"/>
+          </a:p>
+        </p:txBody>
+      </p:sp>
+      <p:sp>
+        <p:nvSpPr>
+          <p:cNvPr id="7" name="Capa Adaptadores"/>
+          <p:cNvSpPr/>
+          <p:nvPr/>
+        </p:nvSpPr>
+        <p:spPr>
+          <a:xfrm>
+            <a:off x="868680" y="2633472"/>
+            <a:ext cx="7955280" cy="914400"/>
+          </a:xfrm>
+          <a:prstGeom prst="roundRect">
+            <a:avLst>
+              <a:gd name="adj" fmla="val 10000"/>
+            </a:avLst>
+          </a:prstGeom>
+          <a:solidFill>
+            <a:schemeClr val="bg2"/>
+          </a:solidFill>
+          <a:ln w="31750">
+            <a:solidFill>
+              <a:schemeClr val="accent4"/>
+            </a:solidFill>
+            <a:prstDash val="solid"/>
+          </a:ln>
+        </p:spPr>
+      </p:sp>
+      <p:sp>
+        <p:nvSpPr>
+          <p:cNvPr id="8" name="Marcador Adaptadores"/>
+          <p:cNvSpPr/>
+          <p:nvPr/>
+        </p:nvSpPr>
+        <p:spPr>
+          <a:xfrm>
+            <a:off x="1143000" y="3035808"/>
             <a:ext cx="457200" cy="109728"/>
           </a:xfrm>
           <a:prstGeom prst="roundRect">
@@ -10673,26 +13353,26 @@
             </a:avLst>
           </a:prstGeom>
           <a:solidFill>
-            <a:schemeClr val="accent2"/>
+            <a:schemeClr val="accent4"/>
           </a:solidFill>
           <a:ln w="12700">
             <a:solidFill>
-              <a:schemeClr val="accent2"/>
-            </a:solidFill>
-            <a:prstDash val="solid"/>
-          </a:ln>
-        </p:spPr>
-      </p:sp>
-      <p:sp>
-        <p:nvSpPr>
-          <p:cNvPr id="12" name="Etiqueta 2"/>
-          <p:cNvSpPr txBox="1"/>
-          <p:nvPr/>
-        </p:nvSpPr>
-        <p:spPr>
-          <a:xfrm>
-            <a:off x="3383280" y="5532120"/>
-            <a:ext cx="2560320" cy="365760"/>
+              <a:schemeClr val="accent4"/>
+            </a:solidFill>
+            <a:prstDash val="solid"/>
+          </a:ln>
+        </p:spPr>
+      </p:sp>
+      <p:sp>
+        <p:nvSpPr>
+          <p:cNvPr id="9" name="Capa Adaptadores nombre"/>
+          <p:cNvSpPr txBox="1"/>
+          <p:nvPr/>
+        </p:nvSpPr>
+        <p:spPr>
+          <a:xfrm>
+            <a:off x="1783080" y="2907792"/>
+            <a:ext cx="2743200" cy="384048"/>
           </a:xfrm>
           <a:prstGeom prst="rect">
             <a:avLst/>
@@ -10708,26 +13388,92 @@
               <a:buNone/>
             </a:pPr>
             <a:r>
-              <a:rPr lang="en-US" sz="1800" b="1" dirty="0">
+              <a:rPr lang="en-US" sz="2200" b="1" dirty="0">
                 <a:solidFill>
                   <a:schemeClr val="tx1"/>
                 </a:solidFill>
               </a:rPr>
-              <a:t>ESM, CJS y tipos</a:t>
-            </a:r>
-            <a:endParaRPr lang="en-US" sz="1800" dirty="0"/>
-          </a:p>
-        </p:txBody>
-      </p:sp>
-      <p:sp>
-        <p:nvSpPr>
-          <p:cNvPr id="13" name="Marcador 3"/>
-          <p:cNvSpPr/>
-          <p:nvPr/>
-        </p:nvSpPr>
-        <p:spPr>
-          <a:xfrm>
-            <a:off x="6217920" y="5349240"/>
+              <a:t>Adaptadores</a:t>
+            </a:r>
+            <a:endParaRPr lang="en-US" sz="2200" dirty="0"/>
+          </a:p>
+        </p:txBody>
+      </p:sp>
+      <p:sp>
+        <p:nvSpPr>
+          <p:cNvPr id="10" name="Capa Adaptadores paquetes"/>
+          <p:cNvSpPr txBox="1"/>
+          <p:nvPr/>
+        </p:nvSpPr>
+        <p:spPr>
+          <a:xfrm>
+            <a:off x="4526280" y="2962656"/>
+            <a:ext cx="4023360" cy="292608"/>
+          </a:xfrm>
+          <a:prstGeom prst="rect">
+            <a:avLst/>
+          </a:prstGeom>
+          <a:noFill/>
+          <a:ln/>
+        </p:spPr>
+        <p:txBody>
+          <a:bodyPr wrap="square" lIns="0" tIns="0" rIns="0" bIns="0" rtlCol="0" anchor="t"/>
+          <a:lstStyle/>
+          <a:p>
+            <a:pPr algn="r" indent="0" marL="0">
+              <a:buNone/>
+            </a:pPr>
+            <a:r>
+              <a:rPr lang="en-US" sz="1500" dirty="0">
+                <a:solidFill>
+                  <a:schemeClr val="tx2"/>
+                </a:solidFill>
+                <a:latin typeface="Courier New" pitchFamily="34" charset="0"/>
+                <a:ea typeface="Courier New" pitchFamily="34" charset="-122"/>
+                <a:cs typeface="Courier New" pitchFamily="34" charset="-120"/>
+              </a:rPr>
+              <a:t>persistence · providers</a:t>
+            </a:r>
+            <a:endParaRPr lang="en-US" sz="1500" dirty="0"/>
+          </a:p>
+        </p:txBody>
+      </p:sp>
+      <p:sp>
+        <p:nvSpPr>
+          <p:cNvPr id="11" name="Capa Aplicación"/>
+          <p:cNvSpPr/>
+          <p:nvPr/>
+        </p:nvSpPr>
+        <p:spPr>
+          <a:xfrm>
+            <a:off x="1188720" y="3712464"/>
+            <a:ext cx="7315200" cy="914400"/>
+          </a:xfrm>
+          <a:prstGeom prst="roundRect">
+            <a:avLst>
+              <a:gd name="adj" fmla="val 10000"/>
+            </a:avLst>
+          </a:prstGeom>
+          <a:solidFill>
+            <a:schemeClr val="bg2"/>
+          </a:solidFill>
+          <a:ln w="31750">
+            <a:solidFill>
+              <a:schemeClr val="accent3"/>
+            </a:solidFill>
+            <a:prstDash val="solid"/>
+          </a:ln>
+        </p:spPr>
+      </p:sp>
+      <p:sp>
+        <p:nvSpPr>
+          <p:cNvPr id="12" name="Marcador Aplicación"/>
+          <p:cNvSpPr/>
+          <p:nvPr/>
+        </p:nvSpPr>
+        <p:spPr>
+          <a:xfrm>
+            <a:off x="1463040" y="4114800"/>
             <a:ext cx="457200" cy="109728"/>
           </a:xfrm>
           <a:prstGeom prst="roundRect">
@@ -10748,14 +13494,14 @@
       </p:sp>
       <p:sp>
         <p:nvSpPr>
-          <p:cNvPr id="14" name="Etiqueta 3"/>
-          <p:cNvSpPr txBox="1"/>
-          <p:nvPr/>
-        </p:nvSpPr>
-        <p:spPr>
-          <a:xfrm>
-            <a:off x="6217920" y="5532120"/>
-            <a:ext cx="2560320" cy="365760"/>
+          <p:cNvPr id="13" name="Capa Aplicación nombre"/>
+          <p:cNvSpPr txBox="1"/>
+          <p:nvPr/>
+        </p:nvSpPr>
+        <p:spPr>
+          <a:xfrm>
+            <a:off x="2103120" y="3986784"/>
+            <a:ext cx="2743200" cy="384048"/>
           </a:xfrm>
           <a:prstGeom prst="rect">
             <a:avLst/>
@@ -10771,26 +13517,92 @@
               <a:buNone/>
             </a:pPr>
             <a:r>
-              <a:rPr lang="en-US" sz="1800" b="1" dirty="0">
+              <a:rPr lang="en-US" sz="2200" b="1" dirty="0">
                 <a:solidFill>
                   <a:schemeClr val="tx1"/>
                 </a:solidFill>
               </a:rPr>
-              <a:t>Tailwind v4</a:t>
-            </a:r>
-            <a:endParaRPr lang="en-US" sz="1800" dirty="0"/>
-          </a:p>
-        </p:txBody>
-      </p:sp>
-      <p:sp>
-        <p:nvSpPr>
-          <p:cNvPr id="15" name="Marcador 4"/>
-          <p:cNvSpPr/>
-          <p:nvPr/>
-        </p:nvSpPr>
-        <p:spPr>
-          <a:xfrm>
-            <a:off x="9052560" y="5349240"/>
+              <a:t>Aplicación</a:t>
+            </a:r>
+            <a:endParaRPr lang="en-US" sz="2200" dirty="0"/>
+          </a:p>
+        </p:txBody>
+      </p:sp>
+      <p:sp>
+        <p:nvSpPr>
+          <p:cNvPr id="14" name="Capa Aplicación paquetes"/>
+          <p:cNvSpPr txBox="1"/>
+          <p:nvPr/>
+        </p:nvSpPr>
+        <p:spPr>
+          <a:xfrm>
+            <a:off x="4846320" y="4041648"/>
+            <a:ext cx="3383280" cy="292608"/>
+          </a:xfrm>
+          <a:prstGeom prst="rect">
+            <a:avLst/>
+          </a:prstGeom>
+          <a:noFill/>
+          <a:ln/>
+        </p:spPr>
+        <p:txBody>
+          <a:bodyPr wrap="square" lIns="0" tIns="0" rIns="0" bIns="0" rtlCol="0" anchor="t"/>
+          <a:lstStyle/>
+          <a:p>
+            <a:pPr algn="r" indent="0" marL="0">
+              <a:buNone/>
+            </a:pPr>
+            <a:r>
+              <a:rPr lang="en-US" sz="1500" dirty="0">
+                <a:solidFill>
+                  <a:schemeClr val="tx2"/>
+                </a:solidFill>
+                <a:latin typeface="Courier New" pitchFamily="34" charset="0"/>
+                <a:ea typeface="Courier New" pitchFamily="34" charset="-122"/>
+                <a:cs typeface="Courier New" pitchFamily="34" charset="-120"/>
+              </a:rPr>
+              <a:t>application</a:t>
+            </a:r>
+            <a:endParaRPr lang="en-US" sz="1500" dirty="0"/>
+          </a:p>
+        </p:txBody>
+      </p:sp>
+      <p:sp>
+        <p:nvSpPr>
+          <p:cNvPr id="15" name="Capa Dominio"/>
+          <p:cNvSpPr/>
+          <p:nvPr/>
+        </p:nvSpPr>
+        <p:spPr>
+          <a:xfrm>
+            <a:off x="1508760" y="4791456"/>
+            <a:ext cx="6675120" cy="914400"/>
+          </a:xfrm>
+          <a:prstGeom prst="roundRect">
+            <a:avLst>
+              <a:gd name="adj" fmla="val 10000"/>
+            </a:avLst>
+          </a:prstGeom>
+          <a:solidFill>
+            <a:schemeClr val="bg2"/>
+          </a:solidFill>
+          <a:ln w="31750">
+            <a:solidFill>
+              <a:schemeClr val="accent2"/>
+            </a:solidFill>
+            <a:prstDash val="solid"/>
+          </a:ln>
+        </p:spPr>
+      </p:sp>
+      <p:sp>
+        <p:nvSpPr>
+          <p:cNvPr id="16" name="Marcador Dominio"/>
+          <p:cNvSpPr/>
+          <p:nvPr/>
+        </p:nvSpPr>
+        <p:spPr>
+          <a:xfrm>
+            <a:off x="1783080" y="5193792"/>
             <a:ext cx="457200" cy="109728"/>
           </a:xfrm>
           <a:prstGeom prst="roundRect">
@@ -10799,26 +13611,26 @@
             </a:avLst>
           </a:prstGeom>
           <a:solidFill>
-            <a:schemeClr val="accent4"/>
+            <a:schemeClr val="accent2"/>
           </a:solidFill>
           <a:ln w="12700">
             <a:solidFill>
-              <a:schemeClr val="accent4"/>
-            </a:solidFill>
-            <a:prstDash val="solid"/>
-          </a:ln>
-        </p:spPr>
-      </p:sp>
-      <p:sp>
-        <p:nvSpPr>
-          <p:cNvPr id="16" name="Etiqueta 4"/>
-          <p:cNvSpPr txBox="1"/>
-          <p:nvPr/>
-        </p:nvSpPr>
-        <p:spPr>
-          <a:xfrm>
-            <a:off x="9052560" y="5532120"/>
-            <a:ext cx="2560320" cy="365760"/>
+              <a:schemeClr val="accent2"/>
+            </a:solidFill>
+            <a:prstDash val="solid"/>
+          </a:ln>
+        </p:spPr>
+      </p:sp>
+      <p:sp>
+        <p:nvSpPr>
+          <p:cNvPr id="17" name="Capa Dominio nombre"/>
+          <p:cNvSpPr txBox="1"/>
+          <p:nvPr/>
+        </p:nvSpPr>
+        <p:spPr>
+          <a:xfrm>
+            <a:off x="2423160" y="5065776"/>
+            <a:ext cx="2743200" cy="384048"/>
           </a:xfrm>
           <a:prstGeom prst="rect">
             <a:avLst/>
@@ -10834,12 +13646,161 @@
               <a:buNone/>
             </a:pPr>
             <a:r>
+              <a:rPr lang="en-US" sz="2200" b="1" dirty="0">
+                <a:solidFill>
+                  <a:schemeClr val="tx1"/>
+                </a:solidFill>
+              </a:rPr>
+              <a:t>Dominio</a:t>
+            </a:r>
+            <a:endParaRPr lang="en-US" sz="2200" dirty="0"/>
+          </a:p>
+        </p:txBody>
+      </p:sp>
+      <p:sp>
+        <p:nvSpPr>
+          <p:cNvPr id="18" name="Capa Dominio paquetes"/>
+          <p:cNvSpPr txBox="1"/>
+          <p:nvPr/>
+        </p:nvSpPr>
+        <p:spPr>
+          <a:xfrm>
+            <a:off x="5166360" y="5120640"/>
+            <a:ext cx="2743200" cy="292608"/>
+          </a:xfrm>
+          <a:prstGeom prst="rect">
+            <a:avLst/>
+          </a:prstGeom>
+          <a:noFill/>
+          <a:ln/>
+        </p:spPr>
+        <p:txBody>
+          <a:bodyPr wrap="square" lIns="0" tIns="0" rIns="0" bIns="0" rtlCol="0" anchor="t"/>
+          <a:lstStyle/>
+          <a:p>
+            <a:pPr algn="r" indent="0" marL="0">
+              <a:buNone/>
+            </a:pPr>
+            <a:r>
+              <a:rPr lang="en-US" sz="1500" dirty="0">
+                <a:solidFill>
+                  <a:schemeClr val="tx2"/>
+                </a:solidFill>
+                <a:latin typeface="Courier New" pitchFamily="34" charset="0"/>
+                <a:ea typeface="Courier New" pitchFamily="34" charset="-122"/>
+                <a:cs typeface="Courier New" pitchFamily="34" charset="-120"/>
+              </a:rPr>
+              <a:t>domain</a:t>
+            </a:r>
+            <a:endParaRPr lang="en-US" sz="1500" dirty="0"/>
+          </a:p>
+        </p:txBody>
+      </p:sp>
+      <p:sp>
+        <p:nvSpPr>
+          <p:cNvPr id="19" name="Dependencias hacia dentro"/>
+          <p:cNvSpPr/>
+          <p:nvPr/>
+        </p:nvSpPr>
+        <p:spPr>
+          <a:xfrm>
+            <a:off x="9692640" y="1737360"/>
+            <a:ext cx="0" cy="3785616"/>
+          </a:xfrm>
+          <a:prstGeom prst="line">
+            <a:avLst/>
+          </a:prstGeom>
+          <a:noFill/>
+          <a:ln w="28575">
+            <a:solidFill>
+              <a:schemeClr val="tx1"/>
+            </a:solidFill>
+            <a:prstDash val="solid"/>
+            <a:tailEnd type="triangle" w="lg" len="lg"/>
+          </a:ln>
+        </p:spPr>
+      </p:sp>
+      <p:sp>
+        <p:nvSpPr>
+          <p:cNvPr id="20" name="Nota dependencias"/>
+          <p:cNvSpPr txBox="1"/>
+          <p:nvPr/>
+        </p:nvSpPr>
+        <p:spPr>
+          <a:xfrm>
+            <a:off x="9921240" y="3063240"/>
+            <a:ext cx="1737360" cy="640080"/>
+          </a:xfrm>
+          <a:prstGeom prst="rect">
+            <a:avLst/>
+          </a:prstGeom>
+          <a:noFill/>
+          <a:ln/>
+        </p:spPr>
+        <p:txBody>
+          <a:bodyPr wrap="square" lIns="0" tIns="0" rIns="0" bIns="0" rtlCol="0" anchor="t"/>
+          <a:lstStyle/>
+          <a:p>
+            <a:pPr indent="0" marL="0">
+              <a:buNone/>
+            </a:pPr>
+            <a:r>
+              <a:rPr lang="en-US" sz="1500" dirty="0">
+                <a:solidFill>
+                  <a:schemeClr val="tx2"/>
+                </a:solidFill>
+              </a:rPr>
+              <a:t>todo apunta</a:t>
+            </a:r>
+            <a:endParaRPr lang="en-US" sz="1500" dirty="0"/>
+          </a:p>
+          <a:p>
+            <a:pPr indent="0" marL="0">
+              <a:buNone/>
+            </a:pPr>
+            <a:r>
+              <a:rPr lang="en-US" sz="1500" dirty="0">
+                <a:solidFill>
+                  <a:schemeClr val="tx2"/>
+                </a:solidFill>
+              </a:rPr>
+              <a:t>al dominio</a:t>
+            </a:r>
+            <a:endParaRPr lang="en-US" sz="1500" dirty="0"/>
+          </a:p>
+        </p:txBody>
+      </p:sp>
+      <p:sp>
+        <p:nvSpPr>
+          <p:cNvPr id="21" name="Idea"/>
+          <p:cNvSpPr txBox="1"/>
+          <p:nvPr/>
+        </p:nvSpPr>
+        <p:spPr>
+          <a:xfrm>
+            <a:off x="548640" y="5852160"/>
+            <a:ext cx="11064240" cy="411480"/>
+          </a:xfrm>
+          <a:prstGeom prst="rect">
+            <a:avLst/>
+          </a:prstGeom>
+          <a:noFill/>
+          <a:ln/>
+        </p:spPr>
+        <p:txBody>
+          <a:bodyPr wrap="square" lIns="0" tIns="0" rIns="0" bIns="0" rtlCol="0" anchor="t"/>
+          <a:lstStyle/>
+          <a:p>
+            <a:pPr indent="0" marL="0">
+              <a:buNone/>
+            </a:pPr>
+            <a:r>
               <a:rPr lang="en-US" sz="1800" b="1" dirty="0">
                 <a:solidFill>
                   <a:schemeClr val="tx1"/>
                 </a:solidFill>
               </a:rPr>
-              <a:t>45 pruebas</a:t>
+              <a:t>El dominio no sabe qué base de datos ni qué proveedor usamos.</a:t>
             </a:r>
             <a:endParaRPr lang="en-US" sz="1800" dirty="0"/>
           </a:p>
@@ -10947,7 +13908,7 @@
                   <a:schemeClr val="tx1"/>
                 </a:solidFill>
               </a:rPr>
-              <a:t>Qué es real, qué es simulado y qué falta</a:t>
+              <a:t>Un repositorio, un comando</a:t>
             </a:r>
             <a:endParaRPr lang="en-US" sz="3200" dirty="0"/>
           </a:p>
@@ -10955,18 +13916,18 @@
       </p:sp>
       <p:sp>
         <p:nvSpPr>
-          <p:cNvPr id="3" name="Columna Real"/>
+          <p:cNvPr id="3" name="Repositorio"/>
           <p:cNvSpPr/>
           <p:nvPr/>
         </p:nvSpPr>
         <p:spPr>
           <a:xfrm>
             <a:off x="548640" y="1508760"/>
-            <a:ext cx="3566160" cy="3246120"/>
+            <a:ext cx="6949440" cy="4023360"/>
           </a:xfrm>
           <a:prstGeom prst="roundRect">
             <a:avLst>
-              <a:gd name="adj" fmla="val 3380"/>
+              <a:gd name="adj" fmla="val 2727"/>
             </a:avLst>
           </a:prstGeom>
           <a:solidFill>
@@ -10989,14 +13950,761 @@
       </p:sp>
       <p:sp>
         <p:nvSpPr>
-          <p:cNvPr id="4" name="Marcador Real"/>
-          <p:cNvSpPr/>
-          <p:nvPr/>
-        </p:nvSpPr>
-        <p:spPr>
-          <a:xfrm>
-            <a:off x="822960" y="1737360"/>
-            <a:ext cx="502920" cy="109728"/>
+          <p:cNvPr id="4" name="Raíz"/>
+          <p:cNvSpPr txBox="1"/>
+          <p:nvPr/>
+        </p:nvSpPr>
+        <p:spPr>
+          <a:xfrm>
+            <a:off x="868680" y="1691640"/>
+            <a:ext cx="3657600" cy="365760"/>
+          </a:xfrm>
+          <a:prstGeom prst="rect">
+            <a:avLst/>
+          </a:prstGeom>
+          <a:noFill/>
+          <a:ln/>
+        </p:spPr>
+        <p:txBody>
+          <a:bodyPr wrap="square" lIns="0" tIns="0" rIns="0" bIns="0" rtlCol="0" anchor="t"/>
+          <a:lstStyle/>
+          <a:p>
+            <a:pPr indent="0" marL="0">
+              <a:buNone/>
+            </a:pPr>
+            <a:r>
+              <a:rPr lang="en-US" sz="2000" b="1" dirty="0">
+                <a:solidFill>
+                  <a:schemeClr val="tx1"/>
+                </a:solidFill>
+                <a:latin typeface="Courier New" pitchFamily="34" charset="0"/>
+                <a:ea typeface="Courier New" pitchFamily="34" charset="-122"/>
+                <a:cs typeface="Courier New" pitchFamily="34" charset="-120"/>
+              </a:rPr>
+              <a:t>notifyhub/</a:t>
+            </a:r>
+            <a:endParaRPr lang="en-US" sz="2000" dirty="0"/>
+          </a:p>
+        </p:txBody>
+      </p:sp>
+      <p:sp>
+        <p:nvSpPr>
+          <p:cNvPr id="5" name="apps/ carpeta"/>
+          <p:cNvSpPr txBox="1"/>
+          <p:nvPr/>
+        </p:nvSpPr>
+        <p:spPr>
+          <a:xfrm>
+            <a:off x="868680" y="2194560"/>
+            <a:ext cx="1828800" cy="320040"/>
+          </a:xfrm>
+          <a:prstGeom prst="rect">
+            <a:avLst/>
+          </a:prstGeom>
+          <a:noFill/>
+          <a:ln/>
+        </p:spPr>
+        <p:txBody>
+          <a:bodyPr wrap="square" lIns="0" tIns="0" rIns="0" bIns="0" rtlCol="0" anchor="t"/>
+          <a:lstStyle/>
+          <a:p>
+            <a:pPr indent="0" marL="0">
+              <a:buNone/>
+            </a:pPr>
+            <a:r>
+              <a:rPr lang="en-US" sz="1600" b="1" dirty="0">
+                <a:solidFill>
+                  <a:schemeClr val="tx2"/>
+                </a:solidFill>
+                <a:latin typeface="Courier New" pitchFamily="34" charset="0"/>
+                <a:ea typeface="Courier New" pitchFamily="34" charset="-122"/>
+                <a:cs typeface="Courier New" pitchFamily="34" charset="-120"/>
+              </a:rPr>
+              <a:t>apps/</a:t>
+            </a:r>
+            <a:endParaRPr lang="en-US" sz="1600" dirty="0"/>
+          </a:p>
+        </p:txBody>
+      </p:sp>
+      <p:sp>
+        <p:nvSpPr>
+          <p:cNvPr id="6" name="apps/ api"/>
+          <p:cNvSpPr/>
+          <p:nvPr/>
+        </p:nvSpPr>
+        <p:spPr>
+          <a:xfrm>
+            <a:off x="868680" y="2606040"/>
+            <a:ext cx="1965960" cy="457200"/>
+          </a:xfrm>
+          <a:prstGeom prst="roundRect">
+            <a:avLst>
+              <a:gd name="adj" fmla="val 20000"/>
+            </a:avLst>
+          </a:prstGeom>
+          <a:solidFill>
+            <a:schemeClr val="bg2"/>
+          </a:solidFill>
+          <a:ln w="25400">
+            <a:solidFill>
+              <a:schemeClr val="accent5"/>
+            </a:solidFill>
+            <a:prstDash val="solid"/>
+          </a:ln>
+        </p:spPr>
+      </p:sp>
+      <p:sp>
+        <p:nvSpPr>
+          <p:cNvPr id="7" name="apps/ api texto 1"/>
+          <p:cNvSpPr txBox="1"/>
+          <p:nvPr/>
+        </p:nvSpPr>
+        <p:spPr>
+          <a:xfrm>
+            <a:off x="1005840" y="2727960"/>
+            <a:ext cx="1691640" cy="213360"/>
+          </a:xfrm>
+          <a:prstGeom prst="rect">
+            <a:avLst/>
+          </a:prstGeom>
+          <a:noFill/>
+          <a:ln/>
+        </p:spPr>
+        <p:txBody>
+          <a:bodyPr wrap="square" lIns="0" tIns="0" rIns="0" bIns="0" rtlCol="0" anchor="t"/>
+          <a:lstStyle/>
+          <a:p>
+            <a:pPr algn="ctr" indent="0" marL="0">
+              <a:buNone/>
+            </a:pPr>
+            <a:r>
+              <a:rPr lang="en-US" sz="1400" b="1" dirty="0">
+                <a:solidFill>
+                  <a:schemeClr val="tx1"/>
+                </a:solidFill>
+              </a:rPr>
+              <a:t>api</a:t>
+            </a:r>
+            <a:endParaRPr lang="en-US" sz="1400" dirty="0"/>
+          </a:p>
+        </p:txBody>
+      </p:sp>
+      <p:sp>
+        <p:nvSpPr>
+          <p:cNvPr id="8" name="apps/ dispatcher"/>
+          <p:cNvSpPr/>
+          <p:nvPr/>
+        </p:nvSpPr>
+        <p:spPr>
+          <a:xfrm>
+            <a:off x="3017520" y="2606040"/>
+            <a:ext cx="1965960" cy="457200"/>
+          </a:xfrm>
+          <a:prstGeom prst="roundRect">
+            <a:avLst>
+              <a:gd name="adj" fmla="val 20000"/>
+            </a:avLst>
+          </a:prstGeom>
+          <a:solidFill>
+            <a:schemeClr val="bg2"/>
+          </a:solidFill>
+          <a:ln w="25400">
+            <a:solidFill>
+              <a:schemeClr val="accent5"/>
+            </a:solidFill>
+            <a:prstDash val="solid"/>
+          </a:ln>
+        </p:spPr>
+      </p:sp>
+      <p:sp>
+        <p:nvSpPr>
+          <p:cNvPr id="9" name="apps/ dispatcher texto 1"/>
+          <p:cNvSpPr txBox="1"/>
+          <p:nvPr/>
+        </p:nvSpPr>
+        <p:spPr>
+          <a:xfrm>
+            <a:off x="3154680" y="2727960"/>
+            <a:ext cx="1691640" cy="213360"/>
+          </a:xfrm>
+          <a:prstGeom prst="rect">
+            <a:avLst/>
+          </a:prstGeom>
+          <a:noFill/>
+          <a:ln/>
+        </p:spPr>
+        <p:txBody>
+          <a:bodyPr wrap="square" lIns="0" tIns="0" rIns="0" bIns="0" rtlCol="0" anchor="t"/>
+          <a:lstStyle/>
+          <a:p>
+            <a:pPr algn="ctr" indent="0" marL="0">
+              <a:buNone/>
+            </a:pPr>
+            <a:r>
+              <a:rPr lang="en-US" sz="1400" b="1" dirty="0">
+                <a:solidFill>
+                  <a:schemeClr val="tx1"/>
+                </a:solidFill>
+              </a:rPr>
+              <a:t>dispatcher</a:t>
+            </a:r>
+            <a:endParaRPr lang="en-US" sz="1400" dirty="0"/>
+          </a:p>
+        </p:txBody>
+      </p:sp>
+      <p:sp>
+        <p:nvSpPr>
+          <p:cNvPr id="10" name="apps/ console"/>
+          <p:cNvSpPr/>
+          <p:nvPr/>
+        </p:nvSpPr>
+        <p:spPr>
+          <a:xfrm>
+            <a:off x="5166360" y="2606040"/>
+            <a:ext cx="1965960" cy="457200"/>
+          </a:xfrm>
+          <a:prstGeom prst="roundRect">
+            <a:avLst>
+              <a:gd name="adj" fmla="val 20000"/>
+            </a:avLst>
+          </a:prstGeom>
+          <a:solidFill>
+            <a:schemeClr val="bg2"/>
+          </a:solidFill>
+          <a:ln w="25400">
+            <a:solidFill>
+              <a:schemeClr val="accent5"/>
+            </a:solidFill>
+            <a:prstDash val="solid"/>
+          </a:ln>
+        </p:spPr>
+      </p:sp>
+      <p:sp>
+        <p:nvSpPr>
+          <p:cNvPr id="11" name="apps/ console texto 1"/>
+          <p:cNvSpPr txBox="1"/>
+          <p:nvPr/>
+        </p:nvSpPr>
+        <p:spPr>
+          <a:xfrm>
+            <a:off x="5303520" y="2727960"/>
+            <a:ext cx="1691640" cy="213360"/>
+          </a:xfrm>
+          <a:prstGeom prst="rect">
+            <a:avLst/>
+          </a:prstGeom>
+          <a:noFill/>
+          <a:ln/>
+        </p:spPr>
+        <p:txBody>
+          <a:bodyPr wrap="square" lIns="0" tIns="0" rIns="0" bIns="0" rtlCol="0" anchor="t"/>
+          <a:lstStyle/>
+          <a:p>
+            <a:pPr algn="ctr" indent="0" marL="0">
+              <a:buNone/>
+            </a:pPr>
+            <a:r>
+              <a:rPr lang="en-US" sz="1400" b="1" dirty="0">
+                <a:solidFill>
+                  <a:schemeClr val="tx1"/>
+                </a:solidFill>
+              </a:rPr>
+              <a:t>console</a:t>
+            </a:r>
+            <a:endParaRPr lang="en-US" sz="1400" dirty="0"/>
+          </a:p>
+        </p:txBody>
+      </p:sp>
+      <p:sp>
+        <p:nvSpPr>
+          <p:cNvPr id="12" name="packages/ carpeta"/>
+          <p:cNvSpPr txBox="1"/>
+          <p:nvPr/>
+        </p:nvSpPr>
+        <p:spPr>
+          <a:xfrm>
+            <a:off x="868680" y="3246120"/>
+            <a:ext cx="1828800" cy="320040"/>
+          </a:xfrm>
+          <a:prstGeom prst="rect">
+            <a:avLst/>
+          </a:prstGeom>
+          <a:noFill/>
+          <a:ln/>
+        </p:spPr>
+        <p:txBody>
+          <a:bodyPr wrap="square" lIns="0" tIns="0" rIns="0" bIns="0" rtlCol="0" anchor="t"/>
+          <a:lstStyle/>
+          <a:p>
+            <a:pPr indent="0" marL="0">
+              <a:buNone/>
+            </a:pPr>
+            <a:r>
+              <a:rPr lang="en-US" sz="1600" b="1" dirty="0">
+                <a:solidFill>
+                  <a:schemeClr val="tx2"/>
+                </a:solidFill>
+                <a:latin typeface="Courier New" pitchFamily="34" charset="0"/>
+                <a:ea typeface="Courier New" pitchFamily="34" charset="-122"/>
+                <a:cs typeface="Courier New" pitchFamily="34" charset="-120"/>
+              </a:rPr>
+              <a:t>packages/</a:t>
+            </a:r>
+            <a:endParaRPr lang="en-US" sz="1600" dirty="0"/>
+          </a:p>
+        </p:txBody>
+      </p:sp>
+      <p:sp>
+        <p:nvSpPr>
+          <p:cNvPr id="13" name="packages/ domain"/>
+          <p:cNvSpPr/>
+          <p:nvPr/>
+        </p:nvSpPr>
+        <p:spPr>
+          <a:xfrm>
+            <a:off x="868680" y="3657600"/>
+            <a:ext cx="1965960" cy="457200"/>
+          </a:xfrm>
+          <a:prstGeom prst="roundRect">
+            <a:avLst>
+              <a:gd name="adj" fmla="val 20000"/>
+            </a:avLst>
+          </a:prstGeom>
+          <a:solidFill>
+            <a:schemeClr val="bg2"/>
+          </a:solidFill>
+          <a:ln w="25400">
+            <a:solidFill>
+              <a:schemeClr val="accent2"/>
+            </a:solidFill>
+            <a:prstDash val="solid"/>
+          </a:ln>
+        </p:spPr>
+      </p:sp>
+      <p:sp>
+        <p:nvSpPr>
+          <p:cNvPr id="14" name="packages/ domain texto 1"/>
+          <p:cNvSpPr txBox="1"/>
+          <p:nvPr/>
+        </p:nvSpPr>
+        <p:spPr>
+          <a:xfrm>
+            <a:off x="1005840" y="3779520"/>
+            <a:ext cx="1691640" cy="213360"/>
+          </a:xfrm>
+          <a:prstGeom prst="rect">
+            <a:avLst/>
+          </a:prstGeom>
+          <a:noFill/>
+          <a:ln/>
+        </p:spPr>
+        <p:txBody>
+          <a:bodyPr wrap="square" lIns="0" tIns="0" rIns="0" bIns="0" rtlCol="0" anchor="t"/>
+          <a:lstStyle/>
+          <a:p>
+            <a:pPr algn="ctr" indent="0" marL="0">
+              <a:buNone/>
+            </a:pPr>
+            <a:r>
+              <a:rPr lang="en-US" sz="1400" b="1" dirty="0">
+                <a:solidFill>
+                  <a:schemeClr val="tx1"/>
+                </a:solidFill>
+              </a:rPr>
+              <a:t>domain</a:t>
+            </a:r>
+            <a:endParaRPr lang="en-US" sz="1400" dirty="0"/>
+          </a:p>
+        </p:txBody>
+      </p:sp>
+      <p:sp>
+        <p:nvSpPr>
+          <p:cNvPr id="15" name="packages/ application"/>
+          <p:cNvSpPr/>
+          <p:nvPr/>
+        </p:nvSpPr>
+        <p:spPr>
+          <a:xfrm>
+            <a:off x="3017520" y="3657600"/>
+            <a:ext cx="1965960" cy="457200"/>
+          </a:xfrm>
+          <a:prstGeom prst="roundRect">
+            <a:avLst>
+              <a:gd name="adj" fmla="val 20000"/>
+            </a:avLst>
+          </a:prstGeom>
+          <a:solidFill>
+            <a:schemeClr val="bg2"/>
+          </a:solidFill>
+          <a:ln w="25400">
+            <a:solidFill>
+              <a:schemeClr val="accent2"/>
+            </a:solidFill>
+            <a:prstDash val="solid"/>
+          </a:ln>
+        </p:spPr>
+      </p:sp>
+      <p:sp>
+        <p:nvSpPr>
+          <p:cNvPr id="16" name="packages/ application texto 1"/>
+          <p:cNvSpPr txBox="1"/>
+          <p:nvPr/>
+        </p:nvSpPr>
+        <p:spPr>
+          <a:xfrm>
+            <a:off x="3154680" y="3779520"/>
+            <a:ext cx="1691640" cy="213360"/>
+          </a:xfrm>
+          <a:prstGeom prst="rect">
+            <a:avLst/>
+          </a:prstGeom>
+          <a:noFill/>
+          <a:ln/>
+        </p:spPr>
+        <p:txBody>
+          <a:bodyPr wrap="square" lIns="0" tIns="0" rIns="0" bIns="0" rtlCol="0" anchor="t"/>
+          <a:lstStyle/>
+          <a:p>
+            <a:pPr algn="ctr" indent="0" marL="0">
+              <a:buNone/>
+            </a:pPr>
+            <a:r>
+              <a:rPr lang="en-US" sz="1400" b="1" dirty="0">
+                <a:solidFill>
+                  <a:schemeClr val="tx1"/>
+                </a:solidFill>
+              </a:rPr>
+              <a:t>application</a:t>
+            </a:r>
+            <a:endParaRPr lang="en-US" sz="1400" dirty="0"/>
+          </a:p>
+        </p:txBody>
+      </p:sp>
+      <p:sp>
+        <p:nvSpPr>
+          <p:cNvPr id="17" name="packages/ persistence"/>
+          <p:cNvSpPr/>
+          <p:nvPr/>
+        </p:nvSpPr>
+        <p:spPr>
+          <a:xfrm>
+            <a:off x="5166360" y="3657600"/>
+            <a:ext cx="1965960" cy="457200"/>
+          </a:xfrm>
+          <a:prstGeom prst="roundRect">
+            <a:avLst>
+              <a:gd name="adj" fmla="val 20000"/>
+            </a:avLst>
+          </a:prstGeom>
+          <a:solidFill>
+            <a:schemeClr val="bg2"/>
+          </a:solidFill>
+          <a:ln w="25400">
+            <a:solidFill>
+              <a:schemeClr val="accent2"/>
+            </a:solidFill>
+            <a:prstDash val="solid"/>
+          </a:ln>
+        </p:spPr>
+      </p:sp>
+      <p:sp>
+        <p:nvSpPr>
+          <p:cNvPr id="18" name="packages/ persistence texto 1"/>
+          <p:cNvSpPr txBox="1"/>
+          <p:nvPr/>
+        </p:nvSpPr>
+        <p:spPr>
+          <a:xfrm>
+            <a:off x="5303520" y="3779520"/>
+            <a:ext cx="1691640" cy="213360"/>
+          </a:xfrm>
+          <a:prstGeom prst="rect">
+            <a:avLst/>
+          </a:prstGeom>
+          <a:noFill/>
+          <a:ln/>
+        </p:spPr>
+        <p:txBody>
+          <a:bodyPr wrap="square" lIns="0" tIns="0" rIns="0" bIns="0" rtlCol="0" anchor="t"/>
+          <a:lstStyle/>
+          <a:p>
+            <a:pPr algn="ctr" indent="0" marL="0">
+              <a:buNone/>
+            </a:pPr>
+            <a:r>
+              <a:rPr lang="en-US" sz="1400" b="1" dirty="0">
+                <a:solidFill>
+                  <a:schemeClr val="tx1"/>
+                </a:solidFill>
+              </a:rPr>
+              <a:t>persistence</a:t>
+            </a:r>
+            <a:endParaRPr lang="en-US" sz="1400" dirty="0"/>
+          </a:p>
+        </p:txBody>
+      </p:sp>
+      <p:sp>
+        <p:nvSpPr>
+          <p:cNvPr id="19" name="packages/ providers"/>
+          <p:cNvSpPr/>
+          <p:nvPr/>
+        </p:nvSpPr>
+        <p:spPr>
+          <a:xfrm>
+            <a:off x="868680" y="4224528"/>
+            <a:ext cx="1965960" cy="457200"/>
+          </a:xfrm>
+          <a:prstGeom prst="roundRect">
+            <a:avLst>
+              <a:gd name="adj" fmla="val 20000"/>
+            </a:avLst>
+          </a:prstGeom>
+          <a:solidFill>
+            <a:schemeClr val="bg2"/>
+          </a:solidFill>
+          <a:ln w="25400">
+            <a:solidFill>
+              <a:schemeClr val="accent2"/>
+            </a:solidFill>
+            <a:prstDash val="solid"/>
+          </a:ln>
+        </p:spPr>
+      </p:sp>
+      <p:sp>
+        <p:nvSpPr>
+          <p:cNvPr id="20" name="packages/ providers texto 1"/>
+          <p:cNvSpPr txBox="1"/>
+          <p:nvPr/>
+        </p:nvSpPr>
+        <p:spPr>
+          <a:xfrm>
+            <a:off x="1005840" y="4346448"/>
+            <a:ext cx="1691640" cy="213360"/>
+          </a:xfrm>
+          <a:prstGeom prst="rect">
+            <a:avLst/>
+          </a:prstGeom>
+          <a:noFill/>
+          <a:ln/>
+        </p:spPr>
+        <p:txBody>
+          <a:bodyPr wrap="square" lIns="0" tIns="0" rIns="0" bIns="0" rtlCol="0" anchor="t"/>
+          <a:lstStyle/>
+          <a:p>
+            <a:pPr algn="ctr" indent="0" marL="0">
+              <a:buNone/>
+            </a:pPr>
+            <a:r>
+              <a:rPr lang="en-US" sz="1400" b="1" dirty="0">
+                <a:solidFill>
+                  <a:schemeClr val="tx1"/>
+                </a:solidFill>
+              </a:rPr>
+              <a:t>providers</a:t>
+            </a:r>
+            <a:endParaRPr lang="en-US" sz="1400" dirty="0"/>
+          </a:p>
+        </p:txBody>
+      </p:sp>
+      <p:sp>
+        <p:nvSpPr>
+          <p:cNvPr id="21" name="packages/ shared"/>
+          <p:cNvSpPr/>
+          <p:nvPr/>
+        </p:nvSpPr>
+        <p:spPr>
+          <a:xfrm>
+            <a:off x="3017520" y="4224528"/>
+            <a:ext cx="1965960" cy="457200"/>
+          </a:xfrm>
+          <a:prstGeom prst="roundRect">
+            <a:avLst>
+              <a:gd name="adj" fmla="val 20000"/>
+            </a:avLst>
+          </a:prstGeom>
+          <a:solidFill>
+            <a:schemeClr val="bg2"/>
+          </a:solidFill>
+          <a:ln w="25400">
+            <a:solidFill>
+              <a:schemeClr val="accent2"/>
+            </a:solidFill>
+            <a:prstDash val="solid"/>
+          </a:ln>
+        </p:spPr>
+      </p:sp>
+      <p:sp>
+        <p:nvSpPr>
+          <p:cNvPr id="22" name="packages/ shared texto 1"/>
+          <p:cNvSpPr txBox="1"/>
+          <p:nvPr/>
+        </p:nvSpPr>
+        <p:spPr>
+          <a:xfrm>
+            <a:off x="3154680" y="4346448"/>
+            <a:ext cx="1691640" cy="213360"/>
+          </a:xfrm>
+          <a:prstGeom prst="rect">
+            <a:avLst/>
+          </a:prstGeom>
+          <a:noFill/>
+          <a:ln/>
+        </p:spPr>
+        <p:txBody>
+          <a:bodyPr wrap="square" lIns="0" tIns="0" rIns="0" bIns="0" rtlCol="0" anchor="t"/>
+          <a:lstStyle/>
+          <a:p>
+            <a:pPr algn="ctr" indent="0" marL="0">
+              <a:buNone/>
+            </a:pPr>
+            <a:r>
+              <a:rPr lang="en-US" sz="1400" b="1" dirty="0">
+                <a:solidFill>
+                  <a:schemeClr val="tx1"/>
+                </a:solidFill>
+              </a:rPr>
+              <a:t>shared</a:t>
+            </a:r>
+            <a:endParaRPr lang="en-US" sz="1400" dirty="0"/>
+          </a:p>
+        </p:txBody>
+      </p:sp>
+      <p:sp>
+        <p:nvSpPr>
+          <p:cNvPr id="23" name="packages/ client"/>
+          <p:cNvSpPr/>
+          <p:nvPr/>
+        </p:nvSpPr>
+        <p:spPr>
+          <a:xfrm>
+            <a:off x="5166360" y="4224528"/>
+            <a:ext cx="1965960" cy="457200"/>
+          </a:xfrm>
+          <a:prstGeom prst="roundRect">
+            <a:avLst>
+              <a:gd name="adj" fmla="val 20000"/>
+            </a:avLst>
+          </a:prstGeom>
+          <a:solidFill>
+            <a:schemeClr val="bg2"/>
+          </a:solidFill>
+          <a:ln w="25400">
+            <a:solidFill>
+              <a:schemeClr val="accent2"/>
+            </a:solidFill>
+            <a:prstDash val="solid"/>
+          </a:ln>
+        </p:spPr>
+      </p:sp>
+      <p:sp>
+        <p:nvSpPr>
+          <p:cNvPr id="24" name="packages/ client texto 1"/>
+          <p:cNvSpPr txBox="1"/>
+          <p:nvPr/>
+        </p:nvSpPr>
+        <p:spPr>
+          <a:xfrm>
+            <a:off x="5303520" y="4346448"/>
+            <a:ext cx="1691640" cy="213360"/>
+          </a:xfrm>
+          <a:prstGeom prst="rect">
+            <a:avLst/>
+          </a:prstGeom>
+          <a:noFill/>
+          <a:ln/>
+        </p:spPr>
+        <p:txBody>
+          <a:bodyPr wrap="square" lIns="0" tIns="0" rIns="0" bIns="0" rtlCol="0" anchor="t"/>
+          <a:lstStyle/>
+          <a:p>
+            <a:pPr algn="ctr" indent="0" marL="0">
+              <a:buNone/>
+            </a:pPr>
+            <a:r>
+              <a:rPr lang="en-US" sz="1400" b="1" dirty="0">
+                <a:solidFill>
+                  <a:schemeClr val="tx1"/>
+                </a:solidFill>
+              </a:rPr>
+              <a:t>client</a:t>
+            </a:r>
+            <a:endParaRPr lang="en-US" sz="1400" dirty="0"/>
+          </a:p>
+        </p:txBody>
+      </p:sp>
+      <p:sp>
+        <p:nvSpPr>
+          <p:cNvPr id="25" name="packages/ ui"/>
+          <p:cNvSpPr/>
+          <p:nvPr/>
+        </p:nvSpPr>
+        <p:spPr>
+          <a:xfrm>
+            <a:off x="868680" y="4791456"/>
+            <a:ext cx="1965960" cy="457200"/>
+          </a:xfrm>
+          <a:prstGeom prst="roundRect">
+            <a:avLst>
+              <a:gd name="adj" fmla="val 20000"/>
+            </a:avLst>
+          </a:prstGeom>
+          <a:solidFill>
+            <a:schemeClr val="bg2"/>
+          </a:solidFill>
+          <a:ln w="25400">
+            <a:solidFill>
+              <a:schemeClr val="accent2"/>
+            </a:solidFill>
+            <a:prstDash val="solid"/>
+          </a:ln>
+        </p:spPr>
+      </p:sp>
+      <p:sp>
+        <p:nvSpPr>
+          <p:cNvPr id="26" name="packages/ ui texto 1"/>
+          <p:cNvSpPr txBox="1"/>
+          <p:nvPr/>
+        </p:nvSpPr>
+        <p:spPr>
+          <a:xfrm>
+            <a:off x="1005840" y="4913376"/>
+            <a:ext cx="1691640" cy="213360"/>
+          </a:xfrm>
+          <a:prstGeom prst="rect">
+            <a:avLst/>
+          </a:prstGeom>
+          <a:noFill/>
+          <a:ln/>
+        </p:spPr>
+        <p:txBody>
+          <a:bodyPr wrap="square" lIns="0" tIns="0" rIns="0" bIns="0" rtlCol="0" anchor="t"/>
+          <a:lstStyle/>
+          <a:p>
+            <a:pPr algn="ctr" indent="0" marL="0">
+              <a:buNone/>
+            </a:pPr>
+            <a:r>
+              <a:rPr lang="en-US" sz="1400" b="1" dirty="0">
+                <a:solidFill>
+                  <a:schemeClr val="tx1"/>
+                </a:solidFill>
+              </a:rPr>
+              <a:t>ui</a:t>
+            </a:r>
+            <a:endParaRPr lang="en-US" sz="1400" dirty="0"/>
+          </a:p>
+        </p:txBody>
+      </p:sp>
+      <p:sp>
+        <p:nvSpPr>
+          <p:cNvPr id="27" name="Marcador 1"/>
+          <p:cNvSpPr/>
+          <p:nvPr/>
+        </p:nvSpPr>
+        <p:spPr>
+          <a:xfrm>
+            <a:off x="7955280" y="1691640"/>
+            <a:ext cx="457200" cy="109728"/>
           </a:xfrm>
           <a:prstGeom prst="roundRect">
             <a:avLst>
@@ -11004,26 +14712,26 @@
             </a:avLst>
           </a:prstGeom>
           <a:solidFill>
-            <a:schemeClr val="accent6"/>
+            <a:schemeClr val="accent3"/>
           </a:solidFill>
           <a:ln w="12700">
             <a:solidFill>
-              <a:schemeClr val="accent6"/>
-            </a:solidFill>
-            <a:prstDash val="solid"/>
-          </a:ln>
-        </p:spPr>
-      </p:sp>
-      <p:sp>
-        <p:nvSpPr>
-          <p:cNvPr id="5" name="Título Real"/>
-          <p:cNvSpPr txBox="1"/>
-          <p:nvPr/>
-        </p:nvSpPr>
-        <p:spPr>
-          <a:xfrm>
-            <a:off x="822960" y="1920240"/>
-            <a:ext cx="3017520" cy="411480"/>
+              <a:schemeClr val="accent3"/>
+            </a:solidFill>
+            <a:prstDash val="solid"/>
+          </a:ln>
+        </p:spPr>
+      </p:sp>
+      <p:sp>
+        <p:nvSpPr>
+          <p:cNvPr id="28" name="Herramienta 1"/>
+          <p:cNvSpPr txBox="1"/>
+          <p:nvPr/>
+        </p:nvSpPr>
+        <p:spPr>
+          <a:xfrm>
+            <a:off x="7955280" y="1874520"/>
+            <a:ext cx="3657600" cy="457200"/>
           </a:xfrm>
           <a:prstGeom prst="rect">
             <a:avLst/>
@@ -11039,155 +14747,63 @@
               <a:buNone/>
             </a:pPr>
             <a:r>
-              <a:rPr lang="en-US" sz="2200" b="1" dirty="0">
+              <a:rPr lang="en-US" sz="2600" b="1" dirty="0">
                 <a:solidFill>
                   <a:schemeClr val="tx1"/>
                 </a:solidFill>
               </a:rPr>
-              <a:t>Real</a:t>
-            </a:r>
-            <a:endParaRPr lang="en-US" sz="2200" dirty="0"/>
-          </a:p>
-        </p:txBody>
-      </p:sp>
-      <p:sp>
-        <p:nvSpPr>
-          <p:cNvPr id="6" name="Lista Real"/>
-          <p:cNvSpPr txBox="1"/>
-          <p:nvPr/>
-        </p:nvSpPr>
-        <p:spPr>
-          <a:xfrm>
-            <a:off x="822960" y="2468880"/>
-            <a:ext cx="3017520" cy="2194560"/>
-          </a:xfrm>
-          <a:prstGeom prst="rect">
-            <a:avLst/>
-          </a:prstGeom>
-          <a:noFill/>
-          <a:ln/>
-        </p:spPr>
-        <p:txBody>
-          <a:bodyPr wrap="square" lIns="0" tIns="0" rIns="0" bIns="0" rtlCol="0" anchor="t"/>
-          <a:lstStyle/>
-          <a:p>
-            <a:pPr marL="177800" indent="-177800">
-              <a:spcAft>
-                <a:spcPts val="600"/>
-              </a:spcAft>
-              <a:buSzPct val="100000"/>
-              <a:buChar char="•"/>
-            </a:pPr>
-            <a:r>
-              <a:rPr lang="en-US" sz="1400" dirty="0">
-                <a:solidFill>
-                  <a:schemeClr val="tx1"/>
-                </a:solidFill>
-              </a:rPr>
-              <a:t>Recepción con idempotencia y límite de solicitudes</a:t>
-            </a:r>
-            <a:endParaRPr lang="en-US" sz="1400" dirty="0"/>
-          </a:p>
-          <a:p>
-            <a:pPr marL="177800" indent="-177800">
-              <a:spcAft>
-                <a:spcPts val="600"/>
-              </a:spcAft>
-              <a:buSzPct val="100000"/>
-              <a:buChar char="•"/>
-            </a:pPr>
-            <a:r>
-              <a:rPr lang="en-US" sz="1400" dirty="0">
-                <a:solidFill>
-                  <a:schemeClr val="tx1"/>
-                </a:solidFill>
-              </a:rPr>
-              <a:t>Colas por prioridad y máquina de estados</a:t>
-            </a:r>
-            <a:endParaRPr lang="en-US" sz="1400" dirty="0"/>
-          </a:p>
-          <a:p>
-            <a:pPr marL="177800" indent="-177800">
-              <a:spcAft>
-                <a:spcPts val="600"/>
-              </a:spcAft>
-              <a:buSzPct val="100000"/>
-              <a:buChar char="•"/>
-            </a:pPr>
-            <a:r>
-              <a:rPr lang="en-US" sz="1400" dirty="0">
-                <a:solidFill>
-                  <a:schemeClr val="tx1"/>
-                </a:solidFill>
-              </a:rPr>
-              <a:t>Reintentos, fallback, intentos y bitácora en Postgres</a:t>
-            </a:r>
-            <a:endParaRPr lang="en-US" sz="1400" dirty="0"/>
-          </a:p>
-          <a:p>
-            <a:pPr marL="177800" indent="-177800">
-              <a:spcAft>
-                <a:spcPts val="600"/>
-              </a:spcAft>
-              <a:buSzPct val="100000"/>
-              <a:buChar char="•"/>
-            </a:pPr>
-            <a:r>
-              <a:rPr lang="en-US" sz="1400" dirty="0">
-                <a:solidFill>
-                  <a:schemeClr val="tx1"/>
-                </a:solidFill>
-              </a:rPr>
-              <a:t>API, SDK y consola web</a:t>
-            </a:r>
-            <a:endParaRPr lang="en-US" sz="1400" dirty="0"/>
-          </a:p>
-        </p:txBody>
-      </p:sp>
-      <p:sp>
-        <p:nvSpPr>
-          <p:cNvPr id="7" name="Columna Simulado"/>
-          <p:cNvSpPr/>
-          <p:nvPr/>
-        </p:nvSpPr>
-        <p:spPr>
-          <a:xfrm>
-            <a:off x="4297680" y="1508760"/>
-            <a:ext cx="3566160" cy="3246120"/>
-          </a:xfrm>
-          <a:prstGeom prst="roundRect">
-            <a:avLst>
-              <a:gd name="adj" fmla="val 3380"/>
-            </a:avLst>
-          </a:prstGeom>
-          <a:solidFill>
-            <a:schemeClr val="bg2"/>
-          </a:solidFill>
-          <a:ln w="6350">
-            <a:solidFill>
-              <a:schemeClr val="bg1"/>
-            </a:solidFill>
-            <a:prstDash val="solid"/>
-          </a:ln>
-          <a:effectLst>
-            <a:outerShdw sx="100000" sy="100000" kx="0" ky="0" algn="bl" rotWithShape="0" blurRad="76200" dist="25400" dir="5400000">
-              <a:srgbClr val="000000">
-                <a:alpha val="10000"/>
-              </a:srgbClr>
-            </a:outerShdw>
-          </a:effectLst>
-        </p:spPr>
-      </p:sp>
-      <p:sp>
-        <p:nvSpPr>
-          <p:cNvPr id="8" name="Marcador Simulado"/>
-          <p:cNvSpPr/>
-          <p:nvPr/>
-        </p:nvSpPr>
-        <p:spPr>
-          <a:xfrm>
-            <a:off x="4572000" y="1737360"/>
-            <a:ext cx="502920" cy="109728"/>
+              <a:t>pnpm</a:t>
+            </a:r>
+            <a:endParaRPr lang="en-US" sz="2600" dirty="0"/>
+          </a:p>
+        </p:txBody>
+      </p:sp>
+      <p:sp>
+        <p:nvSpPr>
+          <p:cNvPr id="29" name="Para qué 1"/>
+          <p:cNvSpPr txBox="1"/>
+          <p:nvPr/>
+        </p:nvSpPr>
+        <p:spPr>
+          <a:xfrm>
+            <a:off x="7955280" y="2377440"/>
+            <a:ext cx="3657600" cy="320040"/>
+          </a:xfrm>
+          <a:prstGeom prst="rect">
+            <a:avLst/>
+          </a:prstGeom>
+          <a:noFill/>
+          <a:ln/>
+        </p:spPr>
+        <p:txBody>
+          <a:bodyPr wrap="square" lIns="0" tIns="0" rIns="0" bIns="0" rtlCol="0" anchor="t"/>
+          <a:lstStyle/>
+          <a:p>
+            <a:pPr indent="0" marL="0">
+              <a:buNone/>
+            </a:pPr>
+            <a:r>
+              <a:rPr lang="en-US" sz="1500" dirty="0">
+                <a:solidFill>
+                  <a:schemeClr val="tx2"/>
+                </a:solidFill>
+              </a:rPr>
+              <a:t>comparte dependencias</a:t>
+            </a:r>
+            <a:endParaRPr lang="en-US" sz="1500" dirty="0"/>
+          </a:p>
+        </p:txBody>
+      </p:sp>
+      <p:sp>
+        <p:nvSpPr>
+          <p:cNvPr id="30" name="Marcador 2"/>
+          <p:cNvSpPr/>
+          <p:nvPr/>
+        </p:nvSpPr>
+        <p:spPr>
+          <a:xfrm>
+            <a:off x="7955280" y="3108960"/>
+            <a:ext cx="457200" cy="109728"/>
           </a:xfrm>
           <a:prstGeom prst="roundRect">
             <a:avLst>
@@ -11195,26 +14811,26 @@
             </a:avLst>
           </a:prstGeom>
           <a:solidFill>
-            <a:schemeClr val="accent1"/>
+            <a:schemeClr val="accent4"/>
           </a:solidFill>
           <a:ln w="12700">
             <a:solidFill>
-              <a:schemeClr val="accent1"/>
-            </a:solidFill>
-            <a:prstDash val="solid"/>
-          </a:ln>
-        </p:spPr>
-      </p:sp>
-      <p:sp>
-        <p:nvSpPr>
-          <p:cNvPr id="9" name="Título Simulado"/>
-          <p:cNvSpPr txBox="1"/>
-          <p:nvPr/>
-        </p:nvSpPr>
-        <p:spPr>
-          <a:xfrm>
-            <a:off x="4572000" y="1920240"/>
-            <a:ext cx="3017520" cy="411480"/>
+              <a:schemeClr val="accent4"/>
+            </a:solidFill>
+            <a:prstDash val="solid"/>
+          </a:ln>
+        </p:spPr>
+      </p:sp>
+      <p:sp>
+        <p:nvSpPr>
+          <p:cNvPr id="31" name="Herramienta 2"/>
+          <p:cNvSpPr txBox="1"/>
+          <p:nvPr/>
+        </p:nvSpPr>
+        <p:spPr>
+          <a:xfrm>
+            <a:off x="7955280" y="3291840"/>
+            <a:ext cx="3657600" cy="457200"/>
           </a:xfrm>
           <a:prstGeom prst="rect">
             <a:avLst/>
@@ -11230,137 +14846,63 @@
               <a:buNone/>
             </a:pPr>
             <a:r>
-              <a:rPr lang="en-US" sz="2200" b="1" dirty="0">
+              <a:rPr lang="en-US" sz="2600" b="1" dirty="0">
                 <a:solidFill>
                   <a:schemeClr val="tx1"/>
                 </a:solidFill>
               </a:rPr>
-              <a:t>Simulado</a:t>
-            </a:r>
-            <a:endParaRPr lang="en-US" sz="2200" dirty="0"/>
-          </a:p>
-        </p:txBody>
-      </p:sp>
-      <p:sp>
-        <p:nvSpPr>
-          <p:cNvPr id="10" name="Lista Simulado"/>
-          <p:cNvSpPr txBox="1"/>
-          <p:nvPr/>
-        </p:nvSpPr>
-        <p:spPr>
-          <a:xfrm>
-            <a:off x="4572000" y="2468880"/>
-            <a:ext cx="3017520" cy="2194560"/>
-          </a:xfrm>
-          <a:prstGeom prst="rect">
-            <a:avLst/>
-          </a:prstGeom>
-          <a:noFill/>
-          <a:ln/>
-        </p:spPr>
-        <p:txBody>
-          <a:bodyPr wrap="square" lIns="0" tIns="0" rIns="0" bIns="0" rtlCol="0" anchor="t"/>
-          <a:lstStyle/>
-          <a:p>
-            <a:pPr marL="177800" indent="-177800">
-              <a:spcAft>
-                <a:spcPts val="600"/>
-              </a:spcAft>
-              <a:buSzPct val="100000"/>
-              <a:buChar char="•"/>
-            </a:pPr>
-            <a:r>
-              <a:rPr lang="en-US" sz="1400" dirty="0">
-                <a:solidFill>
-                  <a:schemeClr val="tx1"/>
-                </a:solidFill>
-              </a:rPr>
-              <a:t>SendGrid, Twilio, FCM y webhook</a:t>
-            </a:r>
-            <a:endParaRPr lang="en-US" sz="1400" dirty="0"/>
-          </a:p>
-          <a:p>
-            <a:pPr marL="177800" indent="-177800">
-              <a:spcAft>
-                <a:spcPts val="600"/>
-              </a:spcAft>
-              <a:buSzPct val="100000"/>
-              <a:buChar char="•"/>
-            </a:pPr>
-            <a:r>
-              <a:rPr lang="en-US" sz="1400" dirty="0">
-                <a:solidFill>
-                  <a:schemeClr val="tx1"/>
-                </a:solidFill>
-              </a:rPr>
-              <a:t>Su comportamiento sale de la salud del proveedor: operativo, degradado o caído</a:t>
-            </a:r>
-            <a:endParaRPr lang="en-US" sz="1400" dirty="0"/>
-          </a:p>
-          <a:p>
-            <a:pPr marL="177800" indent="-177800">
-              <a:spcAft>
-                <a:spcPts val="600"/>
-              </a:spcAft>
-              <a:buSzPct val="100000"/>
-              <a:buChar char="•"/>
-            </a:pPr>
-            <a:r>
-              <a:rPr lang="en-US" sz="1400" dirty="0">
-                <a:solidFill>
-                  <a:schemeClr val="tx1"/>
-                </a:solidFill>
-              </a:rPr>
-              <a:t>Sirve para demostrar el fallback sin credenciales</a:t>
-            </a:r>
-            <a:endParaRPr lang="en-US" sz="1400" dirty="0"/>
-          </a:p>
-        </p:txBody>
-      </p:sp>
-      <p:sp>
-        <p:nvSpPr>
-          <p:cNvPr id="11" name="Columna Pendiente"/>
-          <p:cNvSpPr/>
-          <p:nvPr/>
-        </p:nvSpPr>
-        <p:spPr>
-          <a:xfrm>
-            <a:off x="8046720" y="1508760"/>
-            <a:ext cx="3566160" cy="3246120"/>
-          </a:xfrm>
-          <a:prstGeom prst="roundRect">
-            <a:avLst>
-              <a:gd name="adj" fmla="val 3380"/>
-            </a:avLst>
-          </a:prstGeom>
-          <a:solidFill>
-            <a:schemeClr val="bg2"/>
-          </a:solidFill>
-          <a:ln w="6350">
-            <a:solidFill>
-              <a:schemeClr val="bg1"/>
-            </a:solidFill>
-            <a:prstDash val="solid"/>
-          </a:ln>
-          <a:effectLst>
-            <a:outerShdw sx="100000" sy="100000" kx="0" ky="0" algn="bl" rotWithShape="0" blurRad="76200" dist="25400" dir="5400000">
-              <a:srgbClr val="000000">
-                <a:alpha val="10000"/>
-              </a:srgbClr>
-            </a:outerShdw>
-          </a:effectLst>
-        </p:spPr>
-      </p:sp>
-      <p:sp>
-        <p:nvSpPr>
-          <p:cNvPr id="12" name="Marcador Pendiente"/>
-          <p:cNvSpPr/>
-          <p:nvPr/>
-        </p:nvSpPr>
-        <p:spPr>
-          <a:xfrm>
-            <a:off x="8321040" y="1737360"/>
-            <a:ext cx="502920" cy="109728"/>
+              <a:t>Turborepo</a:t>
+            </a:r>
+            <a:endParaRPr lang="en-US" sz="2600" dirty="0"/>
+          </a:p>
+        </p:txBody>
+      </p:sp>
+      <p:sp>
+        <p:nvSpPr>
+          <p:cNvPr id="32" name="Para qué 2"/>
+          <p:cNvSpPr txBox="1"/>
+          <p:nvPr/>
+        </p:nvSpPr>
+        <p:spPr>
+          <a:xfrm>
+            <a:off x="7955280" y="3794760"/>
+            <a:ext cx="3657600" cy="320040"/>
+          </a:xfrm>
+          <a:prstGeom prst="rect">
+            <a:avLst/>
+          </a:prstGeom>
+          <a:noFill/>
+          <a:ln/>
+        </p:spPr>
+        <p:txBody>
+          <a:bodyPr wrap="square" lIns="0" tIns="0" rIns="0" bIns="0" rtlCol="0" anchor="t"/>
+          <a:lstStyle/>
+          <a:p>
+            <a:pPr indent="0" marL="0">
+              <a:buNone/>
+            </a:pPr>
+            <a:r>
+              <a:rPr lang="en-US" sz="1500" dirty="0">
+                <a:solidFill>
+                  <a:schemeClr val="tx2"/>
+                </a:solidFill>
+              </a:rPr>
+              <a:t>construye y prueba en orden</a:t>
+            </a:r>
+            <a:endParaRPr lang="en-US" sz="1500" dirty="0"/>
+          </a:p>
+        </p:txBody>
+      </p:sp>
+      <p:sp>
+        <p:nvSpPr>
+          <p:cNvPr id="33" name="Marcador 3"/>
+          <p:cNvSpPr/>
+          <p:nvPr/>
+        </p:nvSpPr>
+        <p:spPr>
+          <a:xfrm>
+            <a:off x="7955280" y="4526280"/>
+            <a:ext cx="457200" cy="109728"/>
           </a:xfrm>
           <a:prstGeom prst="roundRect">
             <a:avLst>
@@ -11368,26 +14910,26 @@
             </a:avLst>
           </a:prstGeom>
           <a:solidFill>
-            <a:schemeClr val="accent4"/>
+            <a:schemeClr val="accent6"/>
           </a:solidFill>
           <a:ln w="12700">
             <a:solidFill>
-              <a:schemeClr val="accent4"/>
-            </a:solidFill>
-            <a:prstDash val="solid"/>
-          </a:ln>
-        </p:spPr>
-      </p:sp>
-      <p:sp>
-        <p:nvSpPr>
-          <p:cNvPr id="13" name="Título Pendiente"/>
-          <p:cNvSpPr txBox="1"/>
-          <p:nvPr/>
-        </p:nvSpPr>
-        <p:spPr>
-          <a:xfrm>
-            <a:off x="8321040" y="1920240"/>
-            <a:ext cx="3017520" cy="411480"/>
+              <a:schemeClr val="accent6"/>
+            </a:solidFill>
+            <a:prstDash val="solid"/>
+          </a:ln>
+        </p:spPr>
+      </p:sp>
+      <p:sp>
+        <p:nvSpPr>
+          <p:cNvPr id="34" name="Herramienta 3"/>
+          <p:cNvSpPr txBox="1"/>
+          <p:nvPr/>
+        </p:nvSpPr>
+        <p:spPr>
+          <a:xfrm>
+            <a:off x="7955280" y="4709160"/>
+            <a:ext cx="3657600" cy="457200"/>
           </a:xfrm>
           <a:prstGeom prst="rect">
             <a:avLst/>
@@ -11403,103 +14945,27 @@
               <a:buNone/>
             </a:pPr>
             <a:r>
-              <a:rPr lang="en-US" sz="2200" b="1" dirty="0">
+              <a:rPr lang="en-US" sz="2600" b="1" dirty="0">
                 <a:solidFill>
                   <a:schemeClr val="tx1"/>
                 </a:solidFill>
               </a:rPr>
-              <a:t>Pendiente</a:t>
-            </a:r>
-            <a:endParaRPr lang="en-US" sz="2200" dirty="0"/>
-          </a:p>
-        </p:txBody>
-      </p:sp>
-      <p:sp>
-        <p:nvSpPr>
-          <p:cNvPr id="14" name="Lista Pendiente"/>
-          <p:cNvSpPr txBox="1"/>
-          <p:nvPr/>
-        </p:nvSpPr>
-        <p:spPr>
-          <a:xfrm>
-            <a:off x="8321040" y="2468880"/>
-            <a:ext cx="3017520" cy="2194560"/>
-          </a:xfrm>
-          <a:prstGeom prst="rect">
-            <a:avLst/>
-          </a:prstGeom>
-          <a:noFill/>
-          <a:ln/>
-        </p:spPr>
-        <p:txBody>
-          <a:bodyPr wrap="square" lIns="0" tIns="0" rIns="0" bIns="0" rtlCol="0" anchor="t"/>
-          <a:lstStyle/>
-          <a:p>
-            <a:pPr marL="177800" indent="-177800">
-              <a:spcAft>
-                <a:spcPts val="600"/>
-              </a:spcAft>
-              <a:buSzPct val="100000"/>
-              <a:buChar char="•"/>
-            </a:pPr>
-            <a:r>
-              <a:rPr lang="en-US" sz="1400" dirty="0">
-                <a:solidFill>
-                  <a:schemeClr val="tx1"/>
-                </a:solidFill>
-              </a:rPr>
-              <a:t>Adaptadores reales de los proveedores</a:t>
-            </a:r>
-            <a:endParaRPr lang="en-US" sz="1400" dirty="0"/>
-          </a:p>
-          <a:p>
-            <a:pPr marL="177800" indent="-177800">
-              <a:spcAft>
-                <a:spcPts val="600"/>
-              </a:spcAft>
-              <a:buSzPct val="100000"/>
-              <a:buChar char="•"/>
-            </a:pPr>
-            <a:r>
-              <a:rPr lang="en-US" sz="1400" dirty="0">
-                <a:solidFill>
-                  <a:schemeClr val="tx1"/>
-                </a:solidFill>
-              </a:rPr>
-              <a:t>Outbox y suscripciones por webhook</a:t>
-            </a:r>
-            <a:endParaRPr lang="en-US" sz="1400" dirty="0"/>
-          </a:p>
-          <a:p>
-            <a:pPr marL="177800" indent="-177800">
-              <a:spcAft>
-                <a:spcPts val="600"/>
-              </a:spcAft>
-              <a:buSzPct val="100000"/>
-              <a:buChar char="•"/>
-            </a:pPr>
-            <a:r>
-              <a:rPr lang="en-US" sz="1400" dirty="0">
-                <a:solidFill>
-                  <a:schemeClr val="tx1"/>
-                </a:solidFill>
-              </a:rPr>
-              <a:t>Circuito de corte y revisión de salud activa</a:t>
-            </a:r>
-            <a:endParaRPr lang="en-US" sz="1400" dirty="0"/>
-          </a:p>
-        </p:txBody>
-      </p:sp>
-      <p:sp>
-        <p:nvSpPr>
-          <p:cNvPr id="15" name="Cifra 1"/>
-          <p:cNvSpPr txBox="1"/>
-          <p:nvPr/>
-        </p:nvSpPr>
-        <p:spPr>
-          <a:xfrm>
-            <a:off x="548640" y="5029200"/>
-            <a:ext cx="1097280" cy="731520"/>
+              <a:t>Un cambio</a:t>
+            </a:r>
+            <a:endParaRPr lang="en-US" sz="2600" dirty="0"/>
+          </a:p>
+        </p:txBody>
+      </p:sp>
+      <p:sp>
+        <p:nvSpPr>
+          <p:cNvPr id="35" name="Para qué 3"/>
+          <p:cNvSpPr txBox="1"/>
+          <p:nvPr/>
+        </p:nvSpPr>
+        <p:spPr>
+          <a:xfrm>
+            <a:off x="7955280" y="5212080"/>
+            <a:ext cx="3657600" cy="320040"/>
           </a:xfrm>
           <a:prstGeom prst="rect">
             <a:avLst/>
@@ -11515,27 +14981,54 @@
               <a:buNone/>
             </a:pPr>
             <a:r>
-              <a:rPr lang="en-US" sz="4400" b="1" dirty="0">
-                <a:solidFill>
-                  <a:schemeClr val="tx1"/>
-                </a:solidFill>
-              </a:rPr>
-              <a:t>148</a:t>
-            </a:r>
-            <a:endParaRPr lang="en-US" sz="4400" dirty="0"/>
-          </a:p>
-        </p:txBody>
-      </p:sp>
-      <p:sp>
-        <p:nvSpPr>
-          <p:cNvPr id="16" name="Etiqueta 1"/>
-          <p:cNvSpPr txBox="1"/>
-          <p:nvPr/>
-        </p:nvSpPr>
-        <p:spPr>
-          <a:xfrm>
-            <a:off x="1737360" y="5257800"/>
-            <a:ext cx="2468880" cy="457200"/>
+              <a:rPr lang="en-US" sz="1500" dirty="0">
+                <a:solidFill>
+                  <a:schemeClr val="tx2"/>
+                </a:solidFill>
+              </a:rPr>
+              <a:t>se prueba en todo lo que lo usa</a:t>
+            </a:r>
+            <a:endParaRPr lang="en-US" sz="1500" dirty="0"/>
+          </a:p>
+        </p:txBody>
+      </p:sp>
+      <p:sp>
+        <p:nvSpPr>
+          <p:cNvPr id="36" name="Comando fondo"/>
+          <p:cNvSpPr/>
+          <p:nvPr/>
+        </p:nvSpPr>
+        <p:spPr>
+          <a:xfrm>
+            <a:off x="548640" y="5760720"/>
+            <a:ext cx="3840480" cy="420624"/>
+          </a:xfrm>
+          <a:prstGeom prst="roundRect">
+            <a:avLst>
+              <a:gd name="adj" fmla="val 17391"/>
+            </a:avLst>
+          </a:prstGeom>
+          <a:solidFill>
+            <a:schemeClr val="tx1"/>
+          </a:solidFill>
+          <a:ln w="12700">
+            <a:solidFill>
+              <a:schemeClr val="tx1"/>
+            </a:solidFill>
+            <a:prstDash val="solid"/>
+          </a:ln>
+        </p:spPr>
+      </p:sp>
+      <p:sp>
+        <p:nvSpPr>
+          <p:cNvPr id="37" name="Comando"/>
+          <p:cNvSpPr txBox="1"/>
+          <p:nvPr/>
+        </p:nvSpPr>
+        <p:spPr>
+          <a:xfrm>
+            <a:off x="777240" y="5833872"/>
+            <a:ext cx="3474720" cy="274320"/>
           </a:xfrm>
           <a:prstGeom prst="rect">
             <a:avLst/>
@@ -11553,154 +15046,13 @@
             <a:r>
               <a:rPr lang="en-US" sz="1600" dirty="0">
                 <a:solidFill>
-                  <a:schemeClr val="tx2"/>
-                </a:solidFill>
-              </a:rPr>
-              <a:t>pruebas automáticas</a:t>
-            </a:r>
-            <a:endParaRPr lang="en-US" sz="1600" dirty="0"/>
-          </a:p>
-        </p:txBody>
-      </p:sp>
-      <p:sp>
-        <p:nvSpPr>
-          <p:cNvPr id="17" name="Cifra 2"/>
-          <p:cNvSpPr txBox="1"/>
-          <p:nvPr/>
-        </p:nvSpPr>
-        <p:spPr>
-          <a:xfrm>
-            <a:off x="4297680" y="5029200"/>
-            <a:ext cx="1097280" cy="731520"/>
-          </a:xfrm>
-          <a:prstGeom prst="rect">
-            <a:avLst/>
-          </a:prstGeom>
-          <a:noFill/>
-          <a:ln/>
-        </p:spPr>
-        <p:txBody>
-          <a:bodyPr wrap="square" lIns="0" tIns="0" rIns="0" bIns="0" rtlCol="0" anchor="t"/>
-          <a:lstStyle/>
-          <a:p>
-            <a:pPr indent="0" marL="0">
-              <a:buNone/>
-            </a:pPr>
-            <a:r>
-              <a:rPr lang="en-US" sz="4400" b="1" dirty="0">
-                <a:solidFill>
-                  <a:schemeClr val="tx1"/>
-                </a:solidFill>
-              </a:rPr>
-              <a:t>8</a:t>
-            </a:r>
-            <a:endParaRPr lang="en-US" sz="4400" dirty="0"/>
-          </a:p>
-        </p:txBody>
-      </p:sp>
-      <p:sp>
-        <p:nvSpPr>
-          <p:cNvPr id="18" name="Etiqueta 2"/>
-          <p:cNvSpPr txBox="1"/>
-          <p:nvPr/>
-        </p:nvSpPr>
-        <p:spPr>
-          <a:xfrm>
-            <a:off x="5486400" y="5257800"/>
-            <a:ext cx="2468880" cy="457200"/>
-          </a:xfrm>
-          <a:prstGeom prst="rect">
-            <a:avLst/>
-          </a:prstGeom>
-          <a:noFill/>
-          <a:ln/>
-        </p:spPr>
-        <p:txBody>
-          <a:bodyPr wrap="square" lIns="0" tIns="0" rIns="0" bIns="0" rtlCol="0" anchor="t"/>
-          <a:lstStyle/>
-          <a:p>
-            <a:pPr indent="0" marL="0">
-              <a:buNone/>
-            </a:pPr>
-            <a:r>
-              <a:rPr lang="en-US" sz="1600" dirty="0">
-                <a:solidFill>
-                  <a:schemeClr val="tx2"/>
-                </a:solidFill>
-              </a:rPr>
-              <a:t>paquetes del monorepo</a:t>
-            </a:r>
-            <a:endParaRPr lang="en-US" sz="1600" dirty="0"/>
-          </a:p>
-        </p:txBody>
-      </p:sp>
-      <p:sp>
-        <p:nvSpPr>
-          <p:cNvPr id="19" name="Cifra 3"/>
-          <p:cNvSpPr txBox="1"/>
-          <p:nvPr/>
-        </p:nvSpPr>
-        <p:spPr>
-          <a:xfrm>
-            <a:off x="8046720" y="5029200"/>
-            <a:ext cx="1097280" cy="731520"/>
-          </a:xfrm>
-          <a:prstGeom prst="rect">
-            <a:avLst/>
-          </a:prstGeom>
-          <a:noFill/>
-          <a:ln/>
-        </p:spPr>
-        <p:txBody>
-          <a:bodyPr wrap="square" lIns="0" tIns="0" rIns="0" bIns="0" rtlCol="0" anchor="t"/>
-          <a:lstStyle/>
-          <a:p>
-            <a:pPr indent="0" marL="0">
-              <a:buNone/>
-            </a:pPr>
-            <a:r>
-              <a:rPr lang="en-US" sz="4400" b="1" dirty="0">
-                <a:solidFill>
-                  <a:schemeClr val="tx1"/>
-                </a:solidFill>
-              </a:rPr>
-              <a:t>0</a:t>
-            </a:r>
-            <a:endParaRPr lang="en-US" sz="4400" dirty="0"/>
-          </a:p>
-        </p:txBody>
-      </p:sp>
-      <p:sp>
-        <p:nvSpPr>
-          <p:cNvPr id="20" name="Etiqueta 3"/>
-          <p:cNvSpPr txBox="1"/>
-          <p:nvPr/>
-        </p:nvSpPr>
-        <p:spPr>
-          <a:xfrm>
-            <a:off x="9235440" y="5257800"/>
-            <a:ext cx="2468880" cy="457200"/>
-          </a:xfrm>
-          <a:prstGeom prst="rect">
-            <a:avLst/>
-          </a:prstGeom>
-          <a:noFill/>
-          <a:ln/>
-        </p:spPr>
-        <p:txBody>
-          <a:bodyPr wrap="square" lIns="0" tIns="0" rIns="0" bIns="0" rtlCol="0" anchor="t"/>
-          <a:lstStyle/>
-          <a:p>
-            <a:pPr indent="0" marL="0">
-              <a:buNone/>
-            </a:pPr>
-            <a:r>
-              <a:rPr lang="en-US" sz="1600" dirty="0">
-                <a:solidFill>
-                  <a:schemeClr val="tx2"/>
-                </a:solidFill>
-              </a:rPr>
-              <a:t>secretos expuestos</a:t>
+                  <a:schemeClr val="bg1"/>
+                </a:solidFill>
+                <a:latin typeface="Courier New" pitchFamily="34" charset="0"/>
+                <a:ea typeface="Courier New" pitchFamily="34" charset="-122"/>
+                <a:cs typeface="Courier New" pitchFamily="34" charset="-120"/>
+              </a:rPr>
+              <a:t>$ pnpm test</a:t>
             </a:r>
             <a:endParaRPr lang="en-US" sz="1600" dirty="0"/>
           </a:p>
